--- a/output/presentations/06-rag-agentic-rag.pptx
+++ b/output/presentations/06-rag-agentic-rag.pptx
@@ -2,22 +2,24 @@
 <file path=ppt/presentation.xml><?xml version="1.0" encoding="utf-8"?>
 <p:presentation xmlns:p="http://schemas.openxmlformats.org/presentationml/2006/main">
   <p:sldMasterIdLst>
-    <p:sldMasterId xmlns:r="http://schemas.openxmlformats.org/officeDocument/2006/relationships" id="2147483648" r:id="Rb27e2f7c263942c9"/>
+    <p:sldMasterId xmlns:r="http://schemas.openxmlformats.org/officeDocument/2006/relationships" id="2147483648" r:id="R96c048e91c6f4890"/>
   </p:sldMasterIdLst>
   <p:notesMasterIdLst>
-    <p:notesMasterId xmlns:r="http://schemas.openxmlformats.org/officeDocument/2006/relationships" r:id="R56daaa62a3ad4cbb"/>
+    <p:notesMasterId xmlns:r="http://schemas.openxmlformats.org/officeDocument/2006/relationships" r:id="R66f8381f58db43ed"/>
   </p:notesMasterIdLst>
   <p:sldIdLst>
-    <p:sldId xmlns:r="http://schemas.openxmlformats.org/officeDocument/2006/relationships" id="256" r:id="R2eec351db3044056"/>
-    <p:sldId xmlns:r="http://schemas.openxmlformats.org/officeDocument/2006/relationships" id="257" r:id="Re0704f32830d41d5"/>
-    <p:sldId xmlns:r="http://schemas.openxmlformats.org/officeDocument/2006/relationships" id="258" r:id="Rdaeb84a1db7647fa"/>
-    <p:sldId xmlns:r="http://schemas.openxmlformats.org/officeDocument/2006/relationships" id="259" r:id="R511badf90e76442d"/>
-    <p:sldId xmlns:r="http://schemas.openxmlformats.org/officeDocument/2006/relationships" id="260" r:id="R822ba3a8287d42f1"/>
-    <p:sldId xmlns:r="http://schemas.openxmlformats.org/officeDocument/2006/relationships" id="261" r:id="R05e328ceff064426"/>
-    <p:sldId xmlns:r="http://schemas.openxmlformats.org/officeDocument/2006/relationships" id="262" r:id="R17651749b8be4d7d"/>
-    <p:sldId xmlns:r="http://schemas.openxmlformats.org/officeDocument/2006/relationships" id="263" r:id="R9fe13a319dbb4a2d"/>
-    <p:sldId xmlns:r="http://schemas.openxmlformats.org/officeDocument/2006/relationships" id="264" r:id="R25295a1523cf4a0e"/>
-    <p:sldId xmlns:r="http://schemas.openxmlformats.org/officeDocument/2006/relationships" id="265" r:id="R49b4100784ff4b03"/>
+    <p:sldId xmlns:r="http://schemas.openxmlformats.org/officeDocument/2006/relationships" id="256" r:id="R98f09a8042a2409d"/>
+    <p:sldId xmlns:r="http://schemas.openxmlformats.org/officeDocument/2006/relationships" id="257" r:id="Rafd8140cc6f74f17"/>
+    <p:sldId xmlns:r="http://schemas.openxmlformats.org/officeDocument/2006/relationships" id="258" r:id="Rb27352d305044cff"/>
+    <p:sldId xmlns:r="http://schemas.openxmlformats.org/officeDocument/2006/relationships" id="259" r:id="R3a7184630f7e4af3"/>
+    <p:sldId xmlns:r="http://schemas.openxmlformats.org/officeDocument/2006/relationships" id="260" r:id="Rb013f9dfd29344e5"/>
+    <p:sldId xmlns:r="http://schemas.openxmlformats.org/officeDocument/2006/relationships" id="261" r:id="R0e255b1e5a094162"/>
+    <p:sldId xmlns:r="http://schemas.openxmlformats.org/officeDocument/2006/relationships" id="262" r:id="R9db20f92522948eb"/>
+    <p:sldId xmlns:r="http://schemas.openxmlformats.org/officeDocument/2006/relationships" id="263" r:id="Rca944689c142470c"/>
+    <p:sldId xmlns:r="http://schemas.openxmlformats.org/officeDocument/2006/relationships" id="264" r:id="R85cf2f8732ce4b19"/>
+    <p:sldId xmlns:r="http://schemas.openxmlformats.org/officeDocument/2006/relationships" id="265" r:id="Rd18c595e1b6d4c84"/>
+    <p:sldId xmlns:r="http://schemas.openxmlformats.org/officeDocument/2006/relationships" id="266" r:id="Rffc3dcb15bae4de4"/>
+    <p:sldId xmlns:r="http://schemas.openxmlformats.org/officeDocument/2006/relationships" id="267" r:id="Rb6132d19c86842c9"/>
   </p:sldIdLst>
   <p:sldSz cx="12192000" cy="6858000"/>
   <p:notesSz cx="6858000" cy="9144000"/>
@@ -461,12 +463,52 @@
           </a:p>
           <a:p xmlns:a="http://schemas.openxmlformats.org/drawingml/2006/main">
             <a:r>
+              <a:t>Edition: 2026-09-09</a:t>
+            </a:r>
+          </a:p>
+          <a:p xmlns:a="http://schemas.openxmlformats.org/drawingml/2006/main">
+            <a:r>
+              <a:t/>
+            </a:r>
+          </a:p>
+          <a:p xmlns:a="http://schemas.openxmlformats.org/drawingml/2006/main">
+            <a:r>
               <a:t>[Sources]</a:t>
             </a:r>
           </a:p>
           <a:p xmlns:a="http://schemas.openxmlformats.org/drawingml/2006/main">
             <a:r>
-              <a:t>- Supplied source presentation: 06-rag-agentic-rag.pdf</a:t>
+              <a:t>- Original source presentation: 06-rag-agentic-rag.pdf</a:t>
+            </a:r>
+          </a:p>
+          <a:p xmlns:a="http://schemas.openxmlformats.org/drawingml/2006/main">
+            <a:r>
+              <a:t>- S4: Gemini structured outputs. Google documentation, accessed, 2026-09-09. https://ai.google.dev/gemini-api/docs/structured-output Supported schemas constrain structure. Application validation must check meaning and policy.</a:t>
+            </a:r>
+          </a:p>
+          <a:p xmlns:a="http://schemas.openxmlformats.org/drawingml/2006/main">
+            <a:r>
+              <a:t/>
+            </a:r>
+          </a:p>
+          <a:p xmlns:a="http://schemas.openxmlformats.org/drawingml/2006/main">
+            <a:r>
+              <a:t>[Assessed practice]</a:t>
+            </a:r>
+          </a:p>
+          <a:p xmlns:a="http://schemas.openxmlformats.org/drawingml/2006/main">
+            <a:r>
+              <a:t>Complete Lab 6 and add unknown, conflicting, and irrelevant records. Compare zero repair with one repair using a fixed question set.</a:t>
+            </a:r>
+          </a:p>
+          <a:p xmlns:a="http://schemas.openxmlformats.org/drawingml/2006/main">
+            <a:r>
+              <a:t>Acceptance: Report retrieval hits, unsupported answers, abstentions, and attempts separately. A known citation ID alone does not count as grounded correctness.</a:t>
+            </a:r>
+          </a:p>
+          <a:p xmlns:a="http://schemas.openxmlformats.org/drawingml/2006/main">
+            <a:r>
+              <a:t>Lab: labs/06_langgraph_corrective_rag.ipynb</a:t>
             </a:r>
           </a:p>
         </p:txBody>
@@ -536,6 +578,131 @@
           <a:lstStyle xmlns:a="http://schemas.openxmlformats.org/drawingml/2006/main"/>
           <a:p xmlns:a="http://schemas.openxmlformats.org/drawingml/2006/main">
             <a:r>
+              <a:t>Use as retrieval practice. Ask for an answer that defines, compares, traces, and evaluates.</a:t>
+            </a:r>
+          </a:p>
+          <a:p xmlns:a="http://schemas.openxmlformats.org/drawingml/2006/main">
+            <a:r>
+              <a:t/>
+            </a:r>
+          </a:p>
+          <a:p xmlns:a="http://schemas.openxmlformats.org/drawingml/2006/main">
+            <a:r>
+              <a:t>Edition: 2026-09-09</a:t>
+            </a:r>
+          </a:p>
+          <a:p xmlns:a="http://schemas.openxmlformats.org/drawingml/2006/main">
+            <a:r>
+              <a:t/>
+            </a:r>
+          </a:p>
+          <a:p xmlns:a="http://schemas.openxmlformats.org/drawingml/2006/main">
+            <a:r>
+              <a:t>[Sources]</a:t>
+            </a:r>
+          </a:p>
+          <a:p xmlns:a="http://schemas.openxmlformats.org/drawingml/2006/main">
+            <a:r>
+              <a:t>- Original source presentation: 06-rag-agentic-rag.pdf</a:t>
+            </a:r>
+          </a:p>
+          <a:p xmlns:a="http://schemas.openxmlformats.org/drawingml/2006/main">
+            <a:r>
+              <a:t>- S4: Gemini structured outputs. Google documentation, accessed, 2026-09-09. https://ai.google.dev/gemini-api/docs/structured-output Supported schemas constrain structure. Application validation must check meaning and policy.</a:t>
+            </a:r>
+          </a:p>
+          <a:p xmlns:a="http://schemas.openxmlformats.org/drawingml/2006/main">
+            <a:r>
+              <a:t/>
+            </a:r>
+          </a:p>
+          <a:p xmlns:a="http://schemas.openxmlformats.org/drawingml/2006/main">
+            <a:r>
+              <a:t>[Assessed practice]</a:t>
+            </a:r>
+          </a:p>
+          <a:p xmlns:a="http://schemas.openxmlformats.org/drawingml/2006/main">
+            <a:r>
+              <a:t>Complete Lab 6 and add unknown, conflicting, and irrelevant records. Compare zero repair with one repair using a fixed question set.</a:t>
+            </a:r>
+          </a:p>
+          <a:p xmlns:a="http://schemas.openxmlformats.org/drawingml/2006/main">
+            <a:r>
+              <a:t>Acceptance: Report retrieval hits, unsupported answers, abstentions, and attempts separately. A known citation ID alone does not count as grounded correctness.</a:t>
+            </a:r>
+          </a:p>
+          <a:p xmlns:a="http://schemas.openxmlformats.org/drawingml/2006/main">
+            <a:r>
+              <a:t>Lab: labs/06_langgraph_corrective_rag.ipynb</a:t>
+            </a:r>
+          </a:p>
+        </p:txBody>
+      </p:sp>
+      <p:sp>
+        <p:nvSpPr>
+          <p:cNvPr id="4" name="Slide Number Placeholder 3"/>
+          <p:cNvSpPr>
+            <a:spLocks xmlns:a="http://schemas.openxmlformats.org/drawingml/2006/main" noGrp="1"/>
+          </p:cNvSpPr>
+          <p:nvPr>
+            <p:ph type="sldNum" idx="5"/>
+          </p:nvPr>
+        </p:nvSpPr>
+        <p:spPr/>
+        <p:txBody>
+          <a:bodyPr xmlns:a="http://schemas.openxmlformats.org/drawingml/2006/main"/>
+          <a:lstStyle xmlns:a="http://schemas.openxmlformats.org/drawingml/2006/main"/>
+          <a:p xmlns:a="http://schemas.openxmlformats.org/drawingml/2006/main"/>
+        </p:txBody>
+      </p:sp>
+    </p:spTree>
+  </p:cSld>
+  <p:clrMapOvr>
+    <a:masterClrMapping xmlns:a="http://schemas.openxmlformats.org/drawingml/2006/main"/>
+  </p:clrMapOvr>
+</p:notes>
+</file>
+
+<file path=ppt/notesSlides/notesSlide11.xml><?xml version="1.0" encoding="utf-8"?>
+<p:notes xmlns:p="http://schemas.openxmlformats.org/presentationml/2006/main">
+  <p:cSld>
+    <p:spTree>
+      <p:nvGrpSpPr>
+        <p:cNvPr id="1" name=""/>
+        <p:cNvGrpSpPr/>
+        <p:nvPr/>
+      </p:nvGrpSpPr>
+      <p:grpSpPr>
+        <a:xfrm xmlns:a="http://schemas.openxmlformats.org/drawingml/2006/main"/>
+      </p:grpSpPr>
+      <p:sp>
+        <p:nvSpPr>
+          <p:cNvPr id="2" name="Slide Image Placeholder 1"/>
+          <p:cNvSpPr>
+            <a:spLocks xmlns:a="http://schemas.openxmlformats.org/drawingml/2006/main" noGrp="1"/>
+          </p:cNvSpPr>
+          <p:nvPr>
+            <p:ph type="sldImg" idx="0"/>
+          </p:nvPr>
+        </p:nvSpPr>
+        <p:spPr/>
+      </p:sp>
+      <p:sp>
+        <p:nvSpPr>
+          <p:cNvPr id="3" name="Notes Placeholder 2"/>
+          <p:cNvSpPr>
+            <a:spLocks xmlns:a="http://schemas.openxmlformats.org/drawingml/2006/main" noGrp="1"/>
+          </p:cNvSpPr>
+          <p:nvPr>
+            <p:ph type="body" idx="1"/>
+          </p:nvPr>
+        </p:nvSpPr>
+        <p:spPr/>
+        <p:txBody>
+          <a:bodyPr xmlns:a="http://schemas.openxmlformats.org/drawingml/2006/main"/>
+          <a:lstStyle xmlns:a="http://schemas.openxmlformats.org/drawingml/2006/main"/>
+          <a:p xmlns:a="http://schemas.openxmlformats.org/drawingml/2006/main">
+            <a:r>
               <a:t>Close by restating the four durable ideas and linking forward to the next chapter.</a:t>
             </a:r>
           </a:p>
@@ -546,12 +713,177 @@
           </a:p>
           <a:p xmlns:a="http://schemas.openxmlformats.org/drawingml/2006/main">
             <a:r>
+              <a:t>Edition: 2026-09-09</a:t>
+            </a:r>
+          </a:p>
+          <a:p xmlns:a="http://schemas.openxmlformats.org/drawingml/2006/main">
+            <a:r>
+              <a:t/>
+            </a:r>
+          </a:p>
+          <a:p xmlns:a="http://schemas.openxmlformats.org/drawingml/2006/main">
+            <a:r>
               <a:t>[Sources]</a:t>
             </a:r>
           </a:p>
           <a:p xmlns:a="http://schemas.openxmlformats.org/drawingml/2006/main">
             <a:r>
-              <a:t>- Supplied source presentation: 06-rag-agentic-rag.pdf</a:t>
+              <a:t>- Original source presentation: 06-rag-agentic-rag.pdf</a:t>
+            </a:r>
+          </a:p>
+          <a:p xmlns:a="http://schemas.openxmlformats.org/drawingml/2006/main">
+            <a:r>
+              <a:t>- S4: Gemini structured outputs. Google documentation, accessed, 2026-09-09. https://ai.google.dev/gemini-api/docs/structured-output Supported schemas constrain structure. Application validation must check meaning and policy.</a:t>
+            </a:r>
+          </a:p>
+          <a:p xmlns:a="http://schemas.openxmlformats.org/drawingml/2006/main">
+            <a:r>
+              <a:t/>
+            </a:r>
+          </a:p>
+          <a:p xmlns:a="http://schemas.openxmlformats.org/drawingml/2006/main">
+            <a:r>
+              <a:t>[Assessed practice]</a:t>
+            </a:r>
+          </a:p>
+          <a:p xmlns:a="http://schemas.openxmlformats.org/drawingml/2006/main">
+            <a:r>
+              <a:t>Complete Lab 6 and add unknown, conflicting, and irrelevant records. Compare zero repair with one repair using a fixed question set.</a:t>
+            </a:r>
+          </a:p>
+          <a:p xmlns:a="http://schemas.openxmlformats.org/drawingml/2006/main">
+            <a:r>
+              <a:t>Acceptance: Report retrieval hits, unsupported answers, abstentions, and attempts separately. A known citation ID alone does not count as grounded correctness.</a:t>
+            </a:r>
+          </a:p>
+          <a:p xmlns:a="http://schemas.openxmlformats.org/drawingml/2006/main">
+            <a:r>
+              <a:t>Lab: labs/06_langgraph_corrective_rag.ipynb</a:t>
+            </a:r>
+          </a:p>
+        </p:txBody>
+      </p:sp>
+      <p:sp>
+        <p:nvSpPr>
+          <p:cNvPr id="4" name="Slide Number Placeholder 3"/>
+          <p:cNvSpPr>
+            <a:spLocks xmlns:a="http://schemas.openxmlformats.org/drawingml/2006/main" noGrp="1"/>
+          </p:cNvSpPr>
+          <p:nvPr>
+            <p:ph type="sldNum" idx="5"/>
+          </p:nvPr>
+        </p:nvSpPr>
+        <p:spPr/>
+        <p:txBody>
+          <a:bodyPr xmlns:a="http://schemas.openxmlformats.org/drawingml/2006/main"/>
+          <a:lstStyle xmlns:a="http://schemas.openxmlformats.org/drawingml/2006/main"/>
+          <a:p xmlns:a="http://schemas.openxmlformats.org/drawingml/2006/main"/>
+        </p:txBody>
+      </p:sp>
+    </p:spTree>
+  </p:cSld>
+  <p:clrMapOvr>
+    <a:masterClrMapping xmlns:a="http://schemas.openxmlformats.org/drawingml/2006/main"/>
+  </p:clrMapOvr>
+</p:notes>
+</file>
+
+<file path=ppt/notesSlides/notesSlide12.xml><?xml version="1.0" encoding="utf-8"?>
+<p:notes xmlns:p="http://schemas.openxmlformats.org/presentationml/2006/main">
+  <p:cSld>
+    <p:spTree>
+      <p:nvGrpSpPr>
+        <p:cNvPr id="1" name=""/>
+        <p:cNvGrpSpPr/>
+        <p:nvPr/>
+      </p:nvGrpSpPr>
+      <p:grpSpPr>
+        <a:xfrm xmlns:a="http://schemas.openxmlformats.org/drawingml/2006/main"/>
+      </p:grpSpPr>
+      <p:sp>
+        <p:nvSpPr>
+          <p:cNvPr id="2" name="Slide Image Placeholder 1"/>
+          <p:cNvSpPr>
+            <a:spLocks xmlns:a="http://schemas.openxmlformats.org/drawingml/2006/main" noGrp="1"/>
+          </p:cNvSpPr>
+          <p:nvPr>
+            <p:ph type="sldImg" idx="0"/>
+          </p:nvPr>
+        </p:nvSpPr>
+        <p:spPr/>
+      </p:sp>
+      <p:sp>
+        <p:nvSpPr>
+          <p:cNvPr id="3" name="Notes Placeholder 2"/>
+          <p:cNvSpPr>
+            <a:spLocks xmlns:a="http://schemas.openxmlformats.org/drawingml/2006/main" noGrp="1"/>
+          </p:cNvSpPr>
+          <p:nvPr>
+            <p:ph type="body" idx="1"/>
+          </p:nvPr>
+        </p:nvSpPr>
+        <p:spPr/>
+        <p:txBody>
+          <a:bodyPr xmlns:a="http://schemas.openxmlformats.org/drawingml/2006/main"/>
+          <a:lstStyle xmlns:a="http://schemas.openxmlformats.org/drawingml/2006/main"/>
+          <a:p xmlns:a="http://schemas.openxmlformats.org/drawingml/2006/main">
+            <a:r>
+              <a:t>Assess the submitted evidence with the stated acceptance check. Reading links and limitations follow.</a:t>
+            </a:r>
+          </a:p>
+          <a:p xmlns:a="http://schemas.openxmlformats.org/drawingml/2006/main">
+            <a:r>
+              <a:t/>
+            </a:r>
+          </a:p>
+          <a:p xmlns:a="http://schemas.openxmlformats.org/drawingml/2006/main">
+            <a:r>
+              <a:t>Edition: 2026-09-09</a:t>
+            </a:r>
+          </a:p>
+          <a:p xmlns:a="http://schemas.openxmlformats.org/drawingml/2006/main">
+            <a:r>
+              <a:t/>
+            </a:r>
+          </a:p>
+          <a:p xmlns:a="http://schemas.openxmlformats.org/drawingml/2006/main">
+            <a:r>
+              <a:t>[Sources]</a:t>
+            </a:r>
+          </a:p>
+          <a:p xmlns:a="http://schemas.openxmlformats.org/drawingml/2006/main">
+            <a:r>
+              <a:t>- Original source presentation: 06-rag-agentic-rag.pdf</a:t>
+            </a:r>
+          </a:p>
+          <a:p xmlns:a="http://schemas.openxmlformats.org/drawingml/2006/main">
+            <a:r>
+              <a:t>- S4: Gemini structured outputs. Google documentation, accessed, 2026-09-09. https://ai.google.dev/gemini-api/docs/structured-output Supported schemas constrain structure. Application validation must check meaning and policy.</a:t>
+            </a:r>
+          </a:p>
+          <a:p xmlns:a="http://schemas.openxmlformats.org/drawingml/2006/main">
+            <a:r>
+              <a:t/>
+            </a:r>
+          </a:p>
+          <a:p xmlns:a="http://schemas.openxmlformats.org/drawingml/2006/main">
+            <a:r>
+              <a:t>[Assessed practice]</a:t>
+            </a:r>
+          </a:p>
+          <a:p xmlns:a="http://schemas.openxmlformats.org/drawingml/2006/main">
+            <a:r>
+              <a:t>Complete Lab 6 and add unknown, conflicting, and irrelevant records. Compare zero repair with one repair using a fixed question set.</a:t>
+            </a:r>
+          </a:p>
+          <a:p xmlns:a="http://schemas.openxmlformats.org/drawingml/2006/main">
+            <a:r>
+              <a:t>Acceptance: Report retrieval hits, unsupported answers, abstentions, and attempts separately. A known citation ID alone does not count as grounded correctness.</a:t>
+            </a:r>
+          </a:p>
+          <a:p xmlns:a="http://schemas.openxmlformats.org/drawingml/2006/main">
+            <a:r>
+              <a:t>Lab: labs/06_langgraph_corrective_rag.ipynb</a:t>
             </a:r>
           </a:p>
         </p:txBody>
@@ -631,12 +963,52 @@
           </a:p>
           <a:p xmlns:a="http://schemas.openxmlformats.org/drawingml/2006/main">
             <a:r>
+              <a:t>Edition: 2026-09-09</a:t>
+            </a:r>
+          </a:p>
+          <a:p xmlns:a="http://schemas.openxmlformats.org/drawingml/2006/main">
+            <a:r>
+              <a:t/>
+            </a:r>
+          </a:p>
+          <a:p xmlns:a="http://schemas.openxmlformats.org/drawingml/2006/main">
+            <a:r>
               <a:t>[Sources]</a:t>
             </a:r>
           </a:p>
           <a:p xmlns:a="http://schemas.openxmlformats.org/drawingml/2006/main">
             <a:r>
-              <a:t>- Supplied source presentation: 06-rag-agentic-rag.pdf</a:t>
+              <a:t>- Original source presentation: 06-rag-agentic-rag.pdf</a:t>
+            </a:r>
+          </a:p>
+          <a:p xmlns:a="http://schemas.openxmlformats.org/drawingml/2006/main">
+            <a:r>
+              <a:t>- S4: Gemini structured outputs. Google documentation, accessed, 2026-09-09. https://ai.google.dev/gemini-api/docs/structured-output Supported schemas constrain structure. Application validation must check meaning and policy.</a:t>
+            </a:r>
+          </a:p>
+          <a:p xmlns:a="http://schemas.openxmlformats.org/drawingml/2006/main">
+            <a:r>
+              <a:t/>
+            </a:r>
+          </a:p>
+          <a:p xmlns:a="http://schemas.openxmlformats.org/drawingml/2006/main">
+            <a:r>
+              <a:t>[Assessed practice]</a:t>
+            </a:r>
+          </a:p>
+          <a:p xmlns:a="http://schemas.openxmlformats.org/drawingml/2006/main">
+            <a:r>
+              <a:t>Complete Lab 6 and add unknown, conflicting, and irrelevant records. Compare zero repair with one repair using a fixed question set.</a:t>
+            </a:r>
+          </a:p>
+          <a:p xmlns:a="http://schemas.openxmlformats.org/drawingml/2006/main">
+            <a:r>
+              <a:t>Acceptance: Report retrieval hits, unsupported answers, abstentions, and attempts separately. A known citation ID alone does not count as grounded correctness.</a:t>
+            </a:r>
+          </a:p>
+          <a:p xmlns:a="http://schemas.openxmlformats.org/drawingml/2006/main">
+            <a:r>
+              <a:t>Lab: labs/06_langgraph_corrective_rag.ipynb</a:t>
             </a:r>
           </a:p>
         </p:txBody>
@@ -716,12 +1088,52 @@
           </a:p>
           <a:p xmlns:a="http://schemas.openxmlformats.org/drawingml/2006/main">
             <a:r>
+              <a:t>Edition: 2026-09-09</a:t>
+            </a:r>
+          </a:p>
+          <a:p xmlns:a="http://schemas.openxmlformats.org/drawingml/2006/main">
+            <a:r>
+              <a:t/>
+            </a:r>
+          </a:p>
+          <a:p xmlns:a="http://schemas.openxmlformats.org/drawingml/2006/main">
+            <a:r>
               <a:t>[Sources]</a:t>
             </a:r>
           </a:p>
           <a:p xmlns:a="http://schemas.openxmlformats.org/drawingml/2006/main">
             <a:r>
-              <a:t>- Supplied source presentation: 06-rag-agentic-rag.pdf</a:t>
+              <a:t>- Original source presentation: 06-rag-agentic-rag.pdf</a:t>
+            </a:r>
+          </a:p>
+          <a:p xmlns:a="http://schemas.openxmlformats.org/drawingml/2006/main">
+            <a:r>
+              <a:t>- S4: Gemini structured outputs. Google documentation, accessed, 2026-09-09. https://ai.google.dev/gemini-api/docs/structured-output Supported schemas constrain structure. Application validation must check meaning and policy.</a:t>
+            </a:r>
+          </a:p>
+          <a:p xmlns:a="http://schemas.openxmlformats.org/drawingml/2006/main">
+            <a:r>
+              <a:t/>
+            </a:r>
+          </a:p>
+          <a:p xmlns:a="http://schemas.openxmlformats.org/drawingml/2006/main">
+            <a:r>
+              <a:t>[Assessed practice]</a:t>
+            </a:r>
+          </a:p>
+          <a:p xmlns:a="http://schemas.openxmlformats.org/drawingml/2006/main">
+            <a:r>
+              <a:t>Complete Lab 6 and add unknown, conflicting, and irrelevant records. Compare zero repair with one repair using a fixed question set.</a:t>
+            </a:r>
+          </a:p>
+          <a:p xmlns:a="http://schemas.openxmlformats.org/drawingml/2006/main">
+            <a:r>
+              <a:t>Acceptance: Report retrieval hits, unsupported answers, abstentions, and attempts separately. A known citation ID alone does not count as grounded correctness.</a:t>
+            </a:r>
+          </a:p>
+          <a:p xmlns:a="http://schemas.openxmlformats.org/drawingml/2006/main">
+            <a:r>
+              <a:t>Lab: labs/06_langgraph_corrective_rag.ipynb</a:t>
             </a:r>
           </a:p>
         </p:txBody>
@@ -801,12 +1213,52 @@
           </a:p>
           <a:p xmlns:a="http://schemas.openxmlformats.org/drawingml/2006/main">
             <a:r>
+              <a:t>Edition: 2026-09-09</a:t>
+            </a:r>
+          </a:p>
+          <a:p xmlns:a="http://schemas.openxmlformats.org/drawingml/2006/main">
+            <a:r>
+              <a:t/>
+            </a:r>
+          </a:p>
+          <a:p xmlns:a="http://schemas.openxmlformats.org/drawingml/2006/main">
+            <a:r>
               <a:t>[Sources]</a:t>
             </a:r>
           </a:p>
           <a:p xmlns:a="http://schemas.openxmlformats.org/drawingml/2006/main">
             <a:r>
-              <a:t>- Supplied source presentation: 06-rag-agentic-rag.pdf</a:t>
+              <a:t>- Original source presentation: 06-rag-agentic-rag.pdf</a:t>
+            </a:r>
+          </a:p>
+          <a:p xmlns:a="http://schemas.openxmlformats.org/drawingml/2006/main">
+            <a:r>
+              <a:t>- S4: Gemini structured outputs. Google documentation, accessed, 2026-09-09. https://ai.google.dev/gemini-api/docs/structured-output Supported schemas constrain structure. Application validation must check meaning and policy.</a:t>
+            </a:r>
+          </a:p>
+          <a:p xmlns:a="http://schemas.openxmlformats.org/drawingml/2006/main">
+            <a:r>
+              <a:t/>
+            </a:r>
+          </a:p>
+          <a:p xmlns:a="http://schemas.openxmlformats.org/drawingml/2006/main">
+            <a:r>
+              <a:t>[Assessed practice]</a:t>
+            </a:r>
+          </a:p>
+          <a:p xmlns:a="http://schemas.openxmlformats.org/drawingml/2006/main">
+            <a:r>
+              <a:t>Complete Lab 6 and add unknown, conflicting, and irrelevant records. Compare zero repair with one repair using a fixed question set.</a:t>
+            </a:r>
+          </a:p>
+          <a:p xmlns:a="http://schemas.openxmlformats.org/drawingml/2006/main">
+            <a:r>
+              <a:t>Acceptance: Report retrieval hits, unsupported answers, abstentions, and attempts separately. A known citation ID alone does not count as grounded correctness.</a:t>
+            </a:r>
+          </a:p>
+          <a:p xmlns:a="http://schemas.openxmlformats.org/drawingml/2006/main">
+            <a:r>
+              <a:t>Lab: labs/06_langgraph_corrective_rag.ipynb</a:t>
             </a:r>
           </a:p>
         </p:txBody>
@@ -886,12 +1338,52 @@
           </a:p>
           <a:p xmlns:a="http://schemas.openxmlformats.org/drawingml/2006/main">
             <a:r>
+              <a:t>Edition: 2026-09-09</a:t>
+            </a:r>
+          </a:p>
+          <a:p xmlns:a="http://schemas.openxmlformats.org/drawingml/2006/main">
+            <a:r>
+              <a:t/>
+            </a:r>
+          </a:p>
+          <a:p xmlns:a="http://schemas.openxmlformats.org/drawingml/2006/main">
+            <a:r>
               <a:t>[Sources]</a:t>
             </a:r>
           </a:p>
           <a:p xmlns:a="http://schemas.openxmlformats.org/drawingml/2006/main">
             <a:r>
-              <a:t>- Supplied source presentation: 06-rag-agentic-rag.pdf</a:t>
+              <a:t>- Original source presentation: 06-rag-agentic-rag.pdf</a:t>
+            </a:r>
+          </a:p>
+          <a:p xmlns:a="http://schemas.openxmlformats.org/drawingml/2006/main">
+            <a:r>
+              <a:t>- S4: Gemini structured outputs. Google documentation, accessed, 2026-09-09. https://ai.google.dev/gemini-api/docs/structured-output Supported schemas constrain structure. Application validation must check meaning and policy.</a:t>
+            </a:r>
+          </a:p>
+          <a:p xmlns:a="http://schemas.openxmlformats.org/drawingml/2006/main">
+            <a:r>
+              <a:t/>
+            </a:r>
+          </a:p>
+          <a:p xmlns:a="http://schemas.openxmlformats.org/drawingml/2006/main">
+            <a:r>
+              <a:t>[Assessed practice]</a:t>
+            </a:r>
+          </a:p>
+          <a:p xmlns:a="http://schemas.openxmlformats.org/drawingml/2006/main">
+            <a:r>
+              <a:t>Complete Lab 6 and add unknown, conflicting, and irrelevant records. Compare zero repair with one repair using a fixed question set.</a:t>
+            </a:r>
+          </a:p>
+          <a:p xmlns:a="http://schemas.openxmlformats.org/drawingml/2006/main">
+            <a:r>
+              <a:t>Acceptance: Report retrieval hits, unsupported answers, abstentions, and attempts separately. A known citation ID alone does not count as grounded correctness.</a:t>
+            </a:r>
+          </a:p>
+          <a:p xmlns:a="http://schemas.openxmlformats.org/drawingml/2006/main">
+            <a:r>
+              <a:t>Lab: labs/06_langgraph_corrective_rag.ipynb</a:t>
             </a:r>
           </a:p>
         </p:txBody>
@@ -971,12 +1463,52 @@
           </a:p>
           <a:p xmlns:a="http://schemas.openxmlformats.org/drawingml/2006/main">
             <a:r>
+              <a:t>Edition: 2026-09-09</a:t>
+            </a:r>
+          </a:p>
+          <a:p xmlns:a="http://schemas.openxmlformats.org/drawingml/2006/main">
+            <a:r>
+              <a:t/>
+            </a:r>
+          </a:p>
+          <a:p xmlns:a="http://schemas.openxmlformats.org/drawingml/2006/main">
+            <a:r>
               <a:t>[Sources]</a:t>
             </a:r>
           </a:p>
           <a:p xmlns:a="http://schemas.openxmlformats.org/drawingml/2006/main">
             <a:r>
-              <a:t>- Supplied source presentation: 06-rag-agentic-rag.pdf</a:t>
+              <a:t>- Original source presentation: 06-rag-agentic-rag.pdf</a:t>
+            </a:r>
+          </a:p>
+          <a:p xmlns:a="http://schemas.openxmlformats.org/drawingml/2006/main">
+            <a:r>
+              <a:t>- S4: Gemini structured outputs. Google documentation, accessed, 2026-09-09. https://ai.google.dev/gemini-api/docs/structured-output Supported schemas constrain structure. Application validation must check meaning and policy.</a:t>
+            </a:r>
+          </a:p>
+          <a:p xmlns:a="http://schemas.openxmlformats.org/drawingml/2006/main">
+            <a:r>
+              <a:t/>
+            </a:r>
+          </a:p>
+          <a:p xmlns:a="http://schemas.openxmlformats.org/drawingml/2006/main">
+            <a:r>
+              <a:t>[Assessed practice]</a:t>
+            </a:r>
+          </a:p>
+          <a:p xmlns:a="http://schemas.openxmlformats.org/drawingml/2006/main">
+            <a:r>
+              <a:t>Complete Lab 6 and add unknown, conflicting, and irrelevant records. Compare zero repair with one repair using a fixed question set.</a:t>
+            </a:r>
+          </a:p>
+          <a:p xmlns:a="http://schemas.openxmlformats.org/drawingml/2006/main">
+            <a:r>
+              <a:t>Acceptance: Report retrieval hits, unsupported answers, abstentions, and attempts separately. A known citation ID alone does not count as grounded correctness.</a:t>
+            </a:r>
+          </a:p>
+          <a:p xmlns:a="http://schemas.openxmlformats.org/drawingml/2006/main">
+            <a:r>
+              <a:t>Lab: labs/06_langgraph_corrective_rag.ipynb</a:t>
             </a:r>
           </a:p>
         </p:txBody>
@@ -1056,12 +1588,52 @@
           </a:p>
           <a:p xmlns:a="http://schemas.openxmlformats.org/drawingml/2006/main">
             <a:r>
+              <a:t>Edition: 2026-09-09</a:t>
+            </a:r>
+          </a:p>
+          <a:p xmlns:a="http://schemas.openxmlformats.org/drawingml/2006/main">
+            <a:r>
+              <a:t/>
+            </a:r>
+          </a:p>
+          <a:p xmlns:a="http://schemas.openxmlformats.org/drawingml/2006/main">
+            <a:r>
               <a:t>[Sources]</a:t>
             </a:r>
           </a:p>
           <a:p xmlns:a="http://schemas.openxmlformats.org/drawingml/2006/main">
             <a:r>
-              <a:t>- Supplied source presentation: 06-rag-agentic-rag.pdf</a:t>
+              <a:t>- Original source presentation: 06-rag-agentic-rag.pdf</a:t>
+            </a:r>
+          </a:p>
+          <a:p xmlns:a="http://schemas.openxmlformats.org/drawingml/2006/main">
+            <a:r>
+              <a:t>- S4: Gemini structured outputs. Google documentation, accessed, 2026-09-09. https://ai.google.dev/gemini-api/docs/structured-output Supported schemas constrain structure. Application validation must check meaning and policy.</a:t>
+            </a:r>
+          </a:p>
+          <a:p xmlns:a="http://schemas.openxmlformats.org/drawingml/2006/main">
+            <a:r>
+              <a:t/>
+            </a:r>
+          </a:p>
+          <a:p xmlns:a="http://schemas.openxmlformats.org/drawingml/2006/main">
+            <a:r>
+              <a:t>[Assessed practice]</a:t>
+            </a:r>
+          </a:p>
+          <a:p xmlns:a="http://schemas.openxmlformats.org/drawingml/2006/main">
+            <a:r>
+              <a:t>Complete Lab 6 and add unknown, conflicting, and irrelevant records. Compare zero repair with one repair using a fixed question set.</a:t>
+            </a:r>
+          </a:p>
+          <a:p xmlns:a="http://schemas.openxmlformats.org/drawingml/2006/main">
+            <a:r>
+              <a:t>Acceptance: Report retrieval hits, unsupported answers, abstentions, and attempts separately. A known citation ID alone does not count as grounded correctness.</a:t>
+            </a:r>
+          </a:p>
+          <a:p xmlns:a="http://schemas.openxmlformats.org/drawingml/2006/main">
+            <a:r>
+              <a:t>Lab: labs/06_langgraph_corrective_rag.ipynb</a:t>
             </a:r>
           </a:p>
         </p:txBody>
@@ -1141,12 +1713,52 @@
           </a:p>
           <a:p xmlns:a="http://schemas.openxmlformats.org/drawingml/2006/main">
             <a:r>
+              <a:t>Edition: 2026-09-09</a:t>
+            </a:r>
+          </a:p>
+          <a:p xmlns:a="http://schemas.openxmlformats.org/drawingml/2006/main">
+            <a:r>
+              <a:t/>
+            </a:r>
+          </a:p>
+          <a:p xmlns:a="http://schemas.openxmlformats.org/drawingml/2006/main">
+            <a:r>
               <a:t>[Sources]</a:t>
             </a:r>
           </a:p>
           <a:p xmlns:a="http://schemas.openxmlformats.org/drawingml/2006/main">
             <a:r>
-              <a:t>- Supplied source presentation: 06-rag-agentic-rag.pdf</a:t>
+              <a:t>- Original source presentation: 06-rag-agentic-rag.pdf</a:t>
+            </a:r>
+          </a:p>
+          <a:p xmlns:a="http://schemas.openxmlformats.org/drawingml/2006/main">
+            <a:r>
+              <a:t>- S4: Gemini structured outputs. Google documentation, accessed, 2026-09-09. https://ai.google.dev/gemini-api/docs/structured-output Supported schemas constrain structure. Application validation must check meaning and policy.</a:t>
+            </a:r>
+          </a:p>
+          <a:p xmlns:a="http://schemas.openxmlformats.org/drawingml/2006/main">
+            <a:r>
+              <a:t/>
+            </a:r>
+          </a:p>
+          <a:p xmlns:a="http://schemas.openxmlformats.org/drawingml/2006/main">
+            <a:r>
+              <a:t>[Assessed practice]</a:t>
+            </a:r>
+          </a:p>
+          <a:p xmlns:a="http://schemas.openxmlformats.org/drawingml/2006/main">
+            <a:r>
+              <a:t>Complete Lab 6 and add unknown, conflicting, and irrelevant records. Compare zero repair with one repair using a fixed question set.</a:t>
+            </a:r>
+          </a:p>
+          <a:p xmlns:a="http://schemas.openxmlformats.org/drawingml/2006/main">
+            <a:r>
+              <a:t>Acceptance: Report retrieval hits, unsupported answers, abstentions, and attempts separately. A known citation ID alone does not count as grounded correctness.</a:t>
+            </a:r>
+          </a:p>
+          <a:p xmlns:a="http://schemas.openxmlformats.org/drawingml/2006/main">
+            <a:r>
+              <a:t>Lab: labs/06_langgraph_corrective_rag.ipynb</a:t>
             </a:r>
           </a:p>
         </p:txBody>
@@ -1216,7 +1828,7 @@
           <a:lstStyle xmlns:a="http://schemas.openxmlformats.org/drawingml/2006/main"/>
           <a:p xmlns:a="http://schemas.openxmlformats.org/drawingml/2006/main">
             <a:r>
-              <a:t>Use as retrieval practice. Ask for an answer that defines, compares, traces, and evaluates.</a:t>
+              <a:t>Explain the claim first, then use the numbered points as evidence and design consequences.</a:t>
             </a:r>
           </a:p>
           <a:p xmlns:a="http://schemas.openxmlformats.org/drawingml/2006/main">
@@ -1226,12 +1838,52 @@
           </a:p>
           <a:p xmlns:a="http://schemas.openxmlformats.org/drawingml/2006/main">
             <a:r>
+              <a:t>Edition: 2026-09-09</a:t>
+            </a:r>
+          </a:p>
+          <a:p xmlns:a="http://schemas.openxmlformats.org/drawingml/2006/main">
+            <a:r>
+              <a:t/>
+            </a:r>
+          </a:p>
+          <a:p xmlns:a="http://schemas.openxmlformats.org/drawingml/2006/main">
+            <a:r>
               <a:t>[Sources]</a:t>
             </a:r>
           </a:p>
           <a:p xmlns:a="http://schemas.openxmlformats.org/drawingml/2006/main">
             <a:r>
-              <a:t>- Supplied source presentation: 06-rag-agentic-rag.pdf</a:t>
+              <a:t>- Original source presentation: 06-rag-agentic-rag.pdf</a:t>
+            </a:r>
+          </a:p>
+          <a:p xmlns:a="http://schemas.openxmlformats.org/drawingml/2006/main">
+            <a:r>
+              <a:t>- S4: Gemini structured outputs. Google documentation, accessed, 2026-09-09. https://ai.google.dev/gemini-api/docs/structured-output Supported schemas constrain structure. Application validation must check meaning and policy.</a:t>
+            </a:r>
+          </a:p>
+          <a:p xmlns:a="http://schemas.openxmlformats.org/drawingml/2006/main">
+            <a:r>
+              <a:t/>
+            </a:r>
+          </a:p>
+          <a:p xmlns:a="http://schemas.openxmlformats.org/drawingml/2006/main">
+            <a:r>
+              <a:t>[Assessed practice]</a:t>
+            </a:r>
+          </a:p>
+          <a:p xmlns:a="http://schemas.openxmlformats.org/drawingml/2006/main">
+            <a:r>
+              <a:t>Complete Lab 6 and add unknown, conflicting, and irrelevant records. Compare zero repair with one repair using a fixed question set.</a:t>
+            </a:r>
+          </a:p>
+          <a:p xmlns:a="http://schemas.openxmlformats.org/drawingml/2006/main">
+            <a:r>
+              <a:t>Acceptance: Report retrieval hits, unsupported answers, abstentions, and attempts separately. A known citation ID alone does not count as grounded correctness.</a:t>
+            </a:r>
+          </a:p>
+          <a:p xmlns:a="http://schemas.openxmlformats.org/drawingml/2006/main">
+            <a:r>
+              <a:t>Lab: labs/06_langgraph_corrective_rag.ipynb</a:t>
             </a:r>
           </a:p>
         </p:txBody>
@@ -1299,7 +1951,7 @@
   </p:cSld>
   <p:clrMap bg1="lt1" tx1="dk1" bg2="lt2" tx2="dk2" accent1="accent1" accent2="accent2" accent3="accent3" accent4="accent4" accent5="accent5" accent6="accent6" hlink="hlink" folHlink="folHlink"/>
   <p:sldLayoutIdLst>
-    <p:sldLayoutId xmlns:r="http://schemas.openxmlformats.org/officeDocument/2006/relationships" id="2147483649" r:id="Rc9ce5d24150a4527"/>
+    <p:sldLayoutId xmlns:r="http://schemas.openxmlformats.org/officeDocument/2006/relationships" id="2147483649" r:id="Ra87833cd17ec4963"/>
   </p:sldLayoutIdLst>
   <p:txStyles>
     <p:titleStyle>
@@ -1850,7 +2502,7 @@
           <p:cNvPr id="8" name="title-accent">
             <a:extLst xmlns:a="http://schemas.openxmlformats.org/drawingml/2006/main">
               <a:ext uri="{FF2B5EF4-FFF2-40B4-BE49-F238E27FC236}">
-                <a16:creationId xmlns:a16="http://schemas.microsoft.com/office/drawing/2014/main" id="{2ECFBE5F-7F96-4541-890B-72F46701E1D4}"/>
+                <a16:creationId xmlns:a16="http://schemas.microsoft.com/office/drawing/2014/main" id="{0C3957AB-C7A8-46E1-B5FF-A655DF57CA01}"/>
               </a:ext>
             </a:extLst>
           </p:cNvPr>
@@ -1883,7 +2535,7 @@
           <p:cNvPr id="2" name="course-title">
             <a:extLst xmlns:a="http://schemas.openxmlformats.org/drawingml/2006/main">
               <a:ext uri="{FF2B5EF4-FFF2-40B4-BE49-F238E27FC236}">
-                <a16:creationId xmlns:a16="http://schemas.microsoft.com/office/drawing/2014/main" id="{CEC0A767-3BBB-4F39-8A02-2220684E1558}"/>
+                <a16:creationId xmlns:a16="http://schemas.microsoft.com/office/drawing/2014/main" id="{B6CEFB81-E782-4976-BB63-BC1191AA1366}"/>
               </a:ext>
             </a:extLst>
           </p:cNvPr>
@@ -1941,7 +2593,7 @@
           <p:cNvPr id="3" name="chapter-number">
             <a:extLst xmlns:a="http://schemas.openxmlformats.org/drawingml/2006/main">
               <a:ext uri="{FF2B5EF4-FFF2-40B4-BE49-F238E27FC236}">
-                <a16:creationId xmlns:a16="http://schemas.microsoft.com/office/drawing/2014/main" id="{F6002FE3-6F25-44DE-AC37-7F45B030B1E6}"/>
+                <a16:creationId xmlns:a16="http://schemas.microsoft.com/office/drawing/2014/main" id="{4AEA6F0B-EE71-4D65-B250-F741ED75C2AA}"/>
               </a:ext>
             </a:extLst>
           </p:cNvPr>
@@ -1999,7 +2651,7 @@
           <p:cNvPr id="4" name="deck-title">
             <a:extLst xmlns:a="http://schemas.openxmlformats.org/drawingml/2006/main">
               <a:ext uri="{FF2B5EF4-FFF2-40B4-BE49-F238E27FC236}">
-                <a16:creationId xmlns:a16="http://schemas.microsoft.com/office/drawing/2014/main" id="{06F07AB7-7B16-4B48-B9A8-8C615E437725}"/>
+                <a16:creationId xmlns:a16="http://schemas.microsoft.com/office/drawing/2014/main" id="{764FAEDE-32B1-4452-85AA-89AC896B87B6}"/>
               </a:ext>
             </a:extLst>
           </p:cNvPr>
@@ -2057,7 +2709,7 @@
           <p:cNvPr id="5" name="deck-thesis">
             <a:extLst xmlns:a="http://schemas.openxmlformats.org/drawingml/2006/main">
               <a:ext uri="{FF2B5EF4-FFF2-40B4-BE49-F238E27FC236}">
-                <a16:creationId xmlns:a16="http://schemas.microsoft.com/office/drawing/2014/main" id="{FB54F7FC-191F-4C98-A79D-23DC354D7F44}"/>
+                <a16:creationId xmlns:a16="http://schemas.microsoft.com/office/drawing/2014/main" id="{46A61542-D98A-441B-8D58-ADA67D25E1F1}"/>
               </a:ext>
             </a:extLst>
           </p:cNvPr>
@@ -2115,7 +2767,7 @@
           <p:cNvPr id="6" name="title-marker">
             <a:extLst xmlns:a="http://schemas.openxmlformats.org/drawingml/2006/main">
               <a:ext uri="{FF2B5EF4-FFF2-40B4-BE49-F238E27FC236}">
-                <a16:creationId xmlns:a16="http://schemas.microsoft.com/office/drawing/2014/main" id="{782B204E-E9A7-44B1-91EC-80ED58EA75DB}"/>
+                <a16:creationId xmlns:a16="http://schemas.microsoft.com/office/drawing/2014/main" id="{FB90BA22-26A2-4997-A9FE-E54E24A68F38}"/>
               </a:ext>
             </a:extLst>
           </p:cNvPr>
@@ -2148,7 +2800,7 @@
           <p:cNvPr id="7" name="title-marker-text">
             <a:extLst xmlns:a="http://schemas.openxmlformats.org/drawingml/2006/main">
               <a:ext uri="{FF2B5EF4-FFF2-40B4-BE49-F238E27FC236}">
-                <a16:creationId xmlns:a16="http://schemas.microsoft.com/office/drawing/2014/main" id="{C024D1E6-21D9-45B7-B13C-4F15B33E8548}"/>
+                <a16:creationId xmlns:a16="http://schemas.microsoft.com/office/drawing/2014/main" id="{62879D8B-3233-45BD-87EB-0A5E1346106F}"/>
               </a:ext>
             </a:extLst>
           </p:cNvPr>
@@ -2227,7 +2879,7 @@
     </p:spTree>
     <p:extLst>
       <p:ext uri="{BB962C8B-B14F-4D97-AF65-F5344CB8AC3E}">
-        <p14:creationId xmlns:p14="http://schemas.microsoft.com/office/powerpoint/2010/main" val="1750928772"/>
+        <p14:creationId xmlns:p14="http://schemas.microsoft.com/office/powerpoint/2010/main" val="671893603"/>
       </p:ext>
     </p:extLst>
   </p:cSld>
@@ -2235,6 +2887,996 @@
 </file>
 
 <file path=ppt/slides/slide10.xml><?xml version="1.0" encoding="utf-8"?>
+<p:sld xmlns:p="http://schemas.openxmlformats.org/presentationml/2006/main">
+  <p:cSld>
+    <p:bg>
+      <p:bgPr>
+        <a:solidFill xmlns:a="http://schemas.openxmlformats.org/drawingml/2006/main">
+          <a:srgbClr val="FFFFFF"/>
+        </a:solidFill>
+      </p:bgPr>
+    </p:bg>
+    <p:spTree>
+      <p:nvGrpSpPr>
+        <p:cNvPr id="1" name=""/>
+        <p:cNvGrpSpPr/>
+        <p:nvPr/>
+      </p:nvGrpSpPr>
+      <p:grpSpPr>
+        <a:xfrm xmlns:a="http://schemas.openxmlformats.org/drawingml/2006/main"/>
+      </p:grpSpPr>
+      <p:sp>
+        <p:nvSpPr>
+          <p:cNvPr id="18" name="accent-line">
+            <a:extLst xmlns:a="http://schemas.openxmlformats.org/drawingml/2006/main">
+              <a:ext uri="{FF2B5EF4-FFF2-40B4-BE49-F238E27FC236}">
+                <a16:creationId xmlns:a16="http://schemas.microsoft.com/office/drawing/2014/main" id="{7B71C9FF-59D6-42E1-B803-301ABB14D32B}"/>
+              </a:ext>
+            </a:extLst>
+          </p:cNvPr>
+          <p:cNvSpPr>
+            <a:spLocks xmlns:a="http://schemas.openxmlformats.org/drawingml/2006/main" noGrp="1"/>
+          </p:cNvSpPr>
+          <p:nvPr/>
+        </p:nvSpPr>
+        <p:spPr>
+          <a:xfrm xmlns:a="http://schemas.openxmlformats.org/drawingml/2006/main">
+            <a:off x="390525" y="304800"/>
+            <a:ext cx="11410950" cy="66675"/>
+          </a:xfrm>
+          <a:prstGeom xmlns:a="http://schemas.openxmlformats.org/drawingml/2006/main" prst="rect">
+            <a:avLst/>
+          </a:prstGeom>
+          <a:solidFill xmlns:a="http://schemas.openxmlformats.org/drawingml/2006/main">
+            <a:srgbClr val="73C8FF"/>
+          </a:solidFill>
+          <a:ln xmlns:a="http://schemas.openxmlformats.org/drawingml/2006/main" w="0">
+            <a:solidFill>
+              <a:srgbClr val="73C8FF"/>
+            </a:solidFill>
+            <a:prstDash val="solid"/>
+          </a:ln>
+        </p:spPr>
+      </p:sp>
+      <p:sp>
+        <p:nvSpPr>
+          <p:cNvPr id="2" name="chapter-label">
+            <a:extLst xmlns:a="http://schemas.openxmlformats.org/drawingml/2006/main">
+              <a:ext uri="{FF2B5EF4-FFF2-40B4-BE49-F238E27FC236}">
+                <a16:creationId xmlns:a16="http://schemas.microsoft.com/office/drawing/2014/main" id="{58FA2343-2ABC-4472-A074-D0DE861D4B62}"/>
+              </a:ext>
+            </a:extLst>
+          </p:cNvPr>
+          <p:cNvSpPr>
+            <a:spLocks xmlns:a="http://schemas.openxmlformats.org/drawingml/2006/main" noGrp="1"/>
+          </p:cNvSpPr>
+          <p:nvPr/>
+        </p:nvSpPr>
+        <p:spPr>
+          <a:xfrm xmlns:a="http://schemas.openxmlformats.org/drawingml/2006/main">
+            <a:off x="390525" y="466725"/>
+            <a:ext cx="4953000" cy="323850"/>
+          </a:xfrm>
+          <a:prstGeom xmlns:a="http://schemas.openxmlformats.org/drawingml/2006/main" prst="rect">
+            <a:avLst/>
+          </a:prstGeom>
+          <a:noFill xmlns:a="http://schemas.openxmlformats.org/drawingml/2006/main"/>
+          <a:ln xmlns:a="http://schemas.openxmlformats.org/drawingml/2006/main" w="0">
+            <a:noFill/>
+            <a:prstDash val="solid"/>
+          </a:ln>
+        </p:spPr>
+        <p:txBody>
+          <a:bodyPr xmlns:a="http://schemas.openxmlformats.org/drawingml/2006/main" anchor="t">
+            <a:noAutofit/>
+          </a:bodyPr>
+          <a:lstStyle xmlns:a="http://schemas.openxmlformats.org/drawingml/2006/main"/>
+          <a:p xmlns:a="http://schemas.openxmlformats.org/drawingml/2006/main">
+            <a:pPr algn="l">
+              <a:defRPr sz="1275" b="1">
+                <a:solidFill>
+                  <a:srgbClr val="5B5B57"/>
+                </a:solidFill>
+                <a:latin typeface="Helvetica Neue"/>
+                <a:ea typeface="Helvetica Neue"/>
+                <a:cs typeface="Helvetica Neue"/>
+              </a:defRPr>
+            </a:pPr>
+            <a:r>
+              <a:rPr sz="1275" b="1">
+                <a:solidFill>
+                  <a:srgbClr val="5B5B57"/>
+                </a:solidFill>
+                <a:latin typeface="Helvetica Neue"/>
+                <a:ea typeface="Helvetica Neue"/>
+                <a:cs typeface="Helvetica Neue"/>
+              </a:rPr>
+              <a:t>EXAM CHECK  /  06</a:t>
+            </a:r>
+          </a:p>
+        </p:txBody>
+      </p:sp>
+      <p:sp>
+        <p:nvSpPr>
+          <p:cNvPr id="3" name="slide-number">
+            <a:extLst xmlns:a="http://schemas.openxmlformats.org/drawingml/2006/main">
+              <a:ext uri="{FF2B5EF4-FFF2-40B4-BE49-F238E27FC236}">
+                <a16:creationId xmlns:a16="http://schemas.microsoft.com/office/drawing/2014/main" id="{088BD54B-4CCD-4259-8D8E-F7F848CEFACD}"/>
+              </a:ext>
+            </a:extLst>
+          </p:cNvPr>
+          <p:cNvSpPr>
+            <a:spLocks xmlns:a="http://schemas.openxmlformats.org/drawingml/2006/main" noGrp="1"/>
+          </p:cNvSpPr>
+          <p:nvPr/>
+        </p:nvSpPr>
+        <p:spPr>
+          <a:xfrm xmlns:a="http://schemas.openxmlformats.org/drawingml/2006/main">
+            <a:off x="11049000" y="6286500"/>
+            <a:ext cx="742950" cy="266700"/>
+          </a:xfrm>
+          <a:prstGeom xmlns:a="http://schemas.openxmlformats.org/drawingml/2006/main" prst="rect">
+            <a:avLst/>
+          </a:prstGeom>
+          <a:noFill xmlns:a="http://schemas.openxmlformats.org/drawingml/2006/main"/>
+          <a:ln xmlns:a="http://schemas.openxmlformats.org/drawingml/2006/main" w="0">
+            <a:noFill/>
+            <a:prstDash val="solid"/>
+          </a:ln>
+        </p:spPr>
+        <p:txBody>
+          <a:bodyPr xmlns:a="http://schemas.openxmlformats.org/drawingml/2006/main" anchor="t">
+            <a:noAutofit/>
+          </a:bodyPr>
+          <a:lstStyle xmlns:a="http://schemas.openxmlformats.org/drawingml/2006/main"/>
+          <a:p xmlns:a="http://schemas.openxmlformats.org/drawingml/2006/main">
+            <a:pPr algn="r">
+              <a:defRPr sz="1200" b="0">
+                <a:solidFill>
+                  <a:srgbClr val="5B5B57"/>
+                </a:solidFill>
+                <a:latin typeface="Helvetica Neue"/>
+                <a:ea typeface="Helvetica Neue"/>
+                <a:cs typeface="Helvetica Neue"/>
+              </a:defRPr>
+            </a:pPr>
+            <a:r>
+              <a:rPr sz="1200" b="0">
+                <a:solidFill>
+                  <a:srgbClr val="5B5B57"/>
+                </a:solidFill>
+                <a:latin typeface="Helvetica Neue"/>
+                <a:ea typeface="Helvetica Neue"/>
+                <a:cs typeface="Helvetica Neue"/>
+              </a:rPr>
+              <a:t>10</a:t>
+            </a:r>
+          </a:p>
+        </p:txBody>
+      </p:sp>
+      <p:sp>
+        <p:nvSpPr>
+          <p:cNvPr id="4" name="chapter-footer">
+            <a:extLst xmlns:a="http://schemas.openxmlformats.org/drawingml/2006/main">
+              <a:ext uri="{FF2B5EF4-FFF2-40B4-BE49-F238E27FC236}">
+                <a16:creationId xmlns:a16="http://schemas.microsoft.com/office/drawing/2014/main" id="{DDB17E2E-7E3A-4E8E-8174-128998D511A3}"/>
+              </a:ext>
+            </a:extLst>
+          </p:cNvPr>
+          <p:cNvSpPr>
+            <a:spLocks xmlns:a="http://schemas.openxmlformats.org/drawingml/2006/main" noGrp="1"/>
+          </p:cNvSpPr>
+          <p:nvPr/>
+        </p:nvSpPr>
+        <p:spPr>
+          <a:xfrm xmlns:a="http://schemas.openxmlformats.org/drawingml/2006/main">
+            <a:off x="390525" y="6286500"/>
+            <a:ext cx="8191500" cy="266700"/>
+          </a:xfrm>
+          <a:prstGeom xmlns:a="http://schemas.openxmlformats.org/drawingml/2006/main" prst="rect">
+            <a:avLst/>
+          </a:prstGeom>
+          <a:noFill xmlns:a="http://schemas.openxmlformats.org/drawingml/2006/main"/>
+          <a:ln xmlns:a="http://schemas.openxmlformats.org/drawingml/2006/main" w="0">
+            <a:noFill/>
+            <a:prstDash val="solid"/>
+          </a:ln>
+        </p:spPr>
+        <p:txBody>
+          <a:bodyPr xmlns:a="http://schemas.openxmlformats.org/drawingml/2006/main" anchor="t">
+            <a:noAutofit/>
+          </a:bodyPr>
+          <a:lstStyle xmlns:a="http://schemas.openxmlformats.org/drawingml/2006/main"/>
+          <a:p xmlns:a="http://schemas.openxmlformats.org/drawingml/2006/main">
+            <a:pPr algn="l">
+              <a:defRPr sz="1125" b="0">
+                <a:solidFill>
+                  <a:srgbClr val="5B5B57"/>
+                </a:solidFill>
+                <a:latin typeface="Helvetica Neue"/>
+                <a:ea typeface="Helvetica Neue"/>
+                <a:cs typeface="Helvetica Neue"/>
+              </a:defRPr>
+            </a:pPr>
+            <a:r>
+              <a:rPr sz="1125" b="0">
+                <a:solidFill>
+                  <a:srgbClr val="5B5B57"/>
+                </a:solidFill>
+                <a:latin typeface="Helvetica Neue"/>
+                <a:ea typeface="Helvetica Neue"/>
+                <a:cs typeface="Helvetica Neue"/>
+              </a:rPr>
+              <a:t>RAG and Agentic RAG</a:t>
+            </a:r>
+          </a:p>
+        </p:txBody>
+      </p:sp>
+      <p:sp>
+        <p:nvSpPr>
+          <p:cNvPr id="5" name="exam-title">
+            <a:extLst xmlns:a="http://schemas.openxmlformats.org/drawingml/2006/main">
+              <a:ext uri="{FF2B5EF4-FFF2-40B4-BE49-F238E27FC236}">
+                <a16:creationId xmlns:a16="http://schemas.microsoft.com/office/drawing/2014/main" id="{D966D6C8-3D66-414F-82CD-0F1F5FF8C628}"/>
+              </a:ext>
+            </a:extLst>
+          </p:cNvPr>
+          <p:cNvSpPr>
+            <a:spLocks xmlns:a="http://schemas.openxmlformats.org/drawingml/2006/main" noGrp="1"/>
+          </p:cNvSpPr>
+          <p:nvPr/>
+        </p:nvSpPr>
+        <p:spPr>
+          <a:xfrm xmlns:a="http://schemas.openxmlformats.org/drawingml/2006/main">
+            <a:off x="390525" y="981075"/>
+            <a:ext cx="10668000" cy="781050"/>
+          </a:xfrm>
+          <a:prstGeom xmlns:a="http://schemas.openxmlformats.org/drawingml/2006/main" prst="rect">
+            <a:avLst/>
+          </a:prstGeom>
+          <a:noFill xmlns:a="http://schemas.openxmlformats.org/drawingml/2006/main"/>
+          <a:ln xmlns:a="http://schemas.openxmlformats.org/drawingml/2006/main" w="0">
+            <a:noFill/>
+            <a:prstDash val="solid"/>
+          </a:ln>
+        </p:spPr>
+        <p:txBody>
+          <a:bodyPr xmlns:a="http://schemas.openxmlformats.org/drawingml/2006/main" anchor="t">
+            <a:noAutofit/>
+          </a:bodyPr>
+          <a:lstStyle xmlns:a="http://schemas.openxmlformats.org/drawingml/2006/main"/>
+          <a:p xmlns:a="http://schemas.openxmlformats.org/drawingml/2006/main">
+            <a:pPr algn="l">
+              <a:defRPr sz="3150" b="1">
+                <a:solidFill>
+                  <a:srgbClr val="111111"/>
+                </a:solidFill>
+                <a:latin typeface="Helvetica Neue"/>
+                <a:ea typeface="Helvetica Neue"/>
+                <a:cs typeface="Helvetica Neue"/>
+              </a:defRPr>
+            </a:pPr>
+            <a:r>
+              <a:rPr sz="3150" b="1">
+                <a:solidFill>
+                  <a:srgbClr val="111111"/>
+                </a:solidFill>
+                <a:latin typeface="Helvetica Neue"/>
+                <a:ea typeface="Helvetica Neue"/>
+                <a:cs typeface="Helvetica Neue"/>
+              </a:rPr>
+              <a:t>Can you answer these without notes?</a:t>
+            </a:r>
+          </a:p>
+        </p:txBody>
+      </p:sp>
+      <p:sp>
+        <p:nvSpPr>
+          <p:cNvPr id="6" name="exam-number-1">
+            <a:extLst xmlns:a="http://schemas.openxmlformats.org/drawingml/2006/main">
+              <a:ext uri="{FF2B5EF4-FFF2-40B4-BE49-F238E27FC236}">
+                <a16:creationId xmlns:a16="http://schemas.microsoft.com/office/drawing/2014/main" id="{07534F31-A7CF-429E-A72C-3F56FC7F2BDF}"/>
+              </a:ext>
+            </a:extLst>
+          </p:cNvPr>
+          <p:cNvSpPr>
+            <a:spLocks xmlns:a="http://schemas.openxmlformats.org/drawingml/2006/main" noGrp="1"/>
+          </p:cNvSpPr>
+          <p:nvPr/>
+        </p:nvSpPr>
+        <p:spPr>
+          <a:xfrm xmlns:a="http://schemas.openxmlformats.org/drawingml/2006/main">
+            <a:off x="390525" y="2238375"/>
+            <a:ext cx="590550" cy="400050"/>
+          </a:xfrm>
+          <a:prstGeom xmlns:a="http://schemas.openxmlformats.org/drawingml/2006/main" prst="rect">
+            <a:avLst/>
+          </a:prstGeom>
+          <a:noFill xmlns:a="http://schemas.openxmlformats.org/drawingml/2006/main"/>
+          <a:ln xmlns:a="http://schemas.openxmlformats.org/drawingml/2006/main" w="0">
+            <a:noFill/>
+            <a:prstDash val="solid"/>
+          </a:ln>
+        </p:spPr>
+        <p:txBody>
+          <a:bodyPr xmlns:a="http://schemas.openxmlformats.org/drawingml/2006/main" anchor="t">
+            <a:noAutofit/>
+          </a:bodyPr>
+          <a:lstStyle xmlns:a="http://schemas.openxmlformats.org/drawingml/2006/main"/>
+          <a:p xmlns:a="http://schemas.openxmlformats.org/drawingml/2006/main">
+            <a:pPr algn="l">
+              <a:defRPr sz="1725" b="1">
+                <a:solidFill>
+                  <a:srgbClr val="73C8FF"/>
+                </a:solidFill>
+                <a:latin typeface="Helvetica Neue"/>
+                <a:ea typeface="Helvetica Neue"/>
+                <a:cs typeface="Helvetica Neue"/>
+              </a:defRPr>
+            </a:pPr>
+            <a:r>
+              <a:rPr sz="1725" b="1">
+                <a:solidFill>
+                  <a:srgbClr val="73C8FF"/>
+                </a:solidFill>
+                <a:latin typeface="Helvetica Neue"/>
+                <a:ea typeface="Helvetica Neue"/>
+                <a:cs typeface="Helvetica Neue"/>
+              </a:rPr>
+              <a:t>01</a:t>
+            </a:r>
+          </a:p>
+        </p:txBody>
+      </p:sp>
+      <p:sp>
+        <p:nvSpPr>
+          <p:cNvPr id="7" name="exam-question-1">
+            <a:extLst xmlns:a="http://schemas.openxmlformats.org/drawingml/2006/main">
+              <a:ext uri="{FF2B5EF4-FFF2-40B4-BE49-F238E27FC236}">
+                <a16:creationId xmlns:a16="http://schemas.microsoft.com/office/drawing/2014/main" id="{14A5A756-C8BC-4052-AD65-398CDB338298}"/>
+              </a:ext>
+            </a:extLst>
+          </p:cNvPr>
+          <p:cNvSpPr>
+            <a:spLocks xmlns:a="http://schemas.openxmlformats.org/drawingml/2006/main" noGrp="1"/>
+          </p:cNvSpPr>
+          <p:nvPr/>
+        </p:nvSpPr>
+        <p:spPr>
+          <a:xfrm xmlns:a="http://schemas.openxmlformats.org/drawingml/2006/main">
+            <a:off x="1076325" y="2238375"/>
+            <a:ext cx="4762500" cy="895350"/>
+          </a:xfrm>
+          <a:prstGeom xmlns:a="http://schemas.openxmlformats.org/drawingml/2006/main" prst="rect">
+            <a:avLst/>
+          </a:prstGeom>
+          <a:noFill xmlns:a="http://schemas.openxmlformats.org/drawingml/2006/main"/>
+          <a:ln xmlns:a="http://schemas.openxmlformats.org/drawingml/2006/main" w="0">
+            <a:noFill/>
+            <a:prstDash val="solid"/>
+          </a:ln>
+        </p:spPr>
+        <p:txBody>
+          <a:bodyPr xmlns:a="http://schemas.openxmlformats.org/drawingml/2006/main" anchor="t">
+            <a:normAutofit fontScale="100000"/>
+          </a:bodyPr>
+          <a:lstStyle xmlns:a="http://schemas.openxmlformats.org/drawingml/2006/main"/>
+          <a:p xmlns:a="http://schemas.openxmlformats.org/drawingml/2006/main">
+            <a:pPr algn="l">
+              <a:defRPr sz="1575" b="1">
+                <a:solidFill>
+                  <a:srgbClr val="111111"/>
+                </a:solidFill>
+                <a:latin typeface="Helvetica Neue"/>
+                <a:ea typeface="Helvetica Neue"/>
+                <a:cs typeface="Helvetica Neue"/>
+              </a:defRPr>
+            </a:pPr>
+            <a:r>
+              <a:rPr sz="1575" b="1">
+                <a:solidFill>
+                  <a:srgbClr val="111111"/>
+                </a:solidFill>
+                <a:latin typeface="Helvetica Neue"/>
+                <a:ea typeface="Helvetica Neue"/>
+                <a:cs typeface="Helvetica Neue"/>
+              </a:rPr>
+              <a:t>Describe the RAG pipeline from ingestion to answer.</a:t>
+            </a:r>
+          </a:p>
+        </p:txBody>
+      </p:sp>
+      <p:sp>
+        <p:nvSpPr>
+          <p:cNvPr id="8" name="exam-number-2">
+            <a:extLst xmlns:a="http://schemas.openxmlformats.org/drawingml/2006/main">
+              <a:ext uri="{FF2B5EF4-FFF2-40B4-BE49-F238E27FC236}">
+                <a16:creationId xmlns:a16="http://schemas.microsoft.com/office/drawing/2014/main" id="{696AF783-8A9D-4844-BB73-527E0065ADF0}"/>
+              </a:ext>
+            </a:extLst>
+          </p:cNvPr>
+          <p:cNvSpPr>
+            <a:spLocks xmlns:a="http://schemas.openxmlformats.org/drawingml/2006/main" noGrp="1"/>
+          </p:cNvSpPr>
+          <p:nvPr/>
+        </p:nvSpPr>
+        <p:spPr>
+          <a:xfrm xmlns:a="http://schemas.openxmlformats.org/drawingml/2006/main">
+            <a:off x="6191250" y="2238375"/>
+            <a:ext cx="590550" cy="400050"/>
+          </a:xfrm>
+          <a:prstGeom xmlns:a="http://schemas.openxmlformats.org/drawingml/2006/main" prst="rect">
+            <a:avLst/>
+          </a:prstGeom>
+          <a:noFill xmlns:a="http://schemas.openxmlformats.org/drawingml/2006/main"/>
+          <a:ln xmlns:a="http://schemas.openxmlformats.org/drawingml/2006/main" w="0">
+            <a:noFill/>
+            <a:prstDash val="solid"/>
+          </a:ln>
+        </p:spPr>
+        <p:txBody>
+          <a:bodyPr xmlns:a="http://schemas.openxmlformats.org/drawingml/2006/main" anchor="t">
+            <a:noAutofit/>
+          </a:bodyPr>
+          <a:lstStyle xmlns:a="http://schemas.openxmlformats.org/drawingml/2006/main"/>
+          <a:p xmlns:a="http://schemas.openxmlformats.org/drawingml/2006/main">
+            <a:pPr algn="l">
+              <a:defRPr sz="1725" b="1">
+                <a:solidFill>
+                  <a:srgbClr val="73C8FF"/>
+                </a:solidFill>
+                <a:latin typeface="Helvetica Neue"/>
+                <a:ea typeface="Helvetica Neue"/>
+                <a:cs typeface="Helvetica Neue"/>
+              </a:defRPr>
+            </a:pPr>
+            <a:r>
+              <a:rPr sz="1725" b="1">
+                <a:solidFill>
+                  <a:srgbClr val="73C8FF"/>
+                </a:solidFill>
+                <a:latin typeface="Helvetica Neue"/>
+                <a:ea typeface="Helvetica Neue"/>
+                <a:cs typeface="Helvetica Neue"/>
+              </a:rPr>
+              <a:t>02</a:t>
+            </a:r>
+          </a:p>
+        </p:txBody>
+      </p:sp>
+      <p:sp>
+        <p:nvSpPr>
+          <p:cNvPr id="9" name="exam-question-2">
+            <a:extLst xmlns:a="http://schemas.openxmlformats.org/drawingml/2006/main">
+              <a:ext uri="{FF2B5EF4-FFF2-40B4-BE49-F238E27FC236}">
+                <a16:creationId xmlns:a16="http://schemas.microsoft.com/office/drawing/2014/main" id="{7D18F999-7347-4AF5-AC89-A342FDD5E118}"/>
+              </a:ext>
+            </a:extLst>
+          </p:cNvPr>
+          <p:cNvSpPr>
+            <a:spLocks xmlns:a="http://schemas.openxmlformats.org/drawingml/2006/main" noGrp="1"/>
+          </p:cNvSpPr>
+          <p:nvPr/>
+        </p:nvSpPr>
+        <p:spPr>
+          <a:xfrm xmlns:a="http://schemas.openxmlformats.org/drawingml/2006/main">
+            <a:off x="6877050" y="2238375"/>
+            <a:ext cx="4762500" cy="895350"/>
+          </a:xfrm>
+          <a:prstGeom xmlns:a="http://schemas.openxmlformats.org/drawingml/2006/main" prst="rect">
+            <a:avLst/>
+          </a:prstGeom>
+          <a:noFill xmlns:a="http://schemas.openxmlformats.org/drawingml/2006/main"/>
+          <a:ln xmlns:a="http://schemas.openxmlformats.org/drawingml/2006/main" w="0">
+            <a:noFill/>
+            <a:prstDash val="solid"/>
+          </a:ln>
+        </p:spPr>
+        <p:txBody>
+          <a:bodyPr xmlns:a="http://schemas.openxmlformats.org/drawingml/2006/main" anchor="t">
+            <a:normAutofit fontScale="100000"/>
+          </a:bodyPr>
+          <a:lstStyle xmlns:a="http://schemas.openxmlformats.org/drawingml/2006/main"/>
+          <a:p xmlns:a="http://schemas.openxmlformats.org/drawingml/2006/main">
+            <a:pPr algn="l">
+              <a:defRPr sz="1575" b="1">
+                <a:solidFill>
+                  <a:srgbClr val="111111"/>
+                </a:solidFill>
+                <a:latin typeface="Helvetica Neue"/>
+                <a:ea typeface="Helvetica Neue"/>
+                <a:cs typeface="Helvetica Neue"/>
+              </a:defRPr>
+            </a:pPr>
+            <a:r>
+              <a:rPr sz="1575" b="1">
+                <a:solidFill>
+                  <a:srgbClr val="111111"/>
+                </a:solidFill>
+                <a:latin typeface="Helvetica Neue"/>
+                <a:ea typeface="Helvetica Neue"/>
+                <a:cs typeface="Helvetica Neue"/>
+              </a:rPr>
+              <a:t>How do chunk size and overlap affect retrieval?</a:t>
+            </a:r>
+          </a:p>
+        </p:txBody>
+      </p:sp>
+      <p:sp>
+        <p:nvSpPr>
+          <p:cNvPr id="10" name="exam-number-3">
+            <a:extLst xmlns:a="http://schemas.openxmlformats.org/drawingml/2006/main">
+              <a:ext uri="{FF2B5EF4-FFF2-40B4-BE49-F238E27FC236}">
+                <a16:creationId xmlns:a16="http://schemas.microsoft.com/office/drawing/2014/main" id="{7E783E04-A9A7-4AE7-80BA-55343FFDD4EB}"/>
+              </a:ext>
+            </a:extLst>
+          </p:cNvPr>
+          <p:cNvSpPr>
+            <a:spLocks xmlns:a="http://schemas.openxmlformats.org/drawingml/2006/main" noGrp="1"/>
+          </p:cNvSpPr>
+          <p:nvPr/>
+        </p:nvSpPr>
+        <p:spPr>
+          <a:xfrm xmlns:a="http://schemas.openxmlformats.org/drawingml/2006/main">
+            <a:off x="390525" y="3495675"/>
+            <a:ext cx="590550" cy="400050"/>
+          </a:xfrm>
+          <a:prstGeom xmlns:a="http://schemas.openxmlformats.org/drawingml/2006/main" prst="rect">
+            <a:avLst/>
+          </a:prstGeom>
+          <a:noFill xmlns:a="http://schemas.openxmlformats.org/drawingml/2006/main"/>
+          <a:ln xmlns:a="http://schemas.openxmlformats.org/drawingml/2006/main" w="0">
+            <a:noFill/>
+            <a:prstDash val="solid"/>
+          </a:ln>
+        </p:spPr>
+        <p:txBody>
+          <a:bodyPr xmlns:a="http://schemas.openxmlformats.org/drawingml/2006/main" anchor="t">
+            <a:noAutofit/>
+          </a:bodyPr>
+          <a:lstStyle xmlns:a="http://schemas.openxmlformats.org/drawingml/2006/main"/>
+          <a:p xmlns:a="http://schemas.openxmlformats.org/drawingml/2006/main">
+            <a:pPr algn="l">
+              <a:defRPr sz="1725" b="1">
+                <a:solidFill>
+                  <a:srgbClr val="73C8FF"/>
+                </a:solidFill>
+                <a:latin typeface="Helvetica Neue"/>
+                <a:ea typeface="Helvetica Neue"/>
+                <a:cs typeface="Helvetica Neue"/>
+              </a:defRPr>
+            </a:pPr>
+            <a:r>
+              <a:rPr sz="1725" b="1">
+                <a:solidFill>
+                  <a:srgbClr val="73C8FF"/>
+                </a:solidFill>
+                <a:latin typeface="Helvetica Neue"/>
+                <a:ea typeface="Helvetica Neue"/>
+                <a:cs typeface="Helvetica Neue"/>
+              </a:rPr>
+              <a:t>03</a:t>
+            </a:r>
+          </a:p>
+        </p:txBody>
+      </p:sp>
+      <p:sp>
+        <p:nvSpPr>
+          <p:cNvPr id="11" name="exam-question-3">
+            <a:extLst xmlns:a="http://schemas.openxmlformats.org/drawingml/2006/main">
+              <a:ext uri="{FF2B5EF4-FFF2-40B4-BE49-F238E27FC236}">
+                <a16:creationId xmlns:a16="http://schemas.microsoft.com/office/drawing/2014/main" id="{E532D896-A120-4962-A397-530BF6396534}"/>
+              </a:ext>
+            </a:extLst>
+          </p:cNvPr>
+          <p:cNvSpPr>
+            <a:spLocks xmlns:a="http://schemas.openxmlformats.org/drawingml/2006/main" noGrp="1"/>
+          </p:cNvSpPr>
+          <p:nvPr/>
+        </p:nvSpPr>
+        <p:spPr>
+          <a:xfrm xmlns:a="http://schemas.openxmlformats.org/drawingml/2006/main">
+            <a:off x="1076325" y="3495675"/>
+            <a:ext cx="4762500" cy="895350"/>
+          </a:xfrm>
+          <a:prstGeom xmlns:a="http://schemas.openxmlformats.org/drawingml/2006/main" prst="rect">
+            <a:avLst/>
+          </a:prstGeom>
+          <a:noFill xmlns:a="http://schemas.openxmlformats.org/drawingml/2006/main"/>
+          <a:ln xmlns:a="http://schemas.openxmlformats.org/drawingml/2006/main" w="0">
+            <a:noFill/>
+            <a:prstDash val="solid"/>
+          </a:ln>
+        </p:spPr>
+        <p:txBody>
+          <a:bodyPr xmlns:a="http://schemas.openxmlformats.org/drawingml/2006/main" anchor="t">
+            <a:normAutofit fontScale="100000"/>
+          </a:bodyPr>
+          <a:lstStyle xmlns:a="http://schemas.openxmlformats.org/drawingml/2006/main"/>
+          <a:p xmlns:a="http://schemas.openxmlformats.org/drawingml/2006/main">
+            <a:pPr algn="l">
+              <a:defRPr sz="1575" b="1">
+                <a:solidFill>
+                  <a:srgbClr val="111111"/>
+                </a:solidFill>
+                <a:latin typeface="Helvetica Neue"/>
+                <a:ea typeface="Helvetica Neue"/>
+                <a:cs typeface="Helvetica Neue"/>
+              </a:defRPr>
+            </a:pPr>
+            <a:r>
+              <a:rPr sz="1575" b="1">
+                <a:solidFill>
+                  <a:srgbClr val="111111"/>
+                </a:solidFill>
+                <a:latin typeface="Helvetica Neue"/>
+                <a:ea typeface="Helvetica Neue"/>
+                <a:cs typeface="Helvetica Neue"/>
+              </a:rPr>
+              <a:t>Why can top-k retrieval dilute an answer?</a:t>
+            </a:r>
+          </a:p>
+        </p:txBody>
+      </p:sp>
+      <p:sp>
+        <p:nvSpPr>
+          <p:cNvPr id="12" name="exam-number-4">
+            <a:extLst xmlns:a="http://schemas.openxmlformats.org/drawingml/2006/main">
+              <a:ext uri="{FF2B5EF4-FFF2-40B4-BE49-F238E27FC236}">
+                <a16:creationId xmlns:a16="http://schemas.microsoft.com/office/drawing/2014/main" id="{29D61457-7D84-4C4C-BD47-C99B91590532}"/>
+              </a:ext>
+            </a:extLst>
+          </p:cNvPr>
+          <p:cNvSpPr>
+            <a:spLocks xmlns:a="http://schemas.openxmlformats.org/drawingml/2006/main" noGrp="1"/>
+          </p:cNvSpPr>
+          <p:nvPr/>
+        </p:nvSpPr>
+        <p:spPr>
+          <a:xfrm xmlns:a="http://schemas.openxmlformats.org/drawingml/2006/main">
+            <a:off x="6191250" y="3495675"/>
+            <a:ext cx="590550" cy="400050"/>
+          </a:xfrm>
+          <a:prstGeom xmlns:a="http://schemas.openxmlformats.org/drawingml/2006/main" prst="rect">
+            <a:avLst/>
+          </a:prstGeom>
+          <a:noFill xmlns:a="http://schemas.openxmlformats.org/drawingml/2006/main"/>
+          <a:ln xmlns:a="http://schemas.openxmlformats.org/drawingml/2006/main" w="0">
+            <a:noFill/>
+            <a:prstDash val="solid"/>
+          </a:ln>
+        </p:spPr>
+        <p:txBody>
+          <a:bodyPr xmlns:a="http://schemas.openxmlformats.org/drawingml/2006/main" anchor="t">
+            <a:noAutofit/>
+          </a:bodyPr>
+          <a:lstStyle xmlns:a="http://schemas.openxmlformats.org/drawingml/2006/main"/>
+          <a:p xmlns:a="http://schemas.openxmlformats.org/drawingml/2006/main">
+            <a:pPr algn="l">
+              <a:defRPr sz="1725" b="1">
+                <a:solidFill>
+                  <a:srgbClr val="73C8FF"/>
+                </a:solidFill>
+                <a:latin typeface="Helvetica Neue"/>
+                <a:ea typeface="Helvetica Neue"/>
+                <a:cs typeface="Helvetica Neue"/>
+              </a:defRPr>
+            </a:pPr>
+            <a:r>
+              <a:rPr sz="1725" b="1">
+                <a:solidFill>
+                  <a:srgbClr val="73C8FF"/>
+                </a:solidFill>
+                <a:latin typeface="Helvetica Neue"/>
+                <a:ea typeface="Helvetica Neue"/>
+                <a:cs typeface="Helvetica Neue"/>
+              </a:rPr>
+              <a:t>04</a:t>
+            </a:r>
+          </a:p>
+        </p:txBody>
+      </p:sp>
+      <p:sp>
+        <p:nvSpPr>
+          <p:cNvPr id="13" name="exam-question-4">
+            <a:extLst xmlns:a="http://schemas.openxmlformats.org/drawingml/2006/main">
+              <a:ext uri="{FF2B5EF4-FFF2-40B4-BE49-F238E27FC236}">
+                <a16:creationId xmlns:a16="http://schemas.microsoft.com/office/drawing/2014/main" id="{DC4EA962-413B-4A28-BDDE-C9B9D67DA8F4}"/>
+              </a:ext>
+            </a:extLst>
+          </p:cNvPr>
+          <p:cNvSpPr>
+            <a:spLocks xmlns:a="http://schemas.openxmlformats.org/drawingml/2006/main" noGrp="1"/>
+          </p:cNvSpPr>
+          <p:nvPr/>
+        </p:nvSpPr>
+        <p:spPr>
+          <a:xfrm xmlns:a="http://schemas.openxmlformats.org/drawingml/2006/main">
+            <a:off x="6877050" y="3495675"/>
+            <a:ext cx="4762500" cy="895350"/>
+          </a:xfrm>
+          <a:prstGeom xmlns:a="http://schemas.openxmlformats.org/drawingml/2006/main" prst="rect">
+            <a:avLst/>
+          </a:prstGeom>
+          <a:noFill xmlns:a="http://schemas.openxmlformats.org/drawingml/2006/main"/>
+          <a:ln xmlns:a="http://schemas.openxmlformats.org/drawingml/2006/main" w="0">
+            <a:noFill/>
+            <a:prstDash val="solid"/>
+          </a:ln>
+        </p:spPr>
+        <p:txBody>
+          <a:bodyPr xmlns:a="http://schemas.openxmlformats.org/drawingml/2006/main" anchor="t">
+            <a:normAutofit fontScale="100000"/>
+          </a:bodyPr>
+          <a:lstStyle xmlns:a="http://schemas.openxmlformats.org/drawingml/2006/main"/>
+          <a:p xmlns:a="http://schemas.openxmlformats.org/drawingml/2006/main">
+            <a:pPr algn="l">
+              <a:defRPr sz="1575" b="1">
+                <a:solidFill>
+                  <a:srgbClr val="111111"/>
+                </a:solidFill>
+                <a:latin typeface="Helvetica Neue"/>
+                <a:ea typeface="Helvetica Neue"/>
+                <a:cs typeface="Helvetica Neue"/>
+              </a:defRPr>
+            </a:pPr>
+            <a:r>
+              <a:rPr sz="1575" b="1">
+                <a:solidFill>
+                  <a:srgbClr val="111111"/>
+                </a:solidFill>
+                <a:latin typeface="Helvetica Neue"/>
+                <a:ea typeface="Helvetica Neue"/>
+                <a:cs typeface="Helvetica Neue"/>
+              </a:rPr>
+              <a:t>Compare hybrid search, reranking, and query transformation.</a:t>
+            </a:r>
+          </a:p>
+        </p:txBody>
+      </p:sp>
+      <p:sp>
+        <p:nvSpPr>
+          <p:cNvPr id="14" name="exam-number-5">
+            <a:extLst xmlns:a="http://schemas.openxmlformats.org/drawingml/2006/main">
+              <a:ext uri="{FF2B5EF4-FFF2-40B4-BE49-F238E27FC236}">
+                <a16:creationId xmlns:a16="http://schemas.microsoft.com/office/drawing/2014/main" id="{FF4C8851-27F4-49A9-896D-6525B719384D}"/>
+              </a:ext>
+            </a:extLst>
+          </p:cNvPr>
+          <p:cNvSpPr>
+            <a:spLocks xmlns:a="http://schemas.openxmlformats.org/drawingml/2006/main" noGrp="1"/>
+          </p:cNvSpPr>
+          <p:nvPr/>
+        </p:nvSpPr>
+        <p:spPr>
+          <a:xfrm xmlns:a="http://schemas.openxmlformats.org/drawingml/2006/main">
+            <a:off x="390525" y="4752975"/>
+            <a:ext cx="590550" cy="400050"/>
+          </a:xfrm>
+          <a:prstGeom xmlns:a="http://schemas.openxmlformats.org/drawingml/2006/main" prst="rect">
+            <a:avLst/>
+          </a:prstGeom>
+          <a:noFill xmlns:a="http://schemas.openxmlformats.org/drawingml/2006/main"/>
+          <a:ln xmlns:a="http://schemas.openxmlformats.org/drawingml/2006/main" w="0">
+            <a:noFill/>
+            <a:prstDash val="solid"/>
+          </a:ln>
+        </p:spPr>
+        <p:txBody>
+          <a:bodyPr xmlns:a="http://schemas.openxmlformats.org/drawingml/2006/main" anchor="t">
+            <a:noAutofit/>
+          </a:bodyPr>
+          <a:lstStyle xmlns:a="http://schemas.openxmlformats.org/drawingml/2006/main"/>
+          <a:p xmlns:a="http://schemas.openxmlformats.org/drawingml/2006/main">
+            <a:pPr algn="l">
+              <a:defRPr sz="1725" b="1">
+                <a:solidFill>
+                  <a:srgbClr val="73C8FF"/>
+                </a:solidFill>
+                <a:latin typeface="Helvetica Neue"/>
+                <a:ea typeface="Helvetica Neue"/>
+                <a:cs typeface="Helvetica Neue"/>
+              </a:defRPr>
+            </a:pPr>
+            <a:r>
+              <a:rPr sz="1725" b="1">
+                <a:solidFill>
+                  <a:srgbClr val="73C8FF"/>
+                </a:solidFill>
+                <a:latin typeface="Helvetica Neue"/>
+                <a:ea typeface="Helvetica Neue"/>
+                <a:cs typeface="Helvetica Neue"/>
+              </a:rPr>
+              <a:t>05</a:t>
+            </a:r>
+          </a:p>
+        </p:txBody>
+      </p:sp>
+      <p:sp>
+        <p:nvSpPr>
+          <p:cNvPr id="15" name="exam-question-5">
+            <a:extLst xmlns:a="http://schemas.openxmlformats.org/drawingml/2006/main">
+              <a:ext uri="{FF2B5EF4-FFF2-40B4-BE49-F238E27FC236}">
+                <a16:creationId xmlns:a16="http://schemas.microsoft.com/office/drawing/2014/main" id="{471AA265-5267-4FB1-BFDF-61365201CACB}"/>
+              </a:ext>
+            </a:extLst>
+          </p:cNvPr>
+          <p:cNvSpPr>
+            <a:spLocks xmlns:a="http://schemas.openxmlformats.org/drawingml/2006/main" noGrp="1"/>
+          </p:cNvSpPr>
+          <p:nvPr/>
+        </p:nvSpPr>
+        <p:spPr>
+          <a:xfrm xmlns:a="http://schemas.openxmlformats.org/drawingml/2006/main">
+            <a:off x="1076325" y="4752975"/>
+            <a:ext cx="4762500" cy="895350"/>
+          </a:xfrm>
+          <a:prstGeom xmlns:a="http://schemas.openxmlformats.org/drawingml/2006/main" prst="rect">
+            <a:avLst/>
+          </a:prstGeom>
+          <a:noFill xmlns:a="http://schemas.openxmlformats.org/drawingml/2006/main"/>
+          <a:ln xmlns:a="http://schemas.openxmlformats.org/drawingml/2006/main" w="0">
+            <a:noFill/>
+            <a:prstDash val="solid"/>
+          </a:ln>
+        </p:spPr>
+        <p:txBody>
+          <a:bodyPr xmlns:a="http://schemas.openxmlformats.org/drawingml/2006/main" anchor="t">
+            <a:normAutofit fontScale="100000"/>
+          </a:bodyPr>
+          <a:lstStyle xmlns:a="http://schemas.openxmlformats.org/drawingml/2006/main"/>
+          <a:p xmlns:a="http://schemas.openxmlformats.org/drawingml/2006/main">
+            <a:pPr algn="l">
+              <a:defRPr sz="1575" b="1">
+                <a:solidFill>
+                  <a:srgbClr val="111111"/>
+                </a:solidFill>
+                <a:latin typeface="Helvetica Neue"/>
+                <a:ea typeface="Helvetica Neue"/>
+                <a:cs typeface="Helvetica Neue"/>
+              </a:defRPr>
+            </a:pPr>
+            <a:r>
+              <a:rPr sz="1575" b="1">
+                <a:solidFill>
+                  <a:srgbClr val="111111"/>
+                </a:solidFill>
+                <a:latin typeface="Helvetica Neue"/>
+                <a:ea typeface="Helvetica Neue"/>
+                <a:cs typeface="Helvetica Neue"/>
+              </a:rPr>
+              <a:t>What is faithfulness and why is it important?</a:t>
+            </a:r>
+          </a:p>
+        </p:txBody>
+      </p:sp>
+      <p:sp>
+        <p:nvSpPr>
+          <p:cNvPr id="16" name="exam-number-6">
+            <a:extLst xmlns:a="http://schemas.openxmlformats.org/drawingml/2006/main">
+              <a:ext uri="{FF2B5EF4-FFF2-40B4-BE49-F238E27FC236}">
+                <a16:creationId xmlns:a16="http://schemas.microsoft.com/office/drawing/2014/main" id="{624A4A74-7C90-4980-9B69-195DD4D52840}"/>
+              </a:ext>
+            </a:extLst>
+          </p:cNvPr>
+          <p:cNvSpPr>
+            <a:spLocks xmlns:a="http://schemas.openxmlformats.org/drawingml/2006/main" noGrp="1"/>
+          </p:cNvSpPr>
+          <p:nvPr/>
+        </p:nvSpPr>
+        <p:spPr>
+          <a:xfrm xmlns:a="http://schemas.openxmlformats.org/drawingml/2006/main">
+            <a:off x="6191250" y="4752975"/>
+            <a:ext cx="590550" cy="400050"/>
+          </a:xfrm>
+          <a:prstGeom xmlns:a="http://schemas.openxmlformats.org/drawingml/2006/main" prst="rect">
+            <a:avLst/>
+          </a:prstGeom>
+          <a:noFill xmlns:a="http://schemas.openxmlformats.org/drawingml/2006/main"/>
+          <a:ln xmlns:a="http://schemas.openxmlformats.org/drawingml/2006/main" w="0">
+            <a:noFill/>
+            <a:prstDash val="solid"/>
+          </a:ln>
+        </p:spPr>
+        <p:txBody>
+          <a:bodyPr xmlns:a="http://schemas.openxmlformats.org/drawingml/2006/main" anchor="t">
+            <a:noAutofit/>
+          </a:bodyPr>
+          <a:lstStyle xmlns:a="http://schemas.openxmlformats.org/drawingml/2006/main"/>
+          <a:p xmlns:a="http://schemas.openxmlformats.org/drawingml/2006/main">
+            <a:pPr algn="l">
+              <a:defRPr sz="1725" b="1">
+                <a:solidFill>
+                  <a:srgbClr val="73C8FF"/>
+                </a:solidFill>
+                <a:latin typeface="Helvetica Neue"/>
+                <a:ea typeface="Helvetica Neue"/>
+                <a:cs typeface="Helvetica Neue"/>
+              </a:defRPr>
+            </a:pPr>
+            <a:r>
+              <a:rPr sz="1725" b="1">
+                <a:solidFill>
+                  <a:srgbClr val="73C8FF"/>
+                </a:solidFill>
+                <a:latin typeface="Helvetica Neue"/>
+                <a:ea typeface="Helvetica Neue"/>
+                <a:cs typeface="Helvetica Neue"/>
+              </a:rPr>
+              <a:t>06</a:t>
+            </a:r>
+          </a:p>
+        </p:txBody>
+      </p:sp>
+      <p:sp>
+        <p:nvSpPr>
+          <p:cNvPr id="17" name="exam-question-6">
+            <a:extLst xmlns:a="http://schemas.openxmlformats.org/drawingml/2006/main">
+              <a:ext uri="{FF2B5EF4-FFF2-40B4-BE49-F238E27FC236}">
+                <a16:creationId xmlns:a16="http://schemas.microsoft.com/office/drawing/2014/main" id="{21C1C5E2-A23E-4C06-9F8F-D1B18C97FFF9}"/>
+              </a:ext>
+            </a:extLst>
+          </p:cNvPr>
+          <p:cNvSpPr>
+            <a:spLocks xmlns:a="http://schemas.openxmlformats.org/drawingml/2006/main" noGrp="1"/>
+          </p:cNvSpPr>
+          <p:nvPr/>
+        </p:nvSpPr>
+        <p:spPr>
+          <a:xfrm xmlns:a="http://schemas.openxmlformats.org/drawingml/2006/main">
+            <a:off x="6877050" y="4752975"/>
+            <a:ext cx="4762500" cy="895350"/>
+          </a:xfrm>
+          <a:prstGeom xmlns:a="http://schemas.openxmlformats.org/drawingml/2006/main" prst="rect">
+            <a:avLst/>
+          </a:prstGeom>
+          <a:noFill xmlns:a="http://schemas.openxmlformats.org/drawingml/2006/main"/>
+          <a:ln xmlns:a="http://schemas.openxmlformats.org/drawingml/2006/main" w="0">
+            <a:noFill/>
+            <a:prstDash val="solid"/>
+          </a:ln>
+        </p:spPr>
+        <p:txBody>
+          <a:bodyPr xmlns:a="http://schemas.openxmlformats.org/drawingml/2006/main" anchor="t">
+            <a:normAutofit fontScale="100000"/>
+          </a:bodyPr>
+          <a:lstStyle xmlns:a="http://schemas.openxmlformats.org/drawingml/2006/main"/>
+          <a:p xmlns:a="http://schemas.openxmlformats.org/drawingml/2006/main">
+            <a:pPr algn="l">
+              <a:defRPr sz="1575" b="1">
+                <a:solidFill>
+                  <a:srgbClr val="111111"/>
+                </a:solidFill>
+                <a:latin typeface="Helvetica Neue"/>
+                <a:ea typeface="Helvetica Neue"/>
+                <a:cs typeface="Helvetica Neue"/>
+              </a:defRPr>
+            </a:pPr>
+            <a:r>
+              <a:rPr sz="1575" b="1">
+                <a:solidFill>
+                  <a:srgbClr val="111111"/>
+                </a:solidFill>
+                <a:latin typeface="Helvetica Neue"/>
+                <a:ea typeface="Helvetica Neue"/>
+                <a:cs typeface="Helvetica Neue"/>
+              </a:rPr>
+              <a:t>What can a citation-membership test establish, and what remains untested?</a:t>
+            </a:r>
+          </a:p>
+        </p:txBody>
+      </p:sp>
+    </p:spTree>
+    <p:extLst>
+      <p:ext uri="{BB962C8B-B14F-4D97-AF65-F5344CB8AC3E}">
+        <p14:creationId xmlns:p14="http://schemas.microsoft.com/office/powerpoint/2010/main" val="563438994"/>
+      </p:ext>
+    </p:extLst>
+  </p:cSld>
+</p:sld>
+</file>
+
+<file path=ppt/slides/slide11.xml><?xml version="1.0" encoding="utf-8"?>
 <p:sld xmlns:p="http://schemas.openxmlformats.org/presentationml/2006/main">
   <p:cSld>
     <p:bg>
@@ -2258,7 +3900,7 @@
           <p:cNvPr id="14" name="accent-line">
             <a:extLst xmlns:a="http://schemas.openxmlformats.org/drawingml/2006/main">
               <a:ext uri="{FF2B5EF4-FFF2-40B4-BE49-F238E27FC236}">
-                <a16:creationId xmlns:a16="http://schemas.microsoft.com/office/drawing/2014/main" id="{18566D91-A5A9-409E-B4AE-530F7D8336E7}"/>
+                <a16:creationId xmlns:a16="http://schemas.microsoft.com/office/drawing/2014/main" id="{3A41AB1A-CEA6-457C-BF2D-2172A2597EF9}"/>
               </a:ext>
             </a:extLst>
           </p:cNvPr>
@@ -2291,7 +3933,7 @@
           <p:cNvPr id="2" name="chapter-label">
             <a:extLst xmlns:a="http://schemas.openxmlformats.org/drawingml/2006/main">
               <a:ext uri="{FF2B5EF4-FFF2-40B4-BE49-F238E27FC236}">
-                <a16:creationId xmlns:a16="http://schemas.microsoft.com/office/drawing/2014/main" id="{1ABB1F56-93F1-4C55-9720-42C3D3F721FF}"/>
+                <a16:creationId xmlns:a16="http://schemas.microsoft.com/office/drawing/2014/main" id="{7C984000-E649-40D3-A63C-705093BCFEBC}"/>
               </a:ext>
             </a:extLst>
           </p:cNvPr>
@@ -2349,7 +3991,7 @@
           <p:cNvPr id="3" name="slide-number">
             <a:extLst xmlns:a="http://schemas.openxmlformats.org/drawingml/2006/main">
               <a:ext uri="{FF2B5EF4-FFF2-40B4-BE49-F238E27FC236}">
-                <a16:creationId xmlns:a16="http://schemas.microsoft.com/office/drawing/2014/main" id="{AA8E1DB1-8557-4193-8059-BEFA078AA070}"/>
+                <a16:creationId xmlns:a16="http://schemas.microsoft.com/office/drawing/2014/main" id="{59EE9F70-F8E6-41A9-B01B-AE7EE47CFE73}"/>
               </a:ext>
             </a:extLst>
           </p:cNvPr>
@@ -2397,7 +4039,7 @@
                 <a:ea typeface="Helvetica Neue"/>
                 <a:cs typeface="Helvetica Neue"/>
               </a:rPr>
-              <a:t>10</a:t>
+              <a:t>11</a:t>
             </a:r>
           </a:p>
         </p:txBody>
@@ -2407,7 +4049,7 @@
           <p:cNvPr id="4" name="chapter-footer">
             <a:extLst xmlns:a="http://schemas.openxmlformats.org/drawingml/2006/main">
               <a:ext uri="{FF2B5EF4-FFF2-40B4-BE49-F238E27FC236}">
-                <a16:creationId xmlns:a16="http://schemas.microsoft.com/office/drawing/2014/main" id="{F477BF2A-E3CC-45E1-B835-8D7EFF5A9E80}"/>
+                <a16:creationId xmlns:a16="http://schemas.microsoft.com/office/drawing/2014/main" id="{E6B2A9B8-439E-485F-968B-186DCEFA8190}"/>
               </a:ext>
             </a:extLst>
           </p:cNvPr>
@@ -2465,7 +4107,7 @@
           <p:cNvPr id="5" name="closing-title">
             <a:extLst xmlns:a="http://schemas.openxmlformats.org/drawingml/2006/main">
               <a:ext uri="{FF2B5EF4-FFF2-40B4-BE49-F238E27FC236}">
-                <a16:creationId xmlns:a16="http://schemas.microsoft.com/office/drawing/2014/main" id="{DBA4886C-6D25-4677-9678-B98E414205D5}"/>
+                <a16:creationId xmlns:a16="http://schemas.microsoft.com/office/drawing/2014/main" id="{CF50D3B1-8D32-44FC-B6C6-0E2E162CB2F0}"/>
               </a:ext>
             </a:extLst>
           </p:cNvPr>
@@ -2523,7 +4165,7 @@
           <p:cNvPr id="6" name="takeaway-number-1">
             <a:extLst xmlns:a="http://schemas.openxmlformats.org/drawingml/2006/main">
               <a:ext uri="{FF2B5EF4-FFF2-40B4-BE49-F238E27FC236}">
-                <a16:creationId xmlns:a16="http://schemas.microsoft.com/office/drawing/2014/main" id="{BE9AE57B-534E-41AB-A639-520BDD21AEA3}"/>
+                <a16:creationId xmlns:a16="http://schemas.microsoft.com/office/drawing/2014/main" id="{060054DC-B20D-4E09-9C47-CC7667610755}"/>
               </a:ext>
             </a:extLst>
           </p:cNvPr>
@@ -2581,7 +4223,7 @@
           <p:cNvPr id="7" name="takeaway-1">
             <a:extLst xmlns:a="http://schemas.openxmlformats.org/drawingml/2006/main">
               <a:ext uri="{FF2B5EF4-FFF2-40B4-BE49-F238E27FC236}">
-                <a16:creationId xmlns:a16="http://schemas.microsoft.com/office/drawing/2014/main" id="{D67C3477-DC83-493A-A9C2-5F6D87267330}"/>
+                <a16:creationId xmlns:a16="http://schemas.microsoft.com/office/drawing/2014/main" id="{68F1F5A6-F0D2-4B33-85B3-261149939BBA}"/>
               </a:ext>
             </a:extLst>
           </p:cNvPr>
@@ -2639,7 +4281,7 @@
           <p:cNvPr id="8" name="takeaway-number-2">
             <a:extLst xmlns:a="http://schemas.openxmlformats.org/drawingml/2006/main">
               <a:ext uri="{FF2B5EF4-FFF2-40B4-BE49-F238E27FC236}">
-                <a16:creationId xmlns:a16="http://schemas.microsoft.com/office/drawing/2014/main" id="{559F798F-263B-4A1B-9623-6446B3405A9F}"/>
+                <a16:creationId xmlns:a16="http://schemas.microsoft.com/office/drawing/2014/main" id="{F50AB513-2BCF-4B59-9E57-10B4311F3291}"/>
               </a:ext>
             </a:extLst>
           </p:cNvPr>
@@ -2697,7 +4339,7 @@
           <p:cNvPr id="9" name="takeaway-2">
             <a:extLst xmlns:a="http://schemas.openxmlformats.org/drawingml/2006/main">
               <a:ext uri="{FF2B5EF4-FFF2-40B4-BE49-F238E27FC236}">
-                <a16:creationId xmlns:a16="http://schemas.microsoft.com/office/drawing/2014/main" id="{54AFCE0E-65B3-4780-B949-5C71495F8AB7}"/>
+                <a16:creationId xmlns:a16="http://schemas.microsoft.com/office/drawing/2014/main" id="{28854923-2196-4786-ADEC-783EB4FDAAF1}"/>
               </a:ext>
             </a:extLst>
           </p:cNvPr>
@@ -2755,7 +4397,7 @@
           <p:cNvPr id="10" name="takeaway-number-3">
             <a:extLst xmlns:a="http://schemas.openxmlformats.org/drawingml/2006/main">
               <a:ext uri="{FF2B5EF4-FFF2-40B4-BE49-F238E27FC236}">
-                <a16:creationId xmlns:a16="http://schemas.microsoft.com/office/drawing/2014/main" id="{7AF6C1D8-FFB9-40B1-B102-17E4DBAE59E7}"/>
+                <a16:creationId xmlns:a16="http://schemas.microsoft.com/office/drawing/2014/main" id="{EE40F374-7846-4E38-A888-7B2C496E0F44}"/>
               </a:ext>
             </a:extLst>
           </p:cNvPr>
@@ -2813,7 +4455,7 @@
           <p:cNvPr id="11" name="takeaway-3">
             <a:extLst xmlns:a="http://schemas.openxmlformats.org/drawingml/2006/main">
               <a:ext uri="{FF2B5EF4-FFF2-40B4-BE49-F238E27FC236}">
-                <a16:creationId xmlns:a16="http://schemas.microsoft.com/office/drawing/2014/main" id="{8E15812A-098E-4F2E-A88D-530E863AE95F}"/>
+                <a16:creationId xmlns:a16="http://schemas.microsoft.com/office/drawing/2014/main" id="{13E20865-6A96-4858-904A-4FBCEBC51B98}"/>
               </a:ext>
             </a:extLst>
           </p:cNvPr>
@@ -2871,7 +4513,7 @@
           <p:cNvPr id="12" name="takeaway-number-4">
             <a:extLst xmlns:a="http://schemas.openxmlformats.org/drawingml/2006/main">
               <a:ext uri="{FF2B5EF4-FFF2-40B4-BE49-F238E27FC236}">
-                <a16:creationId xmlns:a16="http://schemas.microsoft.com/office/drawing/2014/main" id="{1D0835FC-F947-4A4E-8A3B-B2C0603E3365}"/>
+                <a16:creationId xmlns:a16="http://schemas.microsoft.com/office/drawing/2014/main" id="{740782B8-D1D7-4C36-A8BB-24E8F5A48074}"/>
               </a:ext>
             </a:extLst>
           </p:cNvPr>
@@ -2929,7 +4571,7 @@
           <p:cNvPr id="13" name="takeaway-4">
             <a:extLst xmlns:a="http://schemas.openxmlformats.org/drawingml/2006/main">
               <a:ext uri="{FF2B5EF4-FFF2-40B4-BE49-F238E27FC236}">
-                <a16:creationId xmlns:a16="http://schemas.microsoft.com/office/drawing/2014/main" id="{EE6B0ED3-BD93-448D-A2CE-B1200508C30B}"/>
+                <a16:creationId xmlns:a16="http://schemas.microsoft.com/office/drawing/2014/main" id="{033E8440-5DA3-481F-BDD8-9A2ED4DD8BB3}"/>
               </a:ext>
             </a:extLst>
           </p:cNvPr>
@@ -2985,7 +4627,533 @@
     </p:spTree>
     <p:extLst>
       <p:ext uri="{BB962C8B-B14F-4D97-AF65-F5344CB8AC3E}">
-        <p14:creationId xmlns:p14="http://schemas.microsoft.com/office/powerpoint/2010/main" val="1538935762"/>
+        <p14:creationId xmlns:p14="http://schemas.microsoft.com/office/powerpoint/2010/main" val="549013008"/>
+      </p:ext>
+    </p:extLst>
+  </p:cSld>
+</p:sld>
+</file>
+
+<file path=ppt/slides/slide12.xml><?xml version="1.0" encoding="utf-8"?>
+<p:sld xmlns:p="http://schemas.openxmlformats.org/presentationml/2006/main">
+  <p:cSld>
+    <p:bg>
+      <p:bgPr>
+        <a:solidFill xmlns:a="http://schemas.openxmlformats.org/drawingml/2006/main">
+          <a:srgbClr val="FFFFFF"/>
+        </a:solidFill>
+      </p:bgPr>
+    </p:bg>
+    <p:spTree>
+      <p:nvGrpSpPr>
+        <p:cNvPr id="1" name=""/>
+        <p:cNvGrpSpPr/>
+        <p:nvPr/>
+      </p:nvGrpSpPr>
+      <p:grpSpPr>
+        <a:xfrm xmlns:a="http://schemas.openxmlformats.org/drawingml/2006/main"/>
+      </p:grpSpPr>
+      <p:sp>
+        <p:nvSpPr>
+          <p:cNvPr id="10" name="accent-line">
+            <a:extLst xmlns:a="http://schemas.openxmlformats.org/drawingml/2006/main">
+              <a:ext uri="{FF2B5EF4-FFF2-40B4-BE49-F238E27FC236}">
+                <a16:creationId xmlns:a16="http://schemas.microsoft.com/office/drawing/2014/main" id="{57D24732-CD06-4E87-BB4D-8D73D6AF7100}"/>
+              </a:ext>
+            </a:extLst>
+          </p:cNvPr>
+          <p:cNvSpPr>
+            <a:spLocks xmlns:a="http://schemas.openxmlformats.org/drawingml/2006/main" noGrp="1"/>
+          </p:cNvSpPr>
+          <p:nvPr/>
+        </p:nvSpPr>
+        <p:spPr>
+          <a:xfrm xmlns:a="http://schemas.openxmlformats.org/drawingml/2006/main">
+            <a:off x="390525" y="304800"/>
+            <a:ext cx="11410950" cy="66675"/>
+          </a:xfrm>
+          <a:prstGeom xmlns:a="http://schemas.openxmlformats.org/drawingml/2006/main" prst="rect">
+            <a:avLst/>
+          </a:prstGeom>
+          <a:solidFill xmlns:a="http://schemas.openxmlformats.org/drawingml/2006/main">
+            <a:srgbClr val="73C8FF"/>
+          </a:solidFill>
+          <a:ln xmlns:a="http://schemas.openxmlformats.org/drawingml/2006/main" w="0">
+            <a:solidFill>
+              <a:srgbClr val="73C8FF"/>
+            </a:solidFill>
+            <a:prstDash val="solid"/>
+          </a:ln>
+        </p:spPr>
+      </p:sp>
+      <p:sp>
+        <p:nvSpPr>
+          <p:cNvPr id="2" name="chapter-label">
+            <a:extLst xmlns:a="http://schemas.openxmlformats.org/drawingml/2006/main">
+              <a:ext uri="{FF2B5EF4-FFF2-40B4-BE49-F238E27FC236}">
+                <a16:creationId xmlns:a16="http://schemas.microsoft.com/office/drawing/2014/main" id="{E0B0E6DC-AFDD-4482-AB9E-FBDE3345D002}"/>
+              </a:ext>
+            </a:extLst>
+          </p:cNvPr>
+          <p:cNvSpPr>
+            <a:spLocks xmlns:a="http://schemas.openxmlformats.org/drawingml/2006/main" noGrp="1"/>
+          </p:cNvSpPr>
+          <p:nvPr/>
+        </p:nvSpPr>
+        <p:spPr>
+          <a:xfrm xmlns:a="http://schemas.openxmlformats.org/drawingml/2006/main">
+            <a:off x="390525" y="466725"/>
+            <a:ext cx="4953000" cy="323850"/>
+          </a:xfrm>
+          <a:prstGeom xmlns:a="http://schemas.openxmlformats.org/drawingml/2006/main" prst="rect">
+            <a:avLst/>
+          </a:prstGeom>
+          <a:noFill xmlns:a="http://schemas.openxmlformats.org/drawingml/2006/main"/>
+          <a:ln xmlns:a="http://schemas.openxmlformats.org/drawingml/2006/main" w="0">
+            <a:noFill/>
+            <a:prstDash val="solid"/>
+          </a:ln>
+        </p:spPr>
+        <p:txBody>
+          <a:bodyPr xmlns:a="http://schemas.openxmlformats.org/drawingml/2006/main" anchor="t">
+            <a:noAutofit/>
+          </a:bodyPr>
+          <a:lstStyle xmlns:a="http://schemas.openxmlformats.org/drawingml/2006/main"/>
+          <a:p xmlns:a="http://schemas.openxmlformats.org/drawingml/2006/main">
+            <a:pPr algn="l">
+              <a:defRPr sz="1275" b="1">
+                <a:solidFill>
+                  <a:srgbClr val="5B5B57"/>
+                </a:solidFill>
+                <a:latin typeface="Helvetica Neue"/>
+                <a:ea typeface="Helvetica Neue"/>
+                <a:cs typeface="Helvetica Neue"/>
+              </a:defRPr>
+            </a:pPr>
+            <a:r>
+              <a:rPr sz="1275" b="1">
+                <a:solidFill>
+                  <a:srgbClr val="5B5B57"/>
+                </a:solidFill>
+                <a:latin typeface="Helvetica Neue"/>
+                <a:ea typeface="Helvetica Neue"/>
+                <a:cs typeface="Helvetica Neue"/>
+              </a:rPr>
+              <a:t>PRACTICE AND READING  /  06</a:t>
+            </a:r>
+          </a:p>
+        </p:txBody>
+      </p:sp>
+      <p:sp>
+        <p:nvSpPr>
+          <p:cNvPr id="3" name="slide-number">
+            <a:extLst xmlns:a="http://schemas.openxmlformats.org/drawingml/2006/main">
+              <a:ext uri="{FF2B5EF4-FFF2-40B4-BE49-F238E27FC236}">
+                <a16:creationId xmlns:a16="http://schemas.microsoft.com/office/drawing/2014/main" id="{1A240237-2B73-4F2D-BFB4-392E06F9D0EA}"/>
+              </a:ext>
+            </a:extLst>
+          </p:cNvPr>
+          <p:cNvSpPr>
+            <a:spLocks xmlns:a="http://schemas.openxmlformats.org/drawingml/2006/main" noGrp="1"/>
+          </p:cNvSpPr>
+          <p:nvPr/>
+        </p:nvSpPr>
+        <p:spPr>
+          <a:xfrm xmlns:a="http://schemas.openxmlformats.org/drawingml/2006/main">
+            <a:off x="11049000" y="6286500"/>
+            <a:ext cx="742950" cy="266700"/>
+          </a:xfrm>
+          <a:prstGeom xmlns:a="http://schemas.openxmlformats.org/drawingml/2006/main" prst="rect">
+            <a:avLst/>
+          </a:prstGeom>
+          <a:noFill xmlns:a="http://schemas.openxmlformats.org/drawingml/2006/main"/>
+          <a:ln xmlns:a="http://schemas.openxmlformats.org/drawingml/2006/main" w="0">
+            <a:noFill/>
+            <a:prstDash val="solid"/>
+          </a:ln>
+        </p:spPr>
+        <p:txBody>
+          <a:bodyPr xmlns:a="http://schemas.openxmlformats.org/drawingml/2006/main" anchor="t">
+            <a:noAutofit/>
+          </a:bodyPr>
+          <a:lstStyle xmlns:a="http://schemas.openxmlformats.org/drawingml/2006/main"/>
+          <a:p xmlns:a="http://schemas.openxmlformats.org/drawingml/2006/main">
+            <a:pPr algn="r">
+              <a:defRPr sz="1200" b="0">
+                <a:solidFill>
+                  <a:srgbClr val="5B5B57"/>
+                </a:solidFill>
+                <a:latin typeface="Helvetica Neue"/>
+                <a:ea typeface="Helvetica Neue"/>
+                <a:cs typeface="Helvetica Neue"/>
+              </a:defRPr>
+            </a:pPr>
+            <a:r>
+              <a:rPr sz="1200" b="0">
+                <a:solidFill>
+                  <a:srgbClr val="5B5B57"/>
+                </a:solidFill>
+                <a:latin typeface="Helvetica Neue"/>
+                <a:ea typeface="Helvetica Neue"/>
+                <a:cs typeface="Helvetica Neue"/>
+              </a:rPr>
+              <a:t>12</a:t>
+            </a:r>
+          </a:p>
+        </p:txBody>
+      </p:sp>
+      <p:sp>
+        <p:nvSpPr>
+          <p:cNvPr id="4" name="chapter-footer">
+            <a:extLst xmlns:a="http://schemas.openxmlformats.org/drawingml/2006/main">
+              <a:ext uri="{FF2B5EF4-FFF2-40B4-BE49-F238E27FC236}">
+                <a16:creationId xmlns:a16="http://schemas.microsoft.com/office/drawing/2014/main" id="{159E93C9-2ABB-42A6-BDFA-A28104EFC6D6}"/>
+              </a:ext>
+            </a:extLst>
+          </p:cNvPr>
+          <p:cNvSpPr>
+            <a:spLocks xmlns:a="http://schemas.openxmlformats.org/drawingml/2006/main" noGrp="1"/>
+          </p:cNvSpPr>
+          <p:nvPr/>
+        </p:nvSpPr>
+        <p:spPr>
+          <a:xfrm xmlns:a="http://schemas.openxmlformats.org/drawingml/2006/main">
+            <a:off x="390525" y="6286500"/>
+            <a:ext cx="8191500" cy="266700"/>
+          </a:xfrm>
+          <a:prstGeom xmlns:a="http://schemas.openxmlformats.org/drawingml/2006/main" prst="rect">
+            <a:avLst/>
+          </a:prstGeom>
+          <a:noFill xmlns:a="http://schemas.openxmlformats.org/drawingml/2006/main"/>
+          <a:ln xmlns:a="http://schemas.openxmlformats.org/drawingml/2006/main" w="0">
+            <a:noFill/>
+            <a:prstDash val="solid"/>
+          </a:ln>
+        </p:spPr>
+        <p:txBody>
+          <a:bodyPr xmlns:a="http://schemas.openxmlformats.org/drawingml/2006/main" anchor="t">
+            <a:noAutofit/>
+          </a:bodyPr>
+          <a:lstStyle xmlns:a="http://schemas.openxmlformats.org/drawingml/2006/main"/>
+          <a:p xmlns:a="http://schemas.openxmlformats.org/drawingml/2006/main">
+            <a:pPr algn="l">
+              <a:defRPr sz="1125" b="0">
+                <a:solidFill>
+                  <a:srgbClr val="5B5B57"/>
+                </a:solidFill>
+                <a:latin typeface="Helvetica Neue"/>
+                <a:ea typeface="Helvetica Neue"/>
+                <a:cs typeface="Helvetica Neue"/>
+              </a:defRPr>
+            </a:pPr>
+            <a:r>
+              <a:rPr sz="1125" b="0">
+                <a:solidFill>
+                  <a:srgbClr val="5B5B57"/>
+                </a:solidFill>
+                <a:latin typeface="Helvetica Neue"/>
+                <a:ea typeface="Helvetica Neue"/>
+                <a:cs typeface="Helvetica Neue"/>
+              </a:rPr>
+              <a:t>RAG and Agentic RAG</a:t>
+            </a:r>
+          </a:p>
+        </p:txBody>
+      </p:sp>
+      <p:sp>
+        <p:nvSpPr>
+          <p:cNvPr id="5" name="practice-title">
+            <a:extLst xmlns:a="http://schemas.openxmlformats.org/drawingml/2006/main">
+              <a:ext uri="{FF2B5EF4-FFF2-40B4-BE49-F238E27FC236}">
+                <a16:creationId xmlns:a16="http://schemas.microsoft.com/office/drawing/2014/main" id="{B2E28AAB-2CD1-49E8-9B95-0F58E5759BCE}"/>
+              </a:ext>
+            </a:extLst>
+          </p:cNvPr>
+          <p:cNvSpPr>
+            <a:spLocks xmlns:a="http://schemas.openxmlformats.org/drawingml/2006/main" noGrp="1"/>
+          </p:cNvSpPr>
+          <p:nvPr/>
+        </p:nvSpPr>
+        <p:spPr>
+          <a:xfrm xmlns:a="http://schemas.openxmlformats.org/drawingml/2006/main">
+            <a:off x="390525" y="1000125"/>
+            <a:ext cx="11144250" cy="666750"/>
+          </a:xfrm>
+          <a:prstGeom xmlns:a="http://schemas.openxmlformats.org/drawingml/2006/main" prst="rect">
+            <a:avLst/>
+          </a:prstGeom>
+          <a:noFill xmlns:a="http://schemas.openxmlformats.org/drawingml/2006/main"/>
+          <a:ln xmlns:a="http://schemas.openxmlformats.org/drawingml/2006/main" w="0">
+            <a:noFill/>
+            <a:prstDash val="solid"/>
+          </a:ln>
+        </p:spPr>
+        <p:txBody>
+          <a:bodyPr xmlns:a="http://schemas.openxmlformats.org/drawingml/2006/main" anchor="t">
+            <a:normAutofit fontScale="100000"/>
+          </a:bodyPr>
+          <a:lstStyle xmlns:a="http://schemas.openxmlformats.org/drawingml/2006/main"/>
+          <a:p xmlns:a="http://schemas.openxmlformats.org/drawingml/2006/main">
+            <a:pPr algn="l">
+              <a:defRPr sz="3000" b="1">
+                <a:solidFill>
+                  <a:srgbClr val="111111"/>
+                </a:solidFill>
+                <a:latin typeface="Helvetica Neue"/>
+                <a:ea typeface="Helvetica Neue"/>
+                <a:cs typeface="Helvetica Neue"/>
+              </a:defRPr>
+            </a:pPr>
+            <a:r>
+              <a:rPr sz="3000" b="1">
+                <a:solidFill>
+                  <a:srgbClr val="111111"/>
+                </a:solidFill>
+                <a:latin typeface="Helvetica Neue"/>
+                <a:ea typeface="Helvetica Neue"/>
+                <a:cs typeface="Helvetica Neue"/>
+              </a:rPr>
+              <a:t>Evidence to submit</a:t>
+            </a:r>
+          </a:p>
+        </p:txBody>
+      </p:sp>
+      <p:sp>
+        <p:nvSpPr>
+          <p:cNvPr id="6" name="practice-task">
+            <a:extLst xmlns:a="http://schemas.openxmlformats.org/drawingml/2006/main">
+              <a:ext uri="{FF2B5EF4-FFF2-40B4-BE49-F238E27FC236}">
+                <a16:creationId xmlns:a16="http://schemas.microsoft.com/office/drawing/2014/main" id="{EB71A4DA-FCED-40CF-A1FE-69FA577BE81B}"/>
+              </a:ext>
+            </a:extLst>
+          </p:cNvPr>
+          <p:cNvSpPr>
+            <a:spLocks xmlns:a="http://schemas.openxmlformats.org/drawingml/2006/main" noGrp="1"/>
+          </p:cNvSpPr>
+          <p:nvPr/>
+        </p:nvSpPr>
+        <p:spPr>
+          <a:xfrm xmlns:a="http://schemas.openxmlformats.org/drawingml/2006/main">
+            <a:off x="390525" y="2000250"/>
+            <a:ext cx="10953750" cy="1238250"/>
+          </a:xfrm>
+          <a:prstGeom xmlns:a="http://schemas.openxmlformats.org/drawingml/2006/main" prst="rect">
+            <a:avLst/>
+          </a:prstGeom>
+          <a:noFill xmlns:a="http://schemas.openxmlformats.org/drawingml/2006/main"/>
+          <a:ln xmlns:a="http://schemas.openxmlformats.org/drawingml/2006/main" w="0">
+            <a:noFill/>
+            <a:prstDash val="solid"/>
+          </a:ln>
+        </p:spPr>
+        <p:txBody>
+          <a:bodyPr xmlns:a="http://schemas.openxmlformats.org/drawingml/2006/main" anchor="t">
+            <a:normAutofit fontScale="100000"/>
+          </a:bodyPr>
+          <a:lstStyle xmlns:a="http://schemas.openxmlformats.org/drawingml/2006/main"/>
+          <a:p xmlns:a="http://schemas.openxmlformats.org/drawingml/2006/main">
+            <a:pPr algn="l">
+              <a:defRPr sz="1950" b="0">
+                <a:solidFill>
+                  <a:srgbClr val="111111"/>
+                </a:solidFill>
+                <a:latin typeface="Helvetica Neue"/>
+                <a:ea typeface="Helvetica Neue"/>
+                <a:cs typeface="Helvetica Neue"/>
+              </a:defRPr>
+            </a:pPr>
+            <a:r>
+              <a:rPr sz="1950" b="0">
+                <a:solidFill>
+                  <a:srgbClr val="111111"/>
+                </a:solidFill>
+                <a:latin typeface="Helvetica Neue"/>
+                <a:ea typeface="Helvetica Neue"/>
+                <a:cs typeface="Helvetica Neue"/>
+              </a:rPr>
+              <a:t>Complete Lab 6 and add unknown, conflicting, and irrelevant records. Compare zero repair with one repair using a fixed question set.</a:t>
+            </a:r>
+          </a:p>
+        </p:txBody>
+      </p:sp>
+      <p:sp>
+        <p:nvSpPr>
+          <p:cNvPr id="7" name="practice-check">
+            <a:extLst xmlns:a="http://schemas.openxmlformats.org/drawingml/2006/main">
+              <a:ext uri="{FF2B5EF4-FFF2-40B4-BE49-F238E27FC236}">
+                <a16:creationId xmlns:a16="http://schemas.microsoft.com/office/drawing/2014/main" id="{CE3EB52F-C4B6-42BE-8101-44F52B644091}"/>
+              </a:ext>
+            </a:extLst>
+          </p:cNvPr>
+          <p:cNvSpPr>
+            <a:spLocks xmlns:a="http://schemas.openxmlformats.org/drawingml/2006/main" noGrp="1"/>
+          </p:cNvSpPr>
+          <p:nvPr/>
+        </p:nvSpPr>
+        <p:spPr>
+          <a:xfrm xmlns:a="http://schemas.openxmlformats.org/drawingml/2006/main">
+            <a:off x="390525" y="3381375"/>
+            <a:ext cx="10953750" cy="1095375"/>
+          </a:xfrm>
+          <a:prstGeom xmlns:a="http://schemas.openxmlformats.org/drawingml/2006/main" prst="rect">
+            <a:avLst/>
+          </a:prstGeom>
+          <a:noFill xmlns:a="http://schemas.openxmlformats.org/drawingml/2006/main"/>
+          <a:ln xmlns:a="http://schemas.openxmlformats.org/drawingml/2006/main" w="0">
+            <a:noFill/>
+            <a:prstDash val="solid"/>
+          </a:ln>
+        </p:spPr>
+        <p:txBody>
+          <a:bodyPr xmlns:a="http://schemas.openxmlformats.org/drawingml/2006/main" anchor="t">
+            <a:normAutofit fontScale="100000"/>
+          </a:bodyPr>
+          <a:lstStyle xmlns:a="http://schemas.openxmlformats.org/drawingml/2006/main"/>
+          <a:p xmlns:a="http://schemas.openxmlformats.org/drawingml/2006/main">
+            <a:pPr algn="l">
+              <a:defRPr sz="1800" b="0">
+                <a:solidFill>
+                  <a:srgbClr val="5B5B57"/>
+                </a:solidFill>
+                <a:latin typeface="Helvetica Neue"/>
+                <a:ea typeface="Helvetica Neue"/>
+                <a:cs typeface="Helvetica Neue"/>
+              </a:defRPr>
+            </a:pPr>
+            <a:r>
+              <a:rPr sz="1800" b="0">
+                <a:solidFill>
+                  <a:srgbClr val="5B5B57"/>
+                </a:solidFill>
+                <a:latin typeface="Helvetica Neue"/>
+                <a:ea typeface="Helvetica Neue"/>
+                <a:cs typeface="Helvetica Neue"/>
+              </a:rPr>
+              <a:t>Report retrieval hits, unsupported answers, abstentions, and attempts separately. A known citation ID alone does not count as grounded correctness.</a:t>
+            </a:r>
+          </a:p>
+        </p:txBody>
+      </p:sp>
+      <p:sp>
+        <p:nvSpPr>
+          <p:cNvPr id="8" name="practice-readings">
+            <a:extLst xmlns:a="http://schemas.openxmlformats.org/drawingml/2006/main">
+              <a:ext uri="{FF2B5EF4-FFF2-40B4-BE49-F238E27FC236}">
+                <a16:creationId xmlns:a16="http://schemas.microsoft.com/office/drawing/2014/main" id="{886D77E1-7D8D-4368-AF99-7492EEF488A5}"/>
+              </a:ext>
+            </a:extLst>
+          </p:cNvPr>
+          <p:cNvSpPr>
+            <a:spLocks xmlns:a="http://schemas.openxmlformats.org/drawingml/2006/main" noGrp="1"/>
+          </p:cNvSpPr>
+          <p:nvPr/>
+        </p:nvSpPr>
+        <p:spPr>
+          <a:xfrm xmlns:a="http://schemas.openxmlformats.org/drawingml/2006/main">
+            <a:off x="390525" y="4667250"/>
+            <a:ext cx="10953750" cy="1000125"/>
+          </a:xfrm>
+          <a:prstGeom xmlns:a="http://schemas.openxmlformats.org/drawingml/2006/main" prst="rect">
+            <a:avLst/>
+          </a:prstGeom>
+          <a:noFill xmlns:a="http://schemas.openxmlformats.org/drawingml/2006/main"/>
+          <a:ln xmlns:a="http://schemas.openxmlformats.org/drawingml/2006/main" w="0">
+            <a:noFill/>
+            <a:prstDash val="solid"/>
+          </a:ln>
+        </p:spPr>
+        <p:txBody>
+          <a:bodyPr xmlns:a="http://schemas.openxmlformats.org/drawingml/2006/main" anchor="t">
+            <a:normAutofit fontScale="100000"/>
+          </a:bodyPr>
+          <a:lstStyle xmlns:a="http://schemas.openxmlformats.org/drawingml/2006/main"/>
+          <a:p xmlns:a="http://schemas.openxmlformats.org/drawingml/2006/main">
+            <a:pPr algn="l">
+              <a:defRPr sz="1425" b="0">
+                <a:solidFill>
+                  <a:srgbClr val="111111"/>
+                </a:solidFill>
+                <a:latin typeface="Helvetica Neue"/>
+                <a:ea typeface="Helvetica Neue"/>
+                <a:cs typeface="Helvetica Neue"/>
+              </a:defRPr>
+            </a:pPr>
+            <a:r>
+              <a:rPr sz="1425" b="0">
+                <a:solidFill>
+                  <a:srgbClr val="111111"/>
+                </a:solidFill>
+                <a:latin typeface="Helvetica Neue"/>
+                <a:ea typeface="Helvetica Neue"/>
+                <a:cs typeface="Helvetica Neue"/>
+              </a:rPr>
+              <a:t>S4  Gemini structured outputs</a:t>
+            </a:r>
+          </a:p>
+        </p:txBody>
+      </p:sp>
+      <p:sp>
+        <p:nvSpPr>
+          <p:cNvPr id="9" name="practice-lab">
+            <a:extLst xmlns:a="http://schemas.openxmlformats.org/drawingml/2006/main">
+              <a:ext uri="{FF2B5EF4-FFF2-40B4-BE49-F238E27FC236}">
+                <a16:creationId xmlns:a16="http://schemas.microsoft.com/office/drawing/2014/main" id="{F27E2180-01ED-4972-8DB3-616D756908CF}"/>
+              </a:ext>
+            </a:extLst>
+          </p:cNvPr>
+          <p:cNvSpPr>
+            <a:spLocks xmlns:a="http://schemas.openxmlformats.org/drawingml/2006/main" noGrp="1"/>
+          </p:cNvSpPr>
+          <p:nvPr/>
+        </p:nvSpPr>
+        <p:spPr>
+          <a:xfrm xmlns:a="http://schemas.openxmlformats.org/drawingml/2006/main">
+            <a:off x="390525" y="5857875"/>
+            <a:ext cx="10953750" cy="266700"/>
+          </a:xfrm>
+          <a:prstGeom xmlns:a="http://schemas.openxmlformats.org/drawingml/2006/main" prst="rect">
+            <a:avLst/>
+          </a:prstGeom>
+          <a:noFill xmlns:a="http://schemas.openxmlformats.org/drawingml/2006/main"/>
+          <a:ln xmlns:a="http://schemas.openxmlformats.org/drawingml/2006/main" w="0">
+            <a:noFill/>
+            <a:prstDash val="solid"/>
+          </a:ln>
+        </p:spPr>
+        <p:txBody>
+          <a:bodyPr xmlns:a="http://schemas.openxmlformats.org/drawingml/2006/main" anchor="t">
+            <a:normAutofit fontScale="90196"/>
+          </a:bodyPr>
+          <a:lstStyle xmlns:a="http://schemas.openxmlformats.org/drawingml/2006/main"/>
+          <a:p xmlns:a="http://schemas.openxmlformats.org/drawingml/2006/main">
+            <a:pPr algn="l">
+              <a:defRPr sz="1275" b="0">
+                <a:solidFill>
+                  <a:srgbClr val="5B5B57"/>
+                </a:solidFill>
+                <a:latin typeface="Helvetica Neue"/>
+                <a:ea typeface="Helvetica Neue"/>
+                <a:cs typeface="Helvetica Neue"/>
+              </a:defRPr>
+            </a:pPr>
+            <a:r>
+              <a:rPr sz="1275" b="0">
+                <a:solidFill>
+                  <a:srgbClr val="5B5B57"/>
+                </a:solidFill>
+                <a:latin typeface="Helvetica Neue"/>
+                <a:ea typeface="Helvetica Neue"/>
+                <a:cs typeface="Helvetica Neue"/>
+              </a:rPr>
+              <a:t>labs/06_langgraph_corrective_rag.ipynb</a:t>
+            </a:r>
+          </a:p>
+        </p:txBody>
+      </p:sp>
+    </p:spTree>
+    <p:extLst>
+      <p:ext uri="{BB962C8B-B14F-4D97-AF65-F5344CB8AC3E}">
+        <p14:creationId xmlns:p14="http://schemas.microsoft.com/office/powerpoint/2010/main" val="575560006"/>
       </p:ext>
     </p:extLst>
   </p:cSld>
@@ -3016,7 +5184,7 @@
           <p:cNvPr id="14" name="accent-line">
             <a:extLst xmlns:a="http://schemas.openxmlformats.org/drawingml/2006/main">
               <a:ext uri="{FF2B5EF4-FFF2-40B4-BE49-F238E27FC236}">
-                <a16:creationId xmlns:a16="http://schemas.microsoft.com/office/drawing/2014/main" id="{E1551AF1-9397-44AC-9020-E7A190FF1FDD}"/>
+                <a16:creationId xmlns:a16="http://schemas.microsoft.com/office/drawing/2014/main" id="{282BAE77-C585-4E5E-8851-FB74981D843C}"/>
               </a:ext>
             </a:extLst>
           </p:cNvPr>
@@ -3049,7 +5217,7 @@
           <p:cNvPr id="2" name="chapter-label">
             <a:extLst xmlns:a="http://schemas.openxmlformats.org/drawingml/2006/main">
               <a:ext uri="{FF2B5EF4-FFF2-40B4-BE49-F238E27FC236}">
-                <a16:creationId xmlns:a16="http://schemas.microsoft.com/office/drawing/2014/main" id="{C1875C55-D331-440A-B658-072635412BDF}"/>
+                <a16:creationId xmlns:a16="http://schemas.microsoft.com/office/drawing/2014/main" id="{686D01AA-9BCA-4214-B3EB-B0667530495F}"/>
               </a:ext>
             </a:extLst>
           </p:cNvPr>
@@ -3107,7 +5275,7 @@
           <p:cNvPr id="3" name="slide-number">
             <a:extLst xmlns:a="http://schemas.openxmlformats.org/drawingml/2006/main">
               <a:ext uri="{FF2B5EF4-FFF2-40B4-BE49-F238E27FC236}">
-                <a16:creationId xmlns:a16="http://schemas.microsoft.com/office/drawing/2014/main" id="{47D0B291-30BA-4DEE-BF9B-62C4ADC4A911}"/>
+                <a16:creationId xmlns:a16="http://schemas.microsoft.com/office/drawing/2014/main" id="{C6579EF0-E8AE-4EE1-B980-9F2FE9DB3BF4}"/>
               </a:ext>
             </a:extLst>
           </p:cNvPr>
@@ -3165,7 +5333,7 @@
           <p:cNvPr id="4" name="chapter-footer">
             <a:extLst xmlns:a="http://schemas.openxmlformats.org/drawingml/2006/main">
               <a:ext uri="{FF2B5EF4-FFF2-40B4-BE49-F238E27FC236}">
-                <a16:creationId xmlns:a16="http://schemas.microsoft.com/office/drawing/2014/main" id="{A9136A52-3D18-402C-9475-B1CD5A4BDA7E}"/>
+                <a16:creationId xmlns:a16="http://schemas.microsoft.com/office/drawing/2014/main" id="{9EF57541-9EDD-4362-97AB-22B0B638C853}"/>
               </a:ext>
             </a:extLst>
           </p:cNvPr>
@@ -3223,7 +5391,7 @@
           <p:cNvPr id="5" name="objectives-title">
             <a:extLst xmlns:a="http://schemas.openxmlformats.org/drawingml/2006/main">
               <a:ext uri="{FF2B5EF4-FFF2-40B4-BE49-F238E27FC236}">
-                <a16:creationId xmlns:a16="http://schemas.microsoft.com/office/drawing/2014/main" id="{47C7C5DA-FD6B-45B5-9355-B3441D53A478}"/>
+                <a16:creationId xmlns:a16="http://schemas.microsoft.com/office/drawing/2014/main" id="{E552A181-6C7D-4D7D-A930-1E542D42DC45}"/>
               </a:ext>
             </a:extLst>
           </p:cNvPr>
@@ -3281,7 +5449,7 @@
           <p:cNvPr id="6" name="objective-number-1">
             <a:extLst xmlns:a="http://schemas.openxmlformats.org/drawingml/2006/main">
               <a:ext uri="{FF2B5EF4-FFF2-40B4-BE49-F238E27FC236}">
-                <a16:creationId xmlns:a16="http://schemas.microsoft.com/office/drawing/2014/main" id="{6A754D39-8A54-433D-B38F-06D08F087297}"/>
+                <a16:creationId xmlns:a16="http://schemas.microsoft.com/office/drawing/2014/main" id="{9675D11D-71D9-406A-BE68-8606886EEA3B}"/>
               </a:ext>
             </a:extLst>
           </p:cNvPr>
@@ -3339,7 +5507,7 @@
           <p:cNvPr id="7" name="objective-1">
             <a:extLst xmlns:a="http://schemas.openxmlformats.org/drawingml/2006/main">
               <a:ext uri="{FF2B5EF4-FFF2-40B4-BE49-F238E27FC236}">
-                <a16:creationId xmlns:a16="http://schemas.microsoft.com/office/drawing/2014/main" id="{CD27EB65-3537-4E45-8FD5-640B38F25A7F}"/>
+                <a16:creationId xmlns:a16="http://schemas.microsoft.com/office/drawing/2014/main" id="{8EFAC7E6-11D3-4B22-976A-6054827C9408}"/>
               </a:ext>
             </a:extLst>
           </p:cNvPr>
@@ -3397,7 +5565,7 @@
           <p:cNvPr id="8" name="objective-number-2">
             <a:extLst xmlns:a="http://schemas.openxmlformats.org/drawingml/2006/main">
               <a:ext uri="{FF2B5EF4-FFF2-40B4-BE49-F238E27FC236}">
-                <a16:creationId xmlns:a16="http://schemas.microsoft.com/office/drawing/2014/main" id="{0762FAB2-A4DC-4FC1-804C-41C120917FD4}"/>
+                <a16:creationId xmlns:a16="http://schemas.microsoft.com/office/drawing/2014/main" id="{C06A1626-92DA-41E9-B144-3575B1722847}"/>
               </a:ext>
             </a:extLst>
           </p:cNvPr>
@@ -3455,7 +5623,7 @@
           <p:cNvPr id="9" name="objective-2">
             <a:extLst xmlns:a="http://schemas.openxmlformats.org/drawingml/2006/main">
               <a:ext uri="{FF2B5EF4-FFF2-40B4-BE49-F238E27FC236}">
-                <a16:creationId xmlns:a16="http://schemas.microsoft.com/office/drawing/2014/main" id="{93AECABE-8801-45BD-895B-9C6D52A42841}"/>
+                <a16:creationId xmlns:a16="http://schemas.microsoft.com/office/drawing/2014/main" id="{BBB694C3-8759-4B5A-A37E-1E36134D047B}"/>
               </a:ext>
             </a:extLst>
           </p:cNvPr>
@@ -3513,7 +5681,7 @@
           <p:cNvPr id="10" name="objective-number-3">
             <a:extLst xmlns:a="http://schemas.openxmlformats.org/drawingml/2006/main">
               <a:ext uri="{FF2B5EF4-FFF2-40B4-BE49-F238E27FC236}">
-                <a16:creationId xmlns:a16="http://schemas.microsoft.com/office/drawing/2014/main" id="{325C4CC0-543A-49F6-A73A-2C2FAC81445A}"/>
+                <a16:creationId xmlns:a16="http://schemas.microsoft.com/office/drawing/2014/main" id="{E972139A-FC20-4BC3-9138-1ACBB7B85DCC}"/>
               </a:ext>
             </a:extLst>
           </p:cNvPr>
@@ -3571,7 +5739,7 @@
           <p:cNvPr id="11" name="objective-3">
             <a:extLst xmlns:a="http://schemas.openxmlformats.org/drawingml/2006/main">
               <a:ext uri="{FF2B5EF4-FFF2-40B4-BE49-F238E27FC236}">
-                <a16:creationId xmlns:a16="http://schemas.microsoft.com/office/drawing/2014/main" id="{752EDC38-FEE7-4197-824B-3FEC3F354E39}"/>
+                <a16:creationId xmlns:a16="http://schemas.microsoft.com/office/drawing/2014/main" id="{A27589A0-319D-4A1A-B214-E14AD558DEF9}"/>
               </a:ext>
             </a:extLst>
           </p:cNvPr>
@@ -3629,7 +5797,7 @@
           <p:cNvPr id="12" name="objective-number-4">
             <a:extLst xmlns:a="http://schemas.openxmlformats.org/drawingml/2006/main">
               <a:ext uri="{FF2B5EF4-FFF2-40B4-BE49-F238E27FC236}">
-                <a16:creationId xmlns:a16="http://schemas.microsoft.com/office/drawing/2014/main" id="{4ACD73D1-F955-47BD-9F55-D86CFE459AD9}"/>
+                <a16:creationId xmlns:a16="http://schemas.microsoft.com/office/drawing/2014/main" id="{9F6014F3-C10C-49CD-B3FD-B4E5C106EBEB}"/>
               </a:ext>
             </a:extLst>
           </p:cNvPr>
@@ -3687,7 +5855,7 @@
           <p:cNvPr id="13" name="objective-4">
             <a:extLst xmlns:a="http://schemas.openxmlformats.org/drawingml/2006/main">
               <a:ext uri="{FF2B5EF4-FFF2-40B4-BE49-F238E27FC236}">
-                <a16:creationId xmlns:a16="http://schemas.microsoft.com/office/drawing/2014/main" id="{C1F77486-CA03-4EFD-98CB-8E2F734B627D}"/>
+                <a16:creationId xmlns:a16="http://schemas.microsoft.com/office/drawing/2014/main" id="{8D301128-01E3-4CF6-86CA-0330BE9350F6}"/>
               </a:ext>
             </a:extLst>
           </p:cNvPr>
@@ -3743,7 +5911,7 @@
     </p:spTree>
     <p:extLst>
       <p:ext uri="{BB962C8B-B14F-4D97-AF65-F5344CB8AC3E}">
-        <p14:creationId xmlns:p14="http://schemas.microsoft.com/office/powerpoint/2010/main" val="184989705"/>
+        <p14:creationId xmlns:p14="http://schemas.microsoft.com/office/powerpoint/2010/main" val="89124994"/>
       </p:ext>
     </p:extLst>
   </p:cSld>
@@ -3774,7 +5942,7 @@
           <p:cNvPr id="9" name="accent-line">
             <a:extLst xmlns:a="http://schemas.openxmlformats.org/drawingml/2006/main">
               <a:ext uri="{FF2B5EF4-FFF2-40B4-BE49-F238E27FC236}">
-                <a16:creationId xmlns:a16="http://schemas.microsoft.com/office/drawing/2014/main" id="{A5BC9C9C-9A34-4206-A0C6-A53D280A9C1D}"/>
+                <a16:creationId xmlns:a16="http://schemas.microsoft.com/office/drawing/2014/main" id="{92069CFE-CA07-48A4-947F-67341E7E874D}"/>
               </a:ext>
             </a:extLst>
           </p:cNvPr>
@@ -3807,7 +5975,7 @@
           <p:cNvPr id="2" name="chapter-label">
             <a:extLst xmlns:a="http://schemas.openxmlformats.org/drawingml/2006/main">
               <a:ext uri="{FF2B5EF4-FFF2-40B4-BE49-F238E27FC236}">
-                <a16:creationId xmlns:a16="http://schemas.microsoft.com/office/drawing/2014/main" id="{A55163DC-F0CF-4D47-A406-88D4F1B04316}"/>
+                <a16:creationId xmlns:a16="http://schemas.microsoft.com/office/drawing/2014/main" id="{413ADC1A-7B9C-41B0-A3ED-EB162311ABB7}"/>
               </a:ext>
             </a:extLst>
           </p:cNvPr>
@@ -3865,7 +6033,7 @@
           <p:cNvPr id="3" name="slide-number">
             <a:extLst xmlns:a="http://schemas.openxmlformats.org/drawingml/2006/main">
               <a:ext uri="{FF2B5EF4-FFF2-40B4-BE49-F238E27FC236}">
-                <a16:creationId xmlns:a16="http://schemas.microsoft.com/office/drawing/2014/main" id="{BBA906B7-3D45-422A-BB56-348D555A473A}"/>
+                <a16:creationId xmlns:a16="http://schemas.microsoft.com/office/drawing/2014/main" id="{13B55679-22CC-47D6-A27A-DA52A579F2C3}"/>
               </a:ext>
             </a:extLst>
           </p:cNvPr>
@@ -3923,7 +6091,7 @@
           <p:cNvPr id="4" name="chapter-footer">
             <a:extLst xmlns:a="http://schemas.openxmlformats.org/drawingml/2006/main">
               <a:ext uri="{FF2B5EF4-FFF2-40B4-BE49-F238E27FC236}">
-                <a16:creationId xmlns:a16="http://schemas.microsoft.com/office/drawing/2014/main" id="{379BC796-474C-4ECC-BA2B-A351B283E8FF}"/>
+                <a16:creationId xmlns:a16="http://schemas.microsoft.com/office/drawing/2014/main" id="{22F7598C-4FFC-48BF-8204-A554D0F55A1E}"/>
               </a:ext>
             </a:extLst>
           </p:cNvPr>
@@ -3981,7 +6149,7 @@
           <p:cNvPr id="5" name="section-title">
             <a:extLst xmlns:a="http://schemas.openxmlformats.org/drawingml/2006/main">
               <a:ext uri="{FF2B5EF4-FFF2-40B4-BE49-F238E27FC236}">
-                <a16:creationId xmlns:a16="http://schemas.microsoft.com/office/drawing/2014/main" id="{39D55228-C0A3-4DA1-B375-FA2DB49AD337}"/>
+                <a16:creationId xmlns:a16="http://schemas.microsoft.com/office/drawing/2014/main" id="{8E6E8B2D-0091-45F0-ABB3-7FA303F05D98}"/>
               </a:ext>
             </a:extLst>
           </p:cNvPr>
@@ -4039,7 +6207,7 @@
           <p:cNvPr id="6" name="section-explanation">
             <a:extLst xmlns:a="http://schemas.openxmlformats.org/drawingml/2006/main">
               <a:ext uri="{FF2B5EF4-FFF2-40B4-BE49-F238E27FC236}">
-                <a16:creationId xmlns:a16="http://schemas.microsoft.com/office/drawing/2014/main" id="{EA0585F2-5912-40D1-A255-DB5C73E6FDD0}"/>
+                <a16:creationId xmlns:a16="http://schemas.microsoft.com/office/drawing/2014/main" id="{0EAAB8D4-C972-4C2B-A0EF-3DD4EDEBF97C}"/>
               </a:ext>
             </a:extLst>
           </p:cNvPr>
@@ -4097,7 +6265,7 @@
           <p:cNvPr id="7" name="column-rule">
             <a:extLst xmlns:a="http://schemas.openxmlformats.org/drawingml/2006/main">
               <a:ext uri="{FF2B5EF4-FFF2-40B4-BE49-F238E27FC236}">
-                <a16:creationId xmlns:a16="http://schemas.microsoft.com/office/drawing/2014/main" id="{BCBB4AFC-F3EE-4F30-B52C-E0C5C8F3257D}"/>
+                <a16:creationId xmlns:a16="http://schemas.microsoft.com/office/drawing/2014/main" id="{08E5F401-172B-4424-B677-30B3A28174A0}"/>
               </a:ext>
             </a:extLst>
           </p:cNvPr>
@@ -4130,7 +6298,7 @@
           <p:cNvPr id="8" name="section-points">
             <a:extLst xmlns:a="http://schemas.openxmlformats.org/drawingml/2006/main">
               <a:ext uri="{FF2B5EF4-FFF2-40B4-BE49-F238E27FC236}">
-                <a16:creationId xmlns:a16="http://schemas.microsoft.com/office/drawing/2014/main" id="{4E0B56F9-1659-43FF-93C2-993136CDBFD5}"/>
+                <a16:creationId xmlns:a16="http://schemas.microsoft.com/office/drawing/2014/main" id="{5B5AE800-81F1-431F-BD4D-A27A29D63DCB}"/>
               </a:ext>
             </a:extLst>
           </p:cNvPr>
@@ -4270,7 +6438,7 @@
     </p:spTree>
     <p:extLst>
       <p:ext uri="{BB962C8B-B14F-4D97-AF65-F5344CB8AC3E}">
-        <p14:creationId xmlns:p14="http://schemas.microsoft.com/office/powerpoint/2010/main" val="1924541986"/>
+        <p14:creationId xmlns:p14="http://schemas.microsoft.com/office/powerpoint/2010/main" val="1762817927"/>
       </p:ext>
     </p:extLst>
   </p:cSld>
@@ -4301,7 +6469,7 @@
           <p:cNvPr id="13" name="accent-line">
             <a:extLst xmlns:a="http://schemas.openxmlformats.org/drawingml/2006/main">
               <a:ext uri="{FF2B5EF4-FFF2-40B4-BE49-F238E27FC236}">
-                <a16:creationId xmlns:a16="http://schemas.microsoft.com/office/drawing/2014/main" id="{C686B4F1-1BB4-4820-9822-CE3B0C68500F}"/>
+                <a16:creationId xmlns:a16="http://schemas.microsoft.com/office/drawing/2014/main" id="{0327ECDA-1DED-412D-9023-B561E699FEBF}"/>
               </a:ext>
             </a:extLst>
           </p:cNvPr>
@@ -4334,7 +6502,7 @@
           <p:cNvPr id="2" name="chapter-label">
             <a:extLst xmlns:a="http://schemas.openxmlformats.org/drawingml/2006/main">
               <a:ext uri="{FF2B5EF4-FFF2-40B4-BE49-F238E27FC236}">
-                <a16:creationId xmlns:a16="http://schemas.microsoft.com/office/drawing/2014/main" id="{F7865BF1-ACEA-4C08-BD7E-B166A1A4E605}"/>
+                <a16:creationId xmlns:a16="http://schemas.microsoft.com/office/drawing/2014/main" id="{71F9C47B-8F11-45DA-95B2-25916991B5E2}"/>
               </a:ext>
             </a:extLst>
           </p:cNvPr>
@@ -4392,7 +6560,7 @@
           <p:cNvPr id="3" name="slide-number">
             <a:extLst xmlns:a="http://schemas.openxmlformats.org/drawingml/2006/main">
               <a:ext uri="{FF2B5EF4-FFF2-40B4-BE49-F238E27FC236}">
-                <a16:creationId xmlns:a16="http://schemas.microsoft.com/office/drawing/2014/main" id="{852706D8-299E-42DC-BCD2-D499F5E1A6B4}"/>
+                <a16:creationId xmlns:a16="http://schemas.microsoft.com/office/drawing/2014/main" id="{D994F249-5C52-4361-B881-75D550EB7C7F}"/>
               </a:ext>
             </a:extLst>
           </p:cNvPr>
@@ -4450,7 +6618,7 @@
           <p:cNvPr id="4" name="chapter-footer">
             <a:extLst xmlns:a="http://schemas.openxmlformats.org/drawingml/2006/main">
               <a:ext uri="{FF2B5EF4-FFF2-40B4-BE49-F238E27FC236}">
-                <a16:creationId xmlns:a16="http://schemas.microsoft.com/office/drawing/2014/main" id="{D8EAB1DC-142E-4241-9643-27D2933090AA}"/>
+                <a16:creationId xmlns:a16="http://schemas.microsoft.com/office/drawing/2014/main" id="{232C8563-8F90-4DBA-AF3F-3E9D9A494628}"/>
               </a:ext>
             </a:extLst>
           </p:cNvPr>
@@ -4508,7 +6676,7 @@
           <p:cNvPr id="5" name="section-title">
             <a:extLst xmlns:a="http://schemas.openxmlformats.org/drawingml/2006/main">
               <a:ext uri="{FF2B5EF4-FFF2-40B4-BE49-F238E27FC236}">
-                <a16:creationId xmlns:a16="http://schemas.microsoft.com/office/drawing/2014/main" id="{4FF1D1D1-497A-49A9-B245-6B2D2E4FE7C0}"/>
+                <a16:creationId xmlns:a16="http://schemas.microsoft.com/office/drawing/2014/main" id="{9A2222F8-2FD4-46EF-997B-4928773DF252}"/>
               </a:ext>
             </a:extLst>
           </p:cNvPr>
@@ -4566,7 +6734,7 @@
           <p:cNvPr id="6" name="section-explanation">
             <a:extLst xmlns:a="http://schemas.openxmlformats.org/drawingml/2006/main">
               <a:ext uri="{FF2B5EF4-FFF2-40B4-BE49-F238E27FC236}">
-                <a16:creationId xmlns:a16="http://schemas.microsoft.com/office/drawing/2014/main" id="{37AE420A-8255-48E5-912E-C99DDEFA12A2}"/>
+                <a16:creationId xmlns:a16="http://schemas.microsoft.com/office/drawing/2014/main" id="{179D800D-B9C4-422B-875D-405C29E317CF}"/>
               </a:ext>
             </a:extLst>
           </p:cNvPr>
@@ -4624,7 +6792,7 @@
           <p:cNvPr id="7" name="point-band-1">
             <a:extLst xmlns:a="http://schemas.openxmlformats.org/drawingml/2006/main">
               <a:ext uri="{FF2B5EF4-FFF2-40B4-BE49-F238E27FC236}">
-                <a16:creationId xmlns:a16="http://schemas.microsoft.com/office/drawing/2014/main" id="{E52C5CE1-3C7F-48B9-8E64-F094E66E7740}"/>
+                <a16:creationId xmlns:a16="http://schemas.microsoft.com/office/drawing/2014/main" id="{D5B90D74-9BF0-439D-B43C-98D31F393E9F}"/>
               </a:ext>
             </a:extLst>
           </p:cNvPr>
@@ -4657,7 +6825,7 @@
           <p:cNvPr id="8" name="point-1">
             <a:extLst xmlns:a="http://schemas.openxmlformats.org/drawingml/2006/main">
               <a:ext uri="{FF2B5EF4-FFF2-40B4-BE49-F238E27FC236}">
-                <a16:creationId xmlns:a16="http://schemas.microsoft.com/office/drawing/2014/main" id="{F8A5F272-06EF-405A-BA9B-EA47CE62126E}"/>
+                <a16:creationId xmlns:a16="http://schemas.microsoft.com/office/drawing/2014/main" id="{C0A0CECD-09DB-416E-A33E-F1B4464E4015}"/>
               </a:ext>
             </a:extLst>
           </p:cNvPr>
@@ -4715,7 +6883,7 @@
           <p:cNvPr id="9" name="point-band-2">
             <a:extLst xmlns:a="http://schemas.openxmlformats.org/drawingml/2006/main">
               <a:ext uri="{FF2B5EF4-FFF2-40B4-BE49-F238E27FC236}">
-                <a16:creationId xmlns:a16="http://schemas.microsoft.com/office/drawing/2014/main" id="{A459B4E4-D053-4197-9FC3-4487B47F9BDF}"/>
+                <a16:creationId xmlns:a16="http://schemas.microsoft.com/office/drawing/2014/main" id="{BE1C3F8F-8264-4C56-8B6A-589530E9FDD3}"/>
               </a:ext>
             </a:extLst>
           </p:cNvPr>
@@ -4748,7 +6916,7 @@
           <p:cNvPr id="10" name="point-2">
             <a:extLst xmlns:a="http://schemas.openxmlformats.org/drawingml/2006/main">
               <a:ext uri="{FF2B5EF4-FFF2-40B4-BE49-F238E27FC236}">
-                <a16:creationId xmlns:a16="http://schemas.microsoft.com/office/drawing/2014/main" id="{900B8DEB-EBB7-4805-B5C5-595CF2A9EC08}"/>
+                <a16:creationId xmlns:a16="http://schemas.microsoft.com/office/drawing/2014/main" id="{616FEDA9-29FF-43DF-A762-28E9521FC09D}"/>
               </a:ext>
             </a:extLst>
           </p:cNvPr>
@@ -4806,7 +6974,7 @@
           <p:cNvPr id="11" name="point-band-3">
             <a:extLst xmlns:a="http://schemas.openxmlformats.org/drawingml/2006/main">
               <a:ext uri="{FF2B5EF4-FFF2-40B4-BE49-F238E27FC236}">
-                <a16:creationId xmlns:a16="http://schemas.microsoft.com/office/drawing/2014/main" id="{FB661AF9-0D65-41B0-9FB3-A07B1B3FC52C}"/>
+                <a16:creationId xmlns:a16="http://schemas.microsoft.com/office/drawing/2014/main" id="{D69C88F7-94F6-462E-BDAB-B355005EE602}"/>
               </a:ext>
             </a:extLst>
           </p:cNvPr>
@@ -4839,7 +7007,7 @@
           <p:cNvPr id="12" name="point-3">
             <a:extLst xmlns:a="http://schemas.openxmlformats.org/drawingml/2006/main">
               <a:ext uri="{FF2B5EF4-FFF2-40B4-BE49-F238E27FC236}">
-                <a16:creationId xmlns:a16="http://schemas.microsoft.com/office/drawing/2014/main" id="{FAA573FC-2CB7-4247-8F09-5861EE4D9E6A}"/>
+                <a16:creationId xmlns:a16="http://schemas.microsoft.com/office/drawing/2014/main" id="{45C49831-A7E4-4127-B40A-13FFC5E46F85}"/>
               </a:ext>
             </a:extLst>
           </p:cNvPr>
@@ -4895,7 +7063,7 @@
     </p:spTree>
     <p:extLst>
       <p:ext uri="{BB962C8B-B14F-4D97-AF65-F5344CB8AC3E}">
-        <p14:creationId xmlns:p14="http://schemas.microsoft.com/office/powerpoint/2010/main" val="899406999"/>
+        <p14:creationId xmlns:p14="http://schemas.microsoft.com/office/powerpoint/2010/main" val="1750330119"/>
       </p:ext>
     </p:extLst>
   </p:cSld>
@@ -4926,7 +7094,7 @@
           <p:cNvPr id="9" name="accent-line">
             <a:extLst xmlns:a="http://schemas.openxmlformats.org/drawingml/2006/main">
               <a:ext uri="{FF2B5EF4-FFF2-40B4-BE49-F238E27FC236}">
-                <a16:creationId xmlns:a16="http://schemas.microsoft.com/office/drawing/2014/main" id="{E72DA9F3-A0C3-433A-A041-E4080ED7B154}"/>
+                <a16:creationId xmlns:a16="http://schemas.microsoft.com/office/drawing/2014/main" id="{28FD50CF-E7C1-47B0-B5A8-2486C7D53C2B}"/>
               </a:ext>
             </a:extLst>
           </p:cNvPr>
@@ -4959,7 +7127,7 @@
           <p:cNvPr id="2" name="chapter-label">
             <a:extLst xmlns:a="http://schemas.openxmlformats.org/drawingml/2006/main">
               <a:ext uri="{FF2B5EF4-FFF2-40B4-BE49-F238E27FC236}">
-                <a16:creationId xmlns:a16="http://schemas.microsoft.com/office/drawing/2014/main" id="{32BF02B3-5F68-4EB0-8F92-CB8E761C9B7B}"/>
+                <a16:creationId xmlns:a16="http://schemas.microsoft.com/office/drawing/2014/main" id="{5E63613E-0371-4C84-B9B9-8770E7338600}"/>
               </a:ext>
             </a:extLst>
           </p:cNvPr>
@@ -5017,7 +7185,7 @@
           <p:cNvPr id="3" name="slide-number">
             <a:extLst xmlns:a="http://schemas.openxmlformats.org/drawingml/2006/main">
               <a:ext uri="{FF2B5EF4-FFF2-40B4-BE49-F238E27FC236}">
-                <a16:creationId xmlns:a16="http://schemas.microsoft.com/office/drawing/2014/main" id="{B4BE921A-F9E0-4E23-89CF-C8595E37CBDB}"/>
+                <a16:creationId xmlns:a16="http://schemas.microsoft.com/office/drawing/2014/main" id="{665369D8-1940-4B35-9ECF-15311C6FE926}"/>
               </a:ext>
             </a:extLst>
           </p:cNvPr>
@@ -5075,7 +7243,7 @@
           <p:cNvPr id="4" name="chapter-footer">
             <a:extLst xmlns:a="http://schemas.openxmlformats.org/drawingml/2006/main">
               <a:ext uri="{FF2B5EF4-FFF2-40B4-BE49-F238E27FC236}">
-                <a16:creationId xmlns:a16="http://schemas.microsoft.com/office/drawing/2014/main" id="{E1236038-7AC8-41D3-8557-73A0C3CA0EC3}"/>
+                <a16:creationId xmlns:a16="http://schemas.microsoft.com/office/drawing/2014/main" id="{58E862A1-9E06-4C0F-9D73-7108A6473DF8}"/>
               </a:ext>
             </a:extLst>
           </p:cNvPr>
@@ -5133,7 +7301,7 @@
           <p:cNvPr id="5" name="section-title">
             <a:extLst xmlns:a="http://schemas.openxmlformats.org/drawingml/2006/main">
               <a:ext uri="{FF2B5EF4-FFF2-40B4-BE49-F238E27FC236}">
-                <a16:creationId xmlns:a16="http://schemas.microsoft.com/office/drawing/2014/main" id="{9711AF3B-D558-4232-90B9-DE43AEC19497}"/>
+                <a16:creationId xmlns:a16="http://schemas.microsoft.com/office/drawing/2014/main" id="{1BCC186E-89DF-46D4-A7ED-E310322B5DE1}"/>
               </a:ext>
             </a:extLst>
           </p:cNvPr>
@@ -5191,7 +7359,7 @@
           <p:cNvPr id="6" name="section-explanation">
             <a:extLst xmlns:a="http://schemas.openxmlformats.org/drawingml/2006/main">
               <a:ext uri="{FF2B5EF4-FFF2-40B4-BE49-F238E27FC236}">
-                <a16:creationId xmlns:a16="http://schemas.microsoft.com/office/drawing/2014/main" id="{266F6E08-5CAE-4523-AF7E-3A01EE3CD270}"/>
+                <a16:creationId xmlns:a16="http://schemas.microsoft.com/office/drawing/2014/main" id="{682F5CD8-A11A-4F24-B29B-D9D810F14E01}"/>
               </a:ext>
             </a:extLst>
           </p:cNvPr>
@@ -5249,7 +7417,7 @@
           <p:cNvPr id="7" name="column-rule">
             <a:extLst xmlns:a="http://schemas.openxmlformats.org/drawingml/2006/main">
               <a:ext uri="{FF2B5EF4-FFF2-40B4-BE49-F238E27FC236}">
-                <a16:creationId xmlns:a16="http://schemas.microsoft.com/office/drawing/2014/main" id="{F371854B-0AE7-46D0-8C16-7EF0B5185802}"/>
+                <a16:creationId xmlns:a16="http://schemas.microsoft.com/office/drawing/2014/main" id="{E618E6ED-B32B-4078-8072-C8526E60CD2C}"/>
               </a:ext>
             </a:extLst>
           </p:cNvPr>
@@ -5282,7 +7450,7 @@
           <p:cNvPr id="8" name="section-points">
             <a:extLst xmlns:a="http://schemas.openxmlformats.org/drawingml/2006/main">
               <a:ext uri="{FF2B5EF4-FFF2-40B4-BE49-F238E27FC236}">
-                <a16:creationId xmlns:a16="http://schemas.microsoft.com/office/drawing/2014/main" id="{1B0C2486-96B6-400F-8794-0EE91DC5F613}"/>
+                <a16:creationId xmlns:a16="http://schemas.microsoft.com/office/drawing/2014/main" id="{B8BA167A-00BA-4FA0-9CEE-DD5461FDD956}"/>
               </a:ext>
             </a:extLst>
           </p:cNvPr>
@@ -5422,7 +7590,7 @@
     </p:spTree>
     <p:extLst>
       <p:ext uri="{BB962C8B-B14F-4D97-AF65-F5344CB8AC3E}">
-        <p14:creationId xmlns:p14="http://schemas.microsoft.com/office/powerpoint/2010/main" val="629841605"/>
+        <p14:creationId xmlns:p14="http://schemas.microsoft.com/office/powerpoint/2010/main" val="474672185"/>
       </p:ext>
     </p:extLst>
   </p:cSld>
@@ -5453,7 +7621,7 @@
           <p:cNvPr id="13" name="accent-line">
             <a:extLst xmlns:a="http://schemas.openxmlformats.org/drawingml/2006/main">
               <a:ext uri="{FF2B5EF4-FFF2-40B4-BE49-F238E27FC236}">
-                <a16:creationId xmlns:a16="http://schemas.microsoft.com/office/drawing/2014/main" id="{90E9F5EB-E335-401E-AFBB-AED45A58D449}"/>
+                <a16:creationId xmlns:a16="http://schemas.microsoft.com/office/drawing/2014/main" id="{6428D1DD-96BD-4D80-8B3A-857E835FB813}"/>
               </a:ext>
             </a:extLst>
           </p:cNvPr>
@@ -5486,7 +7654,7 @@
           <p:cNvPr id="2" name="chapter-label">
             <a:extLst xmlns:a="http://schemas.openxmlformats.org/drawingml/2006/main">
               <a:ext uri="{FF2B5EF4-FFF2-40B4-BE49-F238E27FC236}">
-                <a16:creationId xmlns:a16="http://schemas.microsoft.com/office/drawing/2014/main" id="{CB89700A-728D-4941-97B7-3E43DB17F8AD}"/>
+                <a16:creationId xmlns:a16="http://schemas.microsoft.com/office/drawing/2014/main" id="{BD154EBF-B1A6-47FB-A613-4E41B2AE2197}"/>
               </a:ext>
             </a:extLst>
           </p:cNvPr>
@@ -5544,7 +7712,7 @@
           <p:cNvPr id="3" name="slide-number">
             <a:extLst xmlns:a="http://schemas.openxmlformats.org/drawingml/2006/main">
               <a:ext uri="{FF2B5EF4-FFF2-40B4-BE49-F238E27FC236}">
-                <a16:creationId xmlns:a16="http://schemas.microsoft.com/office/drawing/2014/main" id="{DFE4C053-5CA3-4C99-B00E-B04B703CE594}"/>
+                <a16:creationId xmlns:a16="http://schemas.microsoft.com/office/drawing/2014/main" id="{8AC1472A-E5A7-4775-82C4-8074DEB1DBB4}"/>
               </a:ext>
             </a:extLst>
           </p:cNvPr>
@@ -5602,7 +7770,7 @@
           <p:cNvPr id="4" name="chapter-footer">
             <a:extLst xmlns:a="http://schemas.openxmlformats.org/drawingml/2006/main">
               <a:ext uri="{FF2B5EF4-FFF2-40B4-BE49-F238E27FC236}">
-                <a16:creationId xmlns:a16="http://schemas.microsoft.com/office/drawing/2014/main" id="{6E165B0F-0B3F-426A-88EB-56D1FA82A27C}"/>
+                <a16:creationId xmlns:a16="http://schemas.microsoft.com/office/drawing/2014/main" id="{06337DA0-3DEA-49F1-B803-D026FEB8689E}"/>
               </a:ext>
             </a:extLst>
           </p:cNvPr>
@@ -5660,7 +7828,7 @@
           <p:cNvPr id="5" name="section-title">
             <a:extLst xmlns:a="http://schemas.openxmlformats.org/drawingml/2006/main">
               <a:ext uri="{FF2B5EF4-FFF2-40B4-BE49-F238E27FC236}">
-                <a16:creationId xmlns:a16="http://schemas.microsoft.com/office/drawing/2014/main" id="{B0B89693-C238-4C4B-9DC5-105F6FA45B1C}"/>
+                <a16:creationId xmlns:a16="http://schemas.microsoft.com/office/drawing/2014/main" id="{6511A720-59E8-4074-8AB8-D9F0B2C1A903}"/>
               </a:ext>
             </a:extLst>
           </p:cNvPr>
@@ -5718,7 +7886,7 @@
           <p:cNvPr id="6" name="section-explanation">
             <a:extLst xmlns:a="http://schemas.openxmlformats.org/drawingml/2006/main">
               <a:ext uri="{FF2B5EF4-FFF2-40B4-BE49-F238E27FC236}">
-                <a16:creationId xmlns:a16="http://schemas.microsoft.com/office/drawing/2014/main" id="{9981D851-D9DF-410B-A5BB-D8AA4E2C2A38}"/>
+                <a16:creationId xmlns:a16="http://schemas.microsoft.com/office/drawing/2014/main" id="{D66B46CD-81AF-4BE4-B63D-717134E2CA4A}"/>
               </a:ext>
             </a:extLst>
           </p:cNvPr>
@@ -5776,7 +7944,7 @@
           <p:cNvPr id="7" name="point-band-1">
             <a:extLst xmlns:a="http://schemas.openxmlformats.org/drawingml/2006/main">
               <a:ext uri="{FF2B5EF4-FFF2-40B4-BE49-F238E27FC236}">
-                <a16:creationId xmlns:a16="http://schemas.microsoft.com/office/drawing/2014/main" id="{F135520C-EEB5-45DD-ACD3-C3219484BD4B}"/>
+                <a16:creationId xmlns:a16="http://schemas.microsoft.com/office/drawing/2014/main" id="{07E735C4-0145-49C2-A123-816AA2C7E18D}"/>
               </a:ext>
             </a:extLst>
           </p:cNvPr>
@@ -5809,7 +7977,7 @@
           <p:cNvPr id="8" name="point-1">
             <a:extLst xmlns:a="http://schemas.openxmlformats.org/drawingml/2006/main">
               <a:ext uri="{FF2B5EF4-FFF2-40B4-BE49-F238E27FC236}">
-                <a16:creationId xmlns:a16="http://schemas.microsoft.com/office/drawing/2014/main" id="{9D1F1CF2-B877-4421-BDD0-33E035609134}"/>
+                <a16:creationId xmlns:a16="http://schemas.microsoft.com/office/drawing/2014/main" id="{46F47ED6-7B9B-4BB8-98A7-6CAE71FD9B7D}"/>
               </a:ext>
             </a:extLst>
           </p:cNvPr>
@@ -5867,7 +8035,7 @@
           <p:cNvPr id="9" name="point-band-2">
             <a:extLst xmlns:a="http://schemas.openxmlformats.org/drawingml/2006/main">
               <a:ext uri="{FF2B5EF4-FFF2-40B4-BE49-F238E27FC236}">
-                <a16:creationId xmlns:a16="http://schemas.microsoft.com/office/drawing/2014/main" id="{20BAB347-EFE5-45A8-A416-0DFFB1DBDB2C}"/>
+                <a16:creationId xmlns:a16="http://schemas.microsoft.com/office/drawing/2014/main" id="{C0A52D59-BCC7-44E5-9D4D-F89BC1D3785F}"/>
               </a:ext>
             </a:extLst>
           </p:cNvPr>
@@ -5900,7 +8068,7 @@
           <p:cNvPr id="10" name="point-2">
             <a:extLst xmlns:a="http://schemas.openxmlformats.org/drawingml/2006/main">
               <a:ext uri="{FF2B5EF4-FFF2-40B4-BE49-F238E27FC236}">
-                <a16:creationId xmlns:a16="http://schemas.microsoft.com/office/drawing/2014/main" id="{5E6236B1-C4B0-4985-8789-1B88BDBCBA5D}"/>
+                <a16:creationId xmlns:a16="http://schemas.microsoft.com/office/drawing/2014/main" id="{66E8D6B6-563A-4180-BFB0-45943C3C9D85}"/>
               </a:ext>
             </a:extLst>
           </p:cNvPr>
@@ -5958,7 +8126,7 @@
           <p:cNvPr id="11" name="point-band-3">
             <a:extLst xmlns:a="http://schemas.openxmlformats.org/drawingml/2006/main">
               <a:ext uri="{FF2B5EF4-FFF2-40B4-BE49-F238E27FC236}">
-                <a16:creationId xmlns:a16="http://schemas.microsoft.com/office/drawing/2014/main" id="{80A42ECE-72AA-452E-839F-54509DA62AF4}"/>
+                <a16:creationId xmlns:a16="http://schemas.microsoft.com/office/drawing/2014/main" id="{DD0051AA-704D-47C5-A5BB-36DA02B9343D}"/>
               </a:ext>
             </a:extLst>
           </p:cNvPr>
@@ -5991,7 +8159,7 @@
           <p:cNvPr id="12" name="point-3">
             <a:extLst xmlns:a="http://schemas.openxmlformats.org/drawingml/2006/main">
               <a:ext uri="{FF2B5EF4-FFF2-40B4-BE49-F238E27FC236}">
-                <a16:creationId xmlns:a16="http://schemas.microsoft.com/office/drawing/2014/main" id="{81DCD35D-70E5-43CC-9025-C00C25C5295A}"/>
+                <a16:creationId xmlns:a16="http://schemas.microsoft.com/office/drawing/2014/main" id="{E999B1C4-AE6E-45D0-9A7F-DCFA90EF7202}"/>
               </a:ext>
             </a:extLst>
           </p:cNvPr>
@@ -6047,7 +8215,7 @@
     </p:spTree>
     <p:extLst>
       <p:ext uri="{BB962C8B-B14F-4D97-AF65-F5344CB8AC3E}">
-        <p14:creationId xmlns:p14="http://schemas.microsoft.com/office/powerpoint/2010/main" val="5986080"/>
+        <p14:creationId xmlns:p14="http://schemas.microsoft.com/office/powerpoint/2010/main" val="14681321"/>
       </p:ext>
     </p:extLst>
   </p:cSld>
@@ -6078,7 +8246,7 @@
           <p:cNvPr id="9" name="accent-line">
             <a:extLst xmlns:a="http://schemas.openxmlformats.org/drawingml/2006/main">
               <a:ext uri="{FF2B5EF4-FFF2-40B4-BE49-F238E27FC236}">
-                <a16:creationId xmlns:a16="http://schemas.microsoft.com/office/drawing/2014/main" id="{8E50E128-4C9F-442C-BD1E-E09A7F0859D2}"/>
+                <a16:creationId xmlns:a16="http://schemas.microsoft.com/office/drawing/2014/main" id="{09A1892A-C76A-4F5C-BBAC-494CE8B33CE1}"/>
               </a:ext>
             </a:extLst>
           </p:cNvPr>
@@ -6111,7 +8279,7 @@
           <p:cNvPr id="2" name="chapter-label">
             <a:extLst xmlns:a="http://schemas.openxmlformats.org/drawingml/2006/main">
               <a:ext uri="{FF2B5EF4-FFF2-40B4-BE49-F238E27FC236}">
-                <a16:creationId xmlns:a16="http://schemas.microsoft.com/office/drawing/2014/main" id="{BCC6AD13-36AE-4BBF-9801-B2D00DABCC55}"/>
+                <a16:creationId xmlns:a16="http://schemas.microsoft.com/office/drawing/2014/main" id="{BCE76A07-F8BC-4CCE-97A8-4189DCC04378}"/>
               </a:ext>
             </a:extLst>
           </p:cNvPr>
@@ -6169,7 +8337,7 @@
           <p:cNvPr id="3" name="slide-number">
             <a:extLst xmlns:a="http://schemas.openxmlformats.org/drawingml/2006/main">
               <a:ext uri="{FF2B5EF4-FFF2-40B4-BE49-F238E27FC236}">
-                <a16:creationId xmlns:a16="http://schemas.microsoft.com/office/drawing/2014/main" id="{B76024AE-BF66-42F2-9C08-6FB7F800E918}"/>
+                <a16:creationId xmlns:a16="http://schemas.microsoft.com/office/drawing/2014/main" id="{0EC77DA9-FF7D-4368-9A18-62662704819E}"/>
               </a:ext>
             </a:extLst>
           </p:cNvPr>
@@ -6227,7 +8395,7 @@
           <p:cNvPr id="4" name="chapter-footer">
             <a:extLst xmlns:a="http://schemas.openxmlformats.org/drawingml/2006/main">
               <a:ext uri="{FF2B5EF4-FFF2-40B4-BE49-F238E27FC236}">
-                <a16:creationId xmlns:a16="http://schemas.microsoft.com/office/drawing/2014/main" id="{06DBD582-B2F2-4A67-92F3-7F522128BB6A}"/>
+                <a16:creationId xmlns:a16="http://schemas.microsoft.com/office/drawing/2014/main" id="{261A89B2-389F-40D2-A05C-D15387103C70}"/>
               </a:ext>
             </a:extLst>
           </p:cNvPr>
@@ -6285,7 +8453,7 @@
           <p:cNvPr id="5" name="section-title">
             <a:extLst xmlns:a="http://schemas.openxmlformats.org/drawingml/2006/main">
               <a:ext uri="{FF2B5EF4-FFF2-40B4-BE49-F238E27FC236}">
-                <a16:creationId xmlns:a16="http://schemas.microsoft.com/office/drawing/2014/main" id="{D715D53D-6DAA-49C1-A14D-2F2079B853B7}"/>
+                <a16:creationId xmlns:a16="http://schemas.microsoft.com/office/drawing/2014/main" id="{0EFD6A27-07D5-48AF-8D4F-16D1866FCC58}"/>
               </a:ext>
             </a:extLst>
           </p:cNvPr>
@@ -6343,7 +8511,7 @@
           <p:cNvPr id="6" name="section-explanation">
             <a:extLst xmlns:a="http://schemas.openxmlformats.org/drawingml/2006/main">
               <a:ext uri="{FF2B5EF4-FFF2-40B4-BE49-F238E27FC236}">
-                <a16:creationId xmlns:a16="http://schemas.microsoft.com/office/drawing/2014/main" id="{74C03E64-0DDF-49CC-940A-5C029D1A20FB}"/>
+                <a16:creationId xmlns:a16="http://schemas.microsoft.com/office/drawing/2014/main" id="{864C98E3-94C1-40A7-A084-E4B4997F6D12}"/>
               </a:ext>
             </a:extLst>
           </p:cNvPr>
@@ -6401,7 +8569,7 @@
           <p:cNvPr id="7" name="column-rule">
             <a:extLst xmlns:a="http://schemas.openxmlformats.org/drawingml/2006/main">
               <a:ext uri="{FF2B5EF4-FFF2-40B4-BE49-F238E27FC236}">
-                <a16:creationId xmlns:a16="http://schemas.microsoft.com/office/drawing/2014/main" id="{DAD7491F-F1D5-417E-88D2-525850F5A995}"/>
+                <a16:creationId xmlns:a16="http://schemas.microsoft.com/office/drawing/2014/main" id="{9D21C6EC-2D2C-45AB-8C18-E15C450E6ADE}"/>
               </a:ext>
             </a:extLst>
           </p:cNvPr>
@@ -6434,7 +8602,7 @@
           <p:cNvPr id="8" name="section-points">
             <a:extLst xmlns:a="http://schemas.openxmlformats.org/drawingml/2006/main">
               <a:ext uri="{FF2B5EF4-FFF2-40B4-BE49-F238E27FC236}">
-                <a16:creationId xmlns:a16="http://schemas.microsoft.com/office/drawing/2014/main" id="{51989DBC-83EE-4BCF-962E-D7C3E6885E90}"/>
+                <a16:creationId xmlns:a16="http://schemas.microsoft.com/office/drawing/2014/main" id="{DAAAA85A-6B75-42A0-9AF2-9AAED9583589}"/>
               </a:ext>
             </a:extLst>
           </p:cNvPr>
@@ -6546,7 +8714,7 @@
     </p:spTree>
     <p:extLst>
       <p:ext uri="{BB962C8B-B14F-4D97-AF65-F5344CB8AC3E}">
-        <p14:creationId xmlns:p14="http://schemas.microsoft.com/office/powerpoint/2010/main" val="972415031"/>
+        <p14:creationId xmlns:p14="http://schemas.microsoft.com/office/powerpoint/2010/main" val="748392032"/>
       </p:ext>
     </p:extLst>
   </p:cSld>
@@ -6577,7 +8745,7 @@
           <p:cNvPr id="15" name="accent-line">
             <a:extLst xmlns:a="http://schemas.openxmlformats.org/drawingml/2006/main">
               <a:ext uri="{FF2B5EF4-FFF2-40B4-BE49-F238E27FC236}">
-                <a16:creationId xmlns:a16="http://schemas.microsoft.com/office/drawing/2014/main" id="{AF6951BD-4FB7-450F-95EA-EA663D9DE838}"/>
+                <a16:creationId xmlns:a16="http://schemas.microsoft.com/office/drawing/2014/main" id="{3EC4FE53-6721-424A-8656-365E721FA4A4}"/>
               </a:ext>
             </a:extLst>
           </p:cNvPr>
@@ -6610,7 +8778,7 @@
           <p:cNvPr id="2" name="chapter-label">
             <a:extLst xmlns:a="http://schemas.openxmlformats.org/drawingml/2006/main">
               <a:ext uri="{FF2B5EF4-FFF2-40B4-BE49-F238E27FC236}">
-                <a16:creationId xmlns:a16="http://schemas.microsoft.com/office/drawing/2014/main" id="{1C4D3E24-81BF-4033-8F59-83A222980857}"/>
+                <a16:creationId xmlns:a16="http://schemas.microsoft.com/office/drawing/2014/main" id="{40A250D0-FC9A-423E-8738-3543FF2989DB}"/>
               </a:ext>
             </a:extLst>
           </p:cNvPr>
@@ -6668,7 +8836,7 @@
           <p:cNvPr id="3" name="slide-number">
             <a:extLst xmlns:a="http://schemas.openxmlformats.org/drawingml/2006/main">
               <a:ext uri="{FF2B5EF4-FFF2-40B4-BE49-F238E27FC236}">
-                <a16:creationId xmlns:a16="http://schemas.microsoft.com/office/drawing/2014/main" id="{1E8189B9-E824-4C9A-A694-78800FA99218}"/>
+                <a16:creationId xmlns:a16="http://schemas.microsoft.com/office/drawing/2014/main" id="{DCA5329C-53F4-46A8-9108-389EA392F038}"/>
               </a:ext>
             </a:extLst>
           </p:cNvPr>
@@ -6726,7 +8894,7 @@
           <p:cNvPr id="4" name="chapter-footer">
             <a:extLst xmlns:a="http://schemas.openxmlformats.org/drawingml/2006/main">
               <a:ext uri="{FF2B5EF4-FFF2-40B4-BE49-F238E27FC236}">
-                <a16:creationId xmlns:a16="http://schemas.microsoft.com/office/drawing/2014/main" id="{9F63CEF0-AE2F-4A7E-9C90-087E3E971125}"/>
+                <a16:creationId xmlns:a16="http://schemas.microsoft.com/office/drawing/2014/main" id="{EEF08482-ECFD-4497-B7D1-1F21108CDBFD}"/>
               </a:ext>
             </a:extLst>
           </p:cNvPr>
@@ -6784,7 +8952,7 @@
           <p:cNvPr id="5" name="section-title">
             <a:extLst xmlns:a="http://schemas.openxmlformats.org/drawingml/2006/main">
               <a:ext uri="{FF2B5EF4-FFF2-40B4-BE49-F238E27FC236}">
-                <a16:creationId xmlns:a16="http://schemas.microsoft.com/office/drawing/2014/main" id="{84078770-AB76-4CC2-8E90-27053632B58E}"/>
+                <a16:creationId xmlns:a16="http://schemas.microsoft.com/office/drawing/2014/main" id="{434AF172-3CDF-447C-848B-8D96E0237E08}"/>
               </a:ext>
             </a:extLst>
           </p:cNvPr>
@@ -6842,7 +9010,7 @@
           <p:cNvPr id="6" name="section-explanation">
             <a:extLst xmlns:a="http://schemas.openxmlformats.org/drawingml/2006/main">
               <a:ext uri="{FF2B5EF4-FFF2-40B4-BE49-F238E27FC236}">
-                <a16:creationId xmlns:a16="http://schemas.microsoft.com/office/drawing/2014/main" id="{8F510B23-67D0-4B87-86E9-A72C430E663B}"/>
+                <a16:creationId xmlns:a16="http://schemas.microsoft.com/office/drawing/2014/main" id="{BF08D9C5-5470-479E-8375-B0317FC9E3F2}"/>
               </a:ext>
             </a:extLst>
           </p:cNvPr>
@@ -6900,7 +9068,7 @@
           <p:cNvPr id="7" name="point-band-1">
             <a:extLst xmlns:a="http://schemas.openxmlformats.org/drawingml/2006/main">
               <a:ext uri="{FF2B5EF4-FFF2-40B4-BE49-F238E27FC236}">
-                <a16:creationId xmlns:a16="http://schemas.microsoft.com/office/drawing/2014/main" id="{88780AEE-DC3A-4EE7-88F5-23680A28492E}"/>
+                <a16:creationId xmlns:a16="http://schemas.microsoft.com/office/drawing/2014/main" id="{7B533848-EF8D-4A8D-B76A-20E4A5F4A5CB}"/>
               </a:ext>
             </a:extLst>
           </p:cNvPr>
@@ -6933,7 +9101,7 @@
           <p:cNvPr id="8" name="point-1">
             <a:extLst xmlns:a="http://schemas.openxmlformats.org/drawingml/2006/main">
               <a:ext uri="{FF2B5EF4-FFF2-40B4-BE49-F238E27FC236}">
-                <a16:creationId xmlns:a16="http://schemas.microsoft.com/office/drawing/2014/main" id="{496EEFF1-DA88-4B2C-9B65-1C76AF718C83}"/>
+                <a16:creationId xmlns:a16="http://schemas.microsoft.com/office/drawing/2014/main" id="{1D280811-8EEB-4521-86FA-C4C0B6C400AC}"/>
               </a:ext>
             </a:extLst>
           </p:cNvPr>
@@ -6991,7 +9159,7 @@
           <p:cNvPr id="9" name="point-band-2">
             <a:extLst xmlns:a="http://schemas.openxmlformats.org/drawingml/2006/main">
               <a:ext uri="{FF2B5EF4-FFF2-40B4-BE49-F238E27FC236}">
-                <a16:creationId xmlns:a16="http://schemas.microsoft.com/office/drawing/2014/main" id="{7D3C89EF-DA5E-4613-8208-30033E806434}"/>
+                <a16:creationId xmlns:a16="http://schemas.microsoft.com/office/drawing/2014/main" id="{DA713D3A-0905-413F-8A83-968694C7C796}"/>
               </a:ext>
             </a:extLst>
           </p:cNvPr>
@@ -7024,7 +9192,7 @@
           <p:cNvPr id="10" name="point-2">
             <a:extLst xmlns:a="http://schemas.openxmlformats.org/drawingml/2006/main">
               <a:ext uri="{FF2B5EF4-FFF2-40B4-BE49-F238E27FC236}">
-                <a16:creationId xmlns:a16="http://schemas.microsoft.com/office/drawing/2014/main" id="{419D2323-B366-4CDD-AB69-D22111804C43}"/>
+                <a16:creationId xmlns:a16="http://schemas.microsoft.com/office/drawing/2014/main" id="{AAA396DE-8642-4F48-A716-5FDF9C650020}"/>
               </a:ext>
             </a:extLst>
           </p:cNvPr>
@@ -7082,7 +9250,7 @@
           <p:cNvPr id="11" name="point-band-3">
             <a:extLst xmlns:a="http://schemas.openxmlformats.org/drawingml/2006/main">
               <a:ext uri="{FF2B5EF4-FFF2-40B4-BE49-F238E27FC236}">
-                <a16:creationId xmlns:a16="http://schemas.microsoft.com/office/drawing/2014/main" id="{CF10E165-8D96-4697-946E-8A049E9E784F}"/>
+                <a16:creationId xmlns:a16="http://schemas.microsoft.com/office/drawing/2014/main" id="{F5C7AB52-0A94-4B78-B1D6-8F6358334DEC}"/>
               </a:ext>
             </a:extLst>
           </p:cNvPr>
@@ -7115,7 +9283,7 @@
           <p:cNvPr id="12" name="point-3">
             <a:extLst xmlns:a="http://schemas.openxmlformats.org/drawingml/2006/main">
               <a:ext uri="{FF2B5EF4-FFF2-40B4-BE49-F238E27FC236}">
-                <a16:creationId xmlns:a16="http://schemas.microsoft.com/office/drawing/2014/main" id="{756EB187-D16E-40AD-80AB-3A8BCFD00282}"/>
+                <a16:creationId xmlns:a16="http://schemas.microsoft.com/office/drawing/2014/main" id="{A7D77987-1116-421B-A547-4AD0C257E449}"/>
               </a:ext>
             </a:extLst>
           </p:cNvPr>
@@ -7173,7 +9341,7 @@
           <p:cNvPr id="13" name="point-band-4">
             <a:extLst xmlns:a="http://schemas.openxmlformats.org/drawingml/2006/main">
               <a:ext uri="{FF2B5EF4-FFF2-40B4-BE49-F238E27FC236}">
-                <a16:creationId xmlns:a16="http://schemas.microsoft.com/office/drawing/2014/main" id="{310E2E0D-49BE-4BB9-82EF-D7AB270F8292}"/>
+                <a16:creationId xmlns:a16="http://schemas.microsoft.com/office/drawing/2014/main" id="{0F204128-7120-4C50-A74A-AB6AD74F587E}"/>
               </a:ext>
             </a:extLst>
           </p:cNvPr>
@@ -7206,7 +9374,7 @@
           <p:cNvPr id="14" name="point-4">
             <a:extLst xmlns:a="http://schemas.openxmlformats.org/drawingml/2006/main">
               <a:ext uri="{FF2B5EF4-FFF2-40B4-BE49-F238E27FC236}">
-                <a16:creationId xmlns:a16="http://schemas.microsoft.com/office/drawing/2014/main" id="{4862D8F4-1ADD-40A5-A5F8-CC3E44B82268}"/>
+                <a16:creationId xmlns:a16="http://schemas.microsoft.com/office/drawing/2014/main" id="{FAEF35D5-0985-4F3E-B70D-9DDC78873996}"/>
               </a:ext>
             </a:extLst>
           </p:cNvPr>
@@ -7262,7 +9430,7 @@
     </p:spTree>
     <p:extLst>
       <p:ext uri="{BB962C8B-B14F-4D97-AF65-F5344CB8AC3E}">
-        <p14:creationId xmlns:p14="http://schemas.microsoft.com/office/powerpoint/2010/main" val="1088152050"/>
+        <p14:creationId xmlns:p14="http://schemas.microsoft.com/office/powerpoint/2010/main" val="1637807003"/>
       </p:ext>
     </p:extLst>
   </p:cSld>
@@ -7290,10 +9458,10 @@
       </p:grpSpPr>
       <p:sp>
         <p:nvSpPr>
-          <p:cNvPr id="18" name="accent-line">
-            <a:extLst xmlns:a="http://schemas.openxmlformats.org/drawingml/2006/main">
-              <a:ext uri="{FF2B5EF4-FFF2-40B4-BE49-F238E27FC236}">
-                <a16:creationId xmlns:a16="http://schemas.microsoft.com/office/drawing/2014/main" id="{2AD29697-2A99-45B5-BA1D-A168282EF900}"/>
+          <p:cNvPr id="9" name="accent-line">
+            <a:extLst xmlns:a="http://schemas.openxmlformats.org/drawingml/2006/main">
+              <a:ext uri="{FF2B5EF4-FFF2-40B4-BE49-F238E27FC236}">
+                <a16:creationId xmlns:a16="http://schemas.microsoft.com/office/drawing/2014/main" id="{9E971E1C-94CA-497D-BC78-0F7ABFC46226}"/>
               </a:ext>
             </a:extLst>
           </p:cNvPr>
@@ -7326,7 +9494,7 @@
           <p:cNvPr id="2" name="chapter-label">
             <a:extLst xmlns:a="http://schemas.openxmlformats.org/drawingml/2006/main">
               <a:ext uri="{FF2B5EF4-FFF2-40B4-BE49-F238E27FC236}">
-                <a16:creationId xmlns:a16="http://schemas.microsoft.com/office/drawing/2014/main" id="{8F6690FA-E56C-4B77-A630-A8CEE06859FE}"/>
+                <a16:creationId xmlns:a16="http://schemas.microsoft.com/office/drawing/2014/main" id="{CC59C869-4C79-4C66-8F77-324AFA4EFA58}"/>
               </a:ext>
             </a:extLst>
           </p:cNvPr>
@@ -7374,7 +9542,7 @@
                 <a:ea typeface="Helvetica Neue"/>
                 <a:cs typeface="Helvetica Neue"/>
               </a:rPr>
-              <a:t>EXAM CHECK  /  06</a:t>
+              <a:t>CORE IDEA 07  /  06</a:t>
             </a:r>
           </a:p>
         </p:txBody>
@@ -7384,7 +9552,7 @@
           <p:cNvPr id="3" name="slide-number">
             <a:extLst xmlns:a="http://schemas.openxmlformats.org/drawingml/2006/main">
               <a:ext uri="{FF2B5EF4-FFF2-40B4-BE49-F238E27FC236}">
-                <a16:creationId xmlns:a16="http://schemas.microsoft.com/office/drawing/2014/main" id="{F764EDA5-1361-4C9E-B57F-EBBD32625FFF}"/>
+                <a16:creationId xmlns:a16="http://schemas.microsoft.com/office/drawing/2014/main" id="{81164CDA-BCE0-4B9F-BE14-99FDF8B4D195}"/>
               </a:ext>
             </a:extLst>
           </p:cNvPr>
@@ -7442,7 +9610,7 @@
           <p:cNvPr id="4" name="chapter-footer">
             <a:extLst xmlns:a="http://schemas.openxmlformats.org/drawingml/2006/main">
               <a:ext uri="{FF2B5EF4-FFF2-40B4-BE49-F238E27FC236}">
-                <a16:creationId xmlns:a16="http://schemas.microsoft.com/office/drawing/2014/main" id="{84CA8D6E-1070-4D11-8C04-61EC48B9C9E4}"/>
+                <a16:creationId xmlns:a16="http://schemas.microsoft.com/office/drawing/2014/main" id="{672DBF64-39C0-44E0-A479-93D35FF82C88}"/>
               </a:ext>
             </a:extLst>
           </p:cNvPr>
@@ -7497,138 +9665,22 @@
       </p:sp>
       <p:sp>
         <p:nvSpPr>
-          <p:cNvPr id="5" name="exam-title">
-            <a:extLst xmlns:a="http://schemas.openxmlformats.org/drawingml/2006/main">
-              <a:ext uri="{FF2B5EF4-FFF2-40B4-BE49-F238E27FC236}">
-                <a16:creationId xmlns:a16="http://schemas.microsoft.com/office/drawing/2014/main" id="{2F15A2ED-1AAD-4CA6-9A6F-1E8EAD2A2ED4}"/>
-              </a:ext>
-            </a:extLst>
-          </p:cNvPr>
-          <p:cNvSpPr>
-            <a:spLocks xmlns:a="http://schemas.openxmlformats.org/drawingml/2006/main" noGrp="1"/>
-          </p:cNvSpPr>
-          <p:nvPr/>
-        </p:nvSpPr>
-        <p:spPr>
-          <a:xfrm xmlns:a="http://schemas.openxmlformats.org/drawingml/2006/main">
-            <a:off x="390525" y="981075"/>
-            <a:ext cx="10668000" cy="781050"/>
-          </a:xfrm>
-          <a:prstGeom xmlns:a="http://schemas.openxmlformats.org/drawingml/2006/main" prst="rect">
-            <a:avLst/>
-          </a:prstGeom>
-          <a:noFill xmlns:a="http://schemas.openxmlformats.org/drawingml/2006/main"/>
-          <a:ln xmlns:a="http://schemas.openxmlformats.org/drawingml/2006/main" w="0">
-            <a:noFill/>
-            <a:prstDash val="solid"/>
-          </a:ln>
-        </p:spPr>
-        <p:txBody>
-          <a:bodyPr xmlns:a="http://schemas.openxmlformats.org/drawingml/2006/main" anchor="t">
-            <a:noAutofit/>
-          </a:bodyPr>
-          <a:lstStyle xmlns:a="http://schemas.openxmlformats.org/drawingml/2006/main"/>
-          <a:p xmlns:a="http://schemas.openxmlformats.org/drawingml/2006/main">
-            <a:pPr algn="l">
-              <a:defRPr sz="3150" b="1">
-                <a:solidFill>
-                  <a:srgbClr val="111111"/>
-                </a:solidFill>
-                <a:latin typeface="Helvetica Neue"/>
-                <a:ea typeface="Helvetica Neue"/>
-                <a:cs typeface="Helvetica Neue"/>
-              </a:defRPr>
-            </a:pPr>
-            <a:r>
-              <a:rPr sz="3150" b="1">
-                <a:solidFill>
-                  <a:srgbClr val="111111"/>
-                </a:solidFill>
-                <a:latin typeface="Helvetica Neue"/>
-                <a:ea typeface="Helvetica Neue"/>
-                <a:cs typeface="Helvetica Neue"/>
-              </a:rPr>
-              <a:t>Can you answer these without notes?</a:t>
-            </a:r>
-          </a:p>
-        </p:txBody>
-      </p:sp>
-      <p:sp>
-        <p:nvSpPr>
-          <p:cNvPr id="6" name="exam-number-1">
-            <a:extLst xmlns:a="http://schemas.openxmlformats.org/drawingml/2006/main">
-              <a:ext uri="{FF2B5EF4-FFF2-40B4-BE49-F238E27FC236}">
-                <a16:creationId xmlns:a16="http://schemas.microsoft.com/office/drawing/2014/main" id="{7E8FA81A-88CD-4027-BED9-A5A188296CF2}"/>
-              </a:ext>
-            </a:extLst>
-          </p:cNvPr>
-          <p:cNvSpPr>
-            <a:spLocks xmlns:a="http://schemas.openxmlformats.org/drawingml/2006/main" noGrp="1"/>
-          </p:cNvSpPr>
-          <p:nvPr/>
-        </p:nvSpPr>
-        <p:spPr>
-          <a:xfrm xmlns:a="http://schemas.openxmlformats.org/drawingml/2006/main">
-            <a:off x="390525" y="2238375"/>
-            <a:ext cx="590550" cy="400050"/>
-          </a:xfrm>
-          <a:prstGeom xmlns:a="http://schemas.openxmlformats.org/drawingml/2006/main" prst="rect">
-            <a:avLst/>
-          </a:prstGeom>
-          <a:noFill xmlns:a="http://schemas.openxmlformats.org/drawingml/2006/main"/>
-          <a:ln xmlns:a="http://schemas.openxmlformats.org/drawingml/2006/main" w="0">
-            <a:noFill/>
-            <a:prstDash val="solid"/>
-          </a:ln>
-        </p:spPr>
-        <p:txBody>
-          <a:bodyPr xmlns:a="http://schemas.openxmlformats.org/drawingml/2006/main" anchor="t">
-            <a:noAutofit/>
-          </a:bodyPr>
-          <a:lstStyle xmlns:a="http://schemas.openxmlformats.org/drawingml/2006/main"/>
-          <a:p xmlns:a="http://schemas.openxmlformats.org/drawingml/2006/main">
-            <a:pPr algn="l">
-              <a:defRPr sz="1725" b="1">
-                <a:solidFill>
-                  <a:srgbClr val="73C8FF"/>
-                </a:solidFill>
-                <a:latin typeface="Helvetica Neue"/>
-                <a:ea typeface="Helvetica Neue"/>
-                <a:cs typeface="Helvetica Neue"/>
-              </a:defRPr>
-            </a:pPr>
-            <a:r>
-              <a:rPr sz="1725" b="1">
-                <a:solidFill>
-                  <a:srgbClr val="73C8FF"/>
-                </a:solidFill>
-                <a:latin typeface="Helvetica Neue"/>
-                <a:ea typeface="Helvetica Neue"/>
-                <a:cs typeface="Helvetica Neue"/>
-              </a:rPr>
-              <a:t>01</a:t>
-            </a:r>
-          </a:p>
-        </p:txBody>
-      </p:sp>
-      <p:sp>
-        <p:nvSpPr>
-          <p:cNvPr id="7" name="exam-question-1">
-            <a:extLst xmlns:a="http://schemas.openxmlformats.org/drawingml/2006/main">
-              <a:ext uri="{FF2B5EF4-FFF2-40B4-BE49-F238E27FC236}">
-                <a16:creationId xmlns:a16="http://schemas.microsoft.com/office/drawing/2014/main" id="{EB048961-EB08-441B-86CC-3D196BF65C46}"/>
-              </a:ext>
-            </a:extLst>
-          </p:cNvPr>
-          <p:cNvSpPr>
-            <a:spLocks xmlns:a="http://schemas.openxmlformats.org/drawingml/2006/main" noGrp="1"/>
-          </p:cNvSpPr>
-          <p:nvPr/>
-        </p:nvSpPr>
-        <p:spPr>
-          <a:xfrm xmlns:a="http://schemas.openxmlformats.org/drawingml/2006/main">
-            <a:off x="1076325" y="2238375"/>
-            <a:ext cx="4762500" cy="895350"/>
+          <p:cNvPr id="5" name="section-title">
+            <a:extLst xmlns:a="http://schemas.openxmlformats.org/drawingml/2006/main">
+              <a:ext uri="{FF2B5EF4-FFF2-40B4-BE49-F238E27FC236}">
+                <a16:creationId xmlns:a16="http://schemas.microsoft.com/office/drawing/2014/main" id="{EED894D4-FEC6-470A-8C79-C5F37695FFEA}"/>
+              </a:ext>
+            </a:extLst>
+          </p:cNvPr>
+          <p:cNvSpPr>
+            <a:spLocks xmlns:a="http://schemas.openxmlformats.org/drawingml/2006/main" noGrp="1"/>
+          </p:cNvSpPr>
+          <p:nvPr/>
+        </p:nvSpPr>
+        <p:spPr>
+          <a:xfrm xmlns:a="http://schemas.openxmlformats.org/drawingml/2006/main">
+            <a:off x="390525" y="971550"/>
+            <a:ext cx="11144250" cy="971550"/>
           </a:xfrm>
           <a:prstGeom xmlns:a="http://schemas.openxmlformats.org/drawingml/2006/main" prst="rect">
             <a:avLst/>
@@ -7646,105 +9698,47 @@
           <a:lstStyle xmlns:a="http://schemas.openxmlformats.org/drawingml/2006/main"/>
           <a:p xmlns:a="http://schemas.openxmlformats.org/drawingml/2006/main">
             <a:pPr algn="l">
-              <a:defRPr sz="1575" b="1">
-                <a:solidFill>
-                  <a:srgbClr val="111111"/>
-                </a:solidFill>
-                <a:latin typeface="Helvetica Neue"/>
-                <a:ea typeface="Helvetica Neue"/>
-                <a:cs typeface="Helvetica Neue"/>
-              </a:defRPr>
-            </a:pPr>
-            <a:r>
-              <a:rPr sz="1575" b="1">
-                <a:solidFill>
-                  <a:srgbClr val="111111"/>
-                </a:solidFill>
-                <a:latin typeface="Helvetica Neue"/>
-                <a:ea typeface="Helvetica Neue"/>
-                <a:cs typeface="Helvetica Neue"/>
-              </a:rPr>
-              <a:t>Describe the RAG pipeline from ingestion to answer.</a:t>
-            </a:r>
-          </a:p>
-        </p:txBody>
-      </p:sp>
-      <p:sp>
-        <p:nvSpPr>
-          <p:cNvPr id="8" name="exam-number-2">
-            <a:extLst xmlns:a="http://schemas.openxmlformats.org/drawingml/2006/main">
-              <a:ext uri="{FF2B5EF4-FFF2-40B4-BE49-F238E27FC236}">
-                <a16:creationId xmlns:a16="http://schemas.microsoft.com/office/drawing/2014/main" id="{3B832BA7-1F5A-4946-B060-7E7D1D61F409}"/>
-              </a:ext>
-            </a:extLst>
-          </p:cNvPr>
-          <p:cNvSpPr>
-            <a:spLocks xmlns:a="http://schemas.openxmlformats.org/drawingml/2006/main" noGrp="1"/>
-          </p:cNvSpPr>
-          <p:nvPr/>
-        </p:nvSpPr>
-        <p:spPr>
-          <a:xfrm xmlns:a="http://schemas.openxmlformats.org/drawingml/2006/main">
-            <a:off x="6191250" y="2238375"/>
-            <a:ext cx="590550" cy="400050"/>
-          </a:xfrm>
-          <a:prstGeom xmlns:a="http://schemas.openxmlformats.org/drawingml/2006/main" prst="rect">
-            <a:avLst/>
-          </a:prstGeom>
-          <a:noFill xmlns:a="http://schemas.openxmlformats.org/drawingml/2006/main"/>
-          <a:ln xmlns:a="http://schemas.openxmlformats.org/drawingml/2006/main" w="0">
-            <a:noFill/>
-            <a:prstDash val="solid"/>
-          </a:ln>
-        </p:spPr>
-        <p:txBody>
-          <a:bodyPr xmlns:a="http://schemas.openxmlformats.org/drawingml/2006/main" anchor="t">
-            <a:noAutofit/>
-          </a:bodyPr>
-          <a:lstStyle xmlns:a="http://schemas.openxmlformats.org/drawingml/2006/main"/>
-          <a:p xmlns:a="http://schemas.openxmlformats.org/drawingml/2006/main">
-            <a:pPr algn="l">
-              <a:defRPr sz="1725" b="1">
-                <a:solidFill>
-                  <a:srgbClr val="73C8FF"/>
-                </a:solidFill>
-                <a:latin typeface="Helvetica Neue"/>
-                <a:ea typeface="Helvetica Neue"/>
-                <a:cs typeface="Helvetica Neue"/>
-              </a:defRPr>
-            </a:pPr>
-            <a:r>
-              <a:rPr sz="1725" b="1">
-                <a:solidFill>
-                  <a:srgbClr val="73C8FF"/>
-                </a:solidFill>
-                <a:latin typeface="Helvetica Neue"/>
-                <a:ea typeface="Helvetica Neue"/>
-                <a:cs typeface="Helvetica Neue"/>
-              </a:rPr>
-              <a:t>02</a:t>
-            </a:r>
-          </a:p>
-        </p:txBody>
-      </p:sp>
-      <p:sp>
-        <p:nvSpPr>
-          <p:cNvPr id="9" name="exam-question-2">
-            <a:extLst xmlns:a="http://schemas.openxmlformats.org/drawingml/2006/main">
-              <a:ext uri="{FF2B5EF4-FFF2-40B4-BE49-F238E27FC236}">
-                <a16:creationId xmlns:a16="http://schemas.microsoft.com/office/drawing/2014/main" id="{E0296580-BD3B-4A7A-9F13-04E695462E79}"/>
-              </a:ext>
-            </a:extLst>
-          </p:cNvPr>
-          <p:cNvSpPr>
-            <a:spLocks xmlns:a="http://schemas.openxmlformats.org/drawingml/2006/main" noGrp="1"/>
-          </p:cNvSpPr>
-          <p:nvPr/>
-        </p:nvSpPr>
-        <p:spPr>
-          <a:xfrm xmlns:a="http://schemas.openxmlformats.org/drawingml/2006/main">
-            <a:off x="6877050" y="2238375"/>
-            <a:ext cx="4762500" cy="895350"/>
+              <a:defRPr sz="3000" b="1">
+                <a:solidFill>
+                  <a:srgbClr val="111111"/>
+                </a:solidFill>
+                <a:latin typeface="Helvetica Neue"/>
+                <a:ea typeface="Helvetica Neue"/>
+                <a:cs typeface="Helvetica Neue"/>
+              </a:defRPr>
+            </a:pPr>
+            <a:r>
+              <a:rPr sz="3000" b="1">
+                <a:solidFill>
+                  <a:srgbClr val="111111"/>
+                </a:solidFill>
+                <a:latin typeface="Helvetica Neue"/>
+                <a:ea typeface="Helvetica Neue"/>
+                <a:cs typeface="Helvetica Neue"/>
+              </a:rPr>
+              <a:t>Provenance and abstention make retrieval auditable</a:t>
+            </a:r>
+          </a:p>
+        </p:txBody>
+      </p:sp>
+      <p:sp>
+        <p:nvSpPr>
+          <p:cNvPr id="6" name="section-explanation">
+            <a:extLst xmlns:a="http://schemas.openxmlformats.org/drawingml/2006/main">
+              <a:ext uri="{FF2B5EF4-FFF2-40B4-BE49-F238E27FC236}">
+                <a16:creationId xmlns:a16="http://schemas.microsoft.com/office/drawing/2014/main" id="{EABA255A-1FFD-465A-A94C-700FBD39A8A2}"/>
+              </a:ext>
+            </a:extLst>
+          </p:cNvPr>
+          <p:cNvSpPr>
+            <a:spLocks xmlns:a="http://schemas.openxmlformats.org/drawingml/2006/main" noGrp="1"/>
+          </p:cNvSpPr>
+          <p:nvPr/>
+        </p:nvSpPr>
+        <p:spPr>
+          <a:xfrm xmlns:a="http://schemas.openxmlformats.org/drawingml/2006/main">
+            <a:off x="390525" y="2381250"/>
+            <a:ext cx="4524375" cy="2905125"/>
           </a:xfrm>
           <a:prstGeom xmlns:a="http://schemas.openxmlformats.org/drawingml/2006/main" prst="rect">
             <a:avLst/>
@@ -7762,105 +9756,80 @@
           <a:lstStyle xmlns:a="http://schemas.openxmlformats.org/drawingml/2006/main"/>
           <a:p xmlns:a="http://schemas.openxmlformats.org/drawingml/2006/main">
             <a:pPr algn="l">
-              <a:defRPr sz="1575" b="1">
-                <a:solidFill>
-                  <a:srgbClr val="111111"/>
-                </a:solidFill>
-                <a:latin typeface="Helvetica Neue"/>
-                <a:ea typeface="Helvetica Neue"/>
-                <a:cs typeface="Helvetica Neue"/>
-              </a:defRPr>
-            </a:pPr>
-            <a:r>
-              <a:rPr sz="1575" b="1">
-                <a:solidFill>
-                  <a:srgbClr val="111111"/>
-                </a:solidFill>
-                <a:latin typeface="Helvetica Neue"/>
-                <a:ea typeface="Helvetica Neue"/>
-                <a:cs typeface="Helvetica Neue"/>
-              </a:rPr>
-              <a:t>How do chunk size and overlap affect retrieval?</a:t>
-            </a:r>
-          </a:p>
-        </p:txBody>
-      </p:sp>
-      <p:sp>
-        <p:nvSpPr>
-          <p:cNvPr id="10" name="exam-number-3">
-            <a:extLst xmlns:a="http://schemas.openxmlformats.org/drawingml/2006/main">
-              <a:ext uri="{FF2B5EF4-FFF2-40B4-BE49-F238E27FC236}">
-                <a16:creationId xmlns:a16="http://schemas.microsoft.com/office/drawing/2014/main" id="{554E63C3-E11B-47A6-801E-25C41FB81D09}"/>
-              </a:ext>
-            </a:extLst>
-          </p:cNvPr>
-          <p:cNvSpPr>
-            <a:spLocks xmlns:a="http://schemas.openxmlformats.org/drawingml/2006/main" noGrp="1"/>
-          </p:cNvSpPr>
-          <p:nvPr/>
-        </p:nvSpPr>
-        <p:spPr>
-          <a:xfrm xmlns:a="http://schemas.openxmlformats.org/drawingml/2006/main">
-            <a:off x="390525" y="3495675"/>
-            <a:ext cx="590550" cy="400050"/>
-          </a:xfrm>
-          <a:prstGeom xmlns:a="http://schemas.openxmlformats.org/drawingml/2006/main" prst="rect">
-            <a:avLst/>
-          </a:prstGeom>
-          <a:noFill xmlns:a="http://schemas.openxmlformats.org/drawingml/2006/main"/>
-          <a:ln xmlns:a="http://schemas.openxmlformats.org/drawingml/2006/main" w="0">
-            <a:noFill/>
-            <a:prstDash val="solid"/>
-          </a:ln>
-        </p:spPr>
-        <p:txBody>
-          <a:bodyPr xmlns:a="http://schemas.openxmlformats.org/drawingml/2006/main" anchor="t">
-            <a:noAutofit/>
-          </a:bodyPr>
-          <a:lstStyle xmlns:a="http://schemas.openxmlformats.org/drawingml/2006/main"/>
-          <a:p xmlns:a="http://schemas.openxmlformats.org/drawingml/2006/main">
-            <a:pPr algn="l">
-              <a:defRPr sz="1725" b="1">
-                <a:solidFill>
-                  <a:srgbClr val="73C8FF"/>
-                </a:solidFill>
-                <a:latin typeface="Helvetica Neue"/>
-                <a:ea typeface="Helvetica Neue"/>
-                <a:cs typeface="Helvetica Neue"/>
-              </a:defRPr>
-            </a:pPr>
-            <a:r>
-              <a:rPr sz="1725" b="1">
-                <a:solidFill>
-                  <a:srgbClr val="73C8FF"/>
-                </a:solidFill>
-                <a:latin typeface="Helvetica Neue"/>
-                <a:ea typeface="Helvetica Neue"/>
-                <a:cs typeface="Helvetica Neue"/>
-              </a:rPr>
-              <a:t>03</a:t>
-            </a:r>
-          </a:p>
-        </p:txBody>
-      </p:sp>
-      <p:sp>
-        <p:nvSpPr>
-          <p:cNvPr id="11" name="exam-question-3">
-            <a:extLst xmlns:a="http://schemas.openxmlformats.org/drawingml/2006/main">
-              <a:ext uri="{FF2B5EF4-FFF2-40B4-BE49-F238E27FC236}">
-                <a16:creationId xmlns:a16="http://schemas.microsoft.com/office/drawing/2014/main" id="{BFAADC9F-C1D5-4E14-ADC8-79BFC36B1C74}"/>
-              </a:ext>
-            </a:extLst>
-          </p:cNvPr>
-          <p:cNvSpPr>
-            <a:spLocks xmlns:a="http://schemas.openxmlformats.org/drawingml/2006/main" noGrp="1"/>
-          </p:cNvSpPr>
-          <p:nvPr/>
-        </p:nvSpPr>
-        <p:spPr>
-          <a:xfrm xmlns:a="http://schemas.openxmlformats.org/drawingml/2006/main">
-            <a:off x="1076325" y="3495675"/>
-            <a:ext cx="4762500" cy="895350"/>
+              <a:defRPr sz="1875" b="0">
+                <a:solidFill>
+                  <a:srgbClr val="5B5B57"/>
+                </a:solidFill>
+                <a:latin typeface="Helvetica Neue"/>
+                <a:ea typeface="Helvetica Neue"/>
+                <a:cs typeface="Helvetica Neue"/>
+              </a:defRPr>
+            </a:pPr>
+            <a:r>
+              <a:rPr sz="1875" b="0">
+                <a:solidFill>
+                  <a:srgbClr val="5B5B57"/>
+                </a:solidFill>
+                <a:latin typeface="Helvetica Neue"/>
+                <a:ea typeface="Helvetica Neue"/>
+                <a:cs typeface="Helvetica Neue"/>
+              </a:rPr>
+              <a:t>Carry source IDs and text through every retrieval step. Check whether the evidence supports the answer separately from whether a citation ID exists. A bounded repair attempt should end in an answer or an explicit abstention.</a:t>
+            </a:r>
+          </a:p>
+        </p:txBody>
+      </p:sp>
+      <p:sp>
+        <p:nvSpPr>
+          <p:cNvPr id="7" name="column-rule">
+            <a:extLst xmlns:a="http://schemas.openxmlformats.org/drawingml/2006/main">
+              <a:ext uri="{FF2B5EF4-FFF2-40B4-BE49-F238E27FC236}">
+                <a16:creationId xmlns:a16="http://schemas.microsoft.com/office/drawing/2014/main" id="{319C0897-6F07-4BED-8FDA-1AC9B7A3F4AC}"/>
+              </a:ext>
+            </a:extLst>
+          </p:cNvPr>
+          <p:cNvSpPr>
+            <a:spLocks xmlns:a="http://schemas.openxmlformats.org/drawingml/2006/main" noGrp="1"/>
+          </p:cNvSpPr>
+          <p:nvPr/>
+        </p:nvSpPr>
+        <p:spPr>
+          <a:xfrm xmlns:a="http://schemas.openxmlformats.org/drawingml/2006/main">
+            <a:off x="5334000" y="2343150"/>
+            <a:ext cx="47625" cy="3257550"/>
+          </a:xfrm>
+          <a:prstGeom xmlns:a="http://schemas.openxmlformats.org/drawingml/2006/main" prst="rect">
+            <a:avLst/>
+          </a:prstGeom>
+          <a:solidFill xmlns:a="http://schemas.openxmlformats.org/drawingml/2006/main">
+            <a:srgbClr val="73C8FF"/>
+          </a:solidFill>
+          <a:ln xmlns:a="http://schemas.openxmlformats.org/drawingml/2006/main" w="0">
+            <a:solidFill>
+              <a:srgbClr val="73C8FF"/>
+            </a:solidFill>
+            <a:prstDash val="solid"/>
+          </a:ln>
+        </p:spPr>
+      </p:sp>
+      <p:sp>
+        <p:nvSpPr>
+          <p:cNvPr id="8" name="section-points">
+            <a:extLst xmlns:a="http://schemas.openxmlformats.org/drawingml/2006/main">
+              <a:ext uri="{FF2B5EF4-FFF2-40B4-BE49-F238E27FC236}">
+                <a16:creationId xmlns:a16="http://schemas.microsoft.com/office/drawing/2014/main" id="{133E20B6-F3E7-464F-89AB-312A7CBBCCDD}"/>
+              </a:ext>
+            </a:extLst>
+          </p:cNvPr>
+          <p:cNvSpPr>
+            <a:spLocks xmlns:a="http://schemas.openxmlformats.org/drawingml/2006/main" noGrp="1"/>
+          </p:cNvSpPr>
+          <p:nvPr/>
+        </p:nvSpPr>
+        <p:spPr>
+          <a:xfrm xmlns:a="http://schemas.openxmlformats.org/drawingml/2006/main">
+            <a:off x="5857875" y="2343150"/>
+            <a:ext cx="5572125" cy="3429000"/>
           </a:xfrm>
           <a:prstGeom xmlns:a="http://schemas.openxmlformats.org/drawingml/2006/main" prst="rect">
             <a:avLst/>
@@ -7878,67 +9847,37 @@
           <a:lstStyle xmlns:a="http://schemas.openxmlformats.org/drawingml/2006/main"/>
           <a:p xmlns:a="http://schemas.openxmlformats.org/drawingml/2006/main">
             <a:pPr algn="l">
-              <a:defRPr sz="1575" b="1">
-                <a:solidFill>
-                  <a:srgbClr val="111111"/>
-                </a:solidFill>
-                <a:latin typeface="Helvetica Neue"/>
-                <a:ea typeface="Helvetica Neue"/>
-                <a:cs typeface="Helvetica Neue"/>
-              </a:defRPr>
-            </a:pPr>
-            <a:r>
-              <a:rPr sz="1575" b="1">
-                <a:solidFill>
-                  <a:srgbClr val="111111"/>
-                </a:solidFill>
-                <a:latin typeface="Helvetica Neue"/>
-                <a:ea typeface="Helvetica Neue"/>
-                <a:cs typeface="Helvetica Neue"/>
-              </a:rPr>
-              <a:t>Why can top-k retrieval dilute an answer?</a:t>
-            </a:r>
-          </a:p>
-        </p:txBody>
-      </p:sp>
-      <p:sp>
-        <p:nvSpPr>
-          <p:cNvPr id="12" name="exam-number-4">
-            <a:extLst xmlns:a="http://schemas.openxmlformats.org/drawingml/2006/main">
-              <a:ext uri="{FF2B5EF4-FFF2-40B4-BE49-F238E27FC236}">
-                <a16:creationId xmlns:a16="http://schemas.microsoft.com/office/drawing/2014/main" id="{5B85A626-51D4-4944-AD8D-7B1D1D5915E7}"/>
-              </a:ext>
-            </a:extLst>
-          </p:cNvPr>
-          <p:cNvSpPr>
-            <a:spLocks xmlns:a="http://schemas.openxmlformats.org/drawingml/2006/main" noGrp="1"/>
-          </p:cNvSpPr>
-          <p:nvPr/>
-        </p:nvSpPr>
-        <p:spPr>
-          <a:xfrm xmlns:a="http://schemas.openxmlformats.org/drawingml/2006/main">
-            <a:off x="6191250" y="3495675"/>
-            <a:ext cx="590550" cy="400050"/>
-          </a:xfrm>
-          <a:prstGeom xmlns:a="http://schemas.openxmlformats.org/drawingml/2006/main" prst="rect">
-            <a:avLst/>
-          </a:prstGeom>
-          <a:noFill xmlns:a="http://schemas.openxmlformats.org/drawingml/2006/main"/>
-          <a:ln xmlns:a="http://schemas.openxmlformats.org/drawingml/2006/main" w="0">
-            <a:noFill/>
-            <a:prstDash val="solid"/>
-          </a:ln>
-        </p:spPr>
-        <p:txBody>
-          <a:bodyPr xmlns:a="http://schemas.openxmlformats.org/drawingml/2006/main" anchor="t">
-            <a:noAutofit/>
-          </a:bodyPr>
-          <a:lstStyle xmlns:a="http://schemas.openxmlformats.org/drawingml/2006/main"/>
+              <a:defRPr sz="1725" b="1">
+                <a:solidFill>
+                  <a:srgbClr val="111111"/>
+                </a:solidFill>
+                <a:latin typeface="Helvetica Neue"/>
+                <a:ea typeface="Helvetica Neue"/>
+                <a:cs typeface="Helvetica Neue"/>
+              </a:defRPr>
+            </a:pPr>
+            <a:r>
+              <a:rPr sz="1725" b="1">
+                <a:solidFill>
+                  <a:srgbClr val="111111"/>
+                </a:solidFill>
+                <a:latin typeface="Helvetica Neue"/>
+                <a:ea typeface="Helvetica Neue"/>
+                <a:cs typeface="Helvetica Neue"/>
+              </a:rPr>
+              <a:t>01  Compare against static retrieval on the same questions.</a:t>
+            </a:r>
+          </a:p>
+          <a:p xmlns:a="http://schemas.openxmlformats.org/drawingml/2006/main">
+            <a:r>
+              <a:t/>
+            </a:r>
+          </a:p>
           <a:p xmlns:a="http://schemas.openxmlformats.org/drawingml/2006/main">
             <a:pPr algn="l">
               <a:defRPr sz="1725" b="1">
                 <a:solidFill>
-                  <a:srgbClr val="73C8FF"/>
+                  <a:srgbClr val="111111"/>
                 </a:solidFill>
                 <a:latin typeface="Helvetica Neue"/>
                 <a:ea typeface="Helvetica Neue"/>
@@ -7948,113 +9887,25 @@
             <a:r>
               <a:rPr sz="1725" b="1">
                 <a:solidFill>
-                  <a:srgbClr val="73C8FF"/>
-                </a:solidFill>
-                <a:latin typeface="Helvetica Neue"/>
-                <a:ea typeface="Helvetica Neue"/>
-                <a:cs typeface="Helvetica Neue"/>
-              </a:rPr>
-              <a:t>04</a:t>
-            </a:r>
-          </a:p>
-        </p:txBody>
-      </p:sp>
-      <p:sp>
-        <p:nvSpPr>
-          <p:cNvPr id="13" name="exam-question-4">
-            <a:extLst xmlns:a="http://schemas.openxmlformats.org/drawingml/2006/main">
-              <a:ext uri="{FF2B5EF4-FFF2-40B4-BE49-F238E27FC236}">
-                <a16:creationId xmlns:a16="http://schemas.microsoft.com/office/drawing/2014/main" id="{BA4B260C-DF1A-4B96-80C9-FBDC1A26289F}"/>
-              </a:ext>
-            </a:extLst>
-          </p:cNvPr>
-          <p:cNvSpPr>
-            <a:spLocks xmlns:a="http://schemas.openxmlformats.org/drawingml/2006/main" noGrp="1"/>
-          </p:cNvSpPr>
-          <p:nvPr/>
-        </p:nvSpPr>
-        <p:spPr>
-          <a:xfrm xmlns:a="http://schemas.openxmlformats.org/drawingml/2006/main">
-            <a:off x="6877050" y="3495675"/>
-            <a:ext cx="4762500" cy="895350"/>
-          </a:xfrm>
-          <a:prstGeom xmlns:a="http://schemas.openxmlformats.org/drawingml/2006/main" prst="rect">
-            <a:avLst/>
-          </a:prstGeom>
-          <a:noFill xmlns:a="http://schemas.openxmlformats.org/drawingml/2006/main"/>
-          <a:ln xmlns:a="http://schemas.openxmlformats.org/drawingml/2006/main" w="0">
-            <a:noFill/>
-            <a:prstDash val="solid"/>
-          </a:ln>
-        </p:spPr>
-        <p:txBody>
-          <a:bodyPr xmlns:a="http://schemas.openxmlformats.org/drawingml/2006/main" anchor="t">
-            <a:normAutofit fontScale="100000"/>
-          </a:bodyPr>
-          <a:lstStyle xmlns:a="http://schemas.openxmlformats.org/drawingml/2006/main"/>
-          <a:p xmlns:a="http://schemas.openxmlformats.org/drawingml/2006/main">
-            <a:pPr algn="l">
-              <a:defRPr sz="1575" b="1">
-                <a:solidFill>
-                  <a:srgbClr val="111111"/>
-                </a:solidFill>
-                <a:latin typeface="Helvetica Neue"/>
-                <a:ea typeface="Helvetica Neue"/>
-                <a:cs typeface="Helvetica Neue"/>
-              </a:defRPr>
-            </a:pPr>
-            <a:r>
-              <a:rPr sz="1575" b="1">
-                <a:solidFill>
-                  <a:srgbClr val="111111"/>
-                </a:solidFill>
-                <a:latin typeface="Helvetica Neue"/>
-                <a:ea typeface="Helvetica Neue"/>
-                <a:cs typeface="Helvetica Neue"/>
-              </a:rPr>
-              <a:t>Compare hybrid search, reranking, and query transformation.</a:t>
-            </a:r>
-          </a:p>
-        </p:txBody>
-      </p:sp>
-      <p:sp>
-        <p:nvSpPr>
-          <p:cNvPr id="14" name="exam-number-5">
-            <a:extLst xmlns:a="http://schemas.openxmlformats.org/drawingml/2006/main">
-              <a:ext uri="{FF2B5EF4-FFF2-40B4-BE49-F238E27FC236}">
-                <a16:creationId xmlns:a16="http://schemas.microsoft.com/office/drawing/2014/main" id="{DA824C39-4A5D-4781-A293-5410D4BEA8FD}"/>
-              </a:ext>
-            </a:extLst>
-          </p:cNvPr>
-          <p:cNvSpPr>
-            <a:spLocks xmlns:a="http://schemas.openxmlformats.org/drawingml/2006/main" noGrp="1"/>
-          </p:cNvSpPr>
-          <p:nvPr/>
-        </p:nvSpPr>
-        <p:spPr>
-          <a:xfrm xmlns:a="http://schemas.openxmlformats.org/drawingml/2006/main">
-            <a:off x="390525" y="4752975"/>
-            <a:ext cx="590550" cy="400050"/>
-          </a:xfrm>
-          <a:prstGeom xmlns:a="http://schemas.openxmlformats.org/drawingml/2006/main" prst="rect">
-            <a:avLst/>
-          </a:prstGeom>
-          <a:noFill xmlns:a="http://schemas.openxmlformats.org/drawingml/2006/main"/>
-          <a:ln xmlns:a="http://schemas.openxmlformats.org/drawingml/2006/main" w="0">
-            <a:noFill/>
-            <a:prstDash val="solid"/>
-          </a:ln>
-        </p:spPr>
-        <p:txBody>
-          <a:bodyPr xmlns:a="http://schemas.openxmlformats.org/drawingml/2006/main" anchor="t">
-            <a:noAutofit/>
-          </a:bodyPr>
-          <a:lstStyle xmlns:a="http://schemas.openxmlformats.org/drawingml/2006/main"/>
+                  <a:srgbClr val="111111"/>
+                </a:solidFill>
+                <a:latin typeface="Helvetica Neue"/>
+                <a:ea typeface="Helvetica Neue"/>
+                <a:cs typeface="Helvetica Neue"/>
+              </a:rPr>
+              <a:t>02  Keep conflicting evidence visible.</a:t>
+            </a:r>
+          </a:p>
+          <a:p xmlns:a="http://schemas.openxmlformats.org/drawingml/2006/main">
+            <a:r>
+              <a:t/>
+            </a:r>
+          </a:p>
           <a:p xmlns:a="http://schemas.openxmlformats.org/drawingml/2006/main">
             <a:pPr algn="l">
               <a:defRPr sz="1725" b="1">
                 <a:solidFill>
-                  <a:srgbClr val="73C8FF"/>
+                  <a:srgbClr val="111111"/>
                 </a:solidFill>
                 <a:latin typeface="Helvetica Neue"/>
                 <a:ea typeface="Helvetica Neue"/>
@@ -8064,187 +9915,13 @@
             <a:r>
               <a:rPr sz="1725" b="1">
                 <a:solidFill>
-                  <a:srgbClr val="73C8FF"/>
-                </a:solidFill>
-                <a:latin typeface="Helvetica Neue"/>
-                <a:ea typeface="Helvetica Neue"/>
-                <a:cs typeface="Helvetica Neue"/>
-              </a:rPr>
-              <a:t>05</a:t>
-            </a:r>
-          </a:p>
-        </p:txBody>
-      </p:sp>
-      <p:sp>
-        <p:nvSpPr>
-          <p:cNvPr id="15" name="exam-question-5">
-            <a:extLst xmlns:a="http://schemas.openxmlformats.org/drawingml/2006/main">
-              <a:ext uri="{FF2B5EF4-FFF2-40B4-BE49-F238E27FC236}">
-                <a16:creationId xmlns:a16="http://schemas.microsoft.com/office/drawing/2014/main" id="{F22256BB-9C67-4193-B72F-D49B0B11A89B}"/>
-              </a:ext>
-            </a:extLst>
-          </p:cNvPr>
-          <p:cNvSpPr>
-            <a:spLocks xmlns:a="http://schemas.openxmlformats.org/drawingml/2006/main" noGrp="1"/>
-          </p:cNvSpPr>
-          <p:nvPr/>
-        </p:nvSpPr>
-        <p:spPr>
-          <a:xfrm xmlns:a="http://schemas.openxmlformats.org/drawingml/2006/main">
-            <a:off x="1076325" y="4752975"/>
-            <a:ext cx="4762500" cy="895350"/>
-          </a:xfrm>
-          <a:prstGeom xmlns:a="http://schemas.openxmlformats.org/drawingml/2006/main" prst="rect">
-            <a:avLst/>
-          </a:prstGeom>
-          <a:noFill xmlns:a="http://schemas.openxmlformats.org/drawingml/2006/main"/>
-          <a:ln xmlns:a="http://schemas.openxmlformats.org/drawingml/2006/main" w="0">
-            <a:noFill/>
-            <a:prstDash val="solid"/>
-          </a:ln>
-        </p:spPr>
-        <p:txBody>
-          <a:bodyPr xmlns:a="http://schemas.openxmlformats.org/drawingml/2006/main" anchor="t">
-            <a:normAutofit fontScale="100000"/>
-          </a:bodyPr>
-          <a:lstStyle xmlns:a="http://schemas.openxmlformats.org/drawingml/2006/main"/>
-          <a:p xmlns:a="http://schemas.openxmlformats.org/drawingml/2006/main">
-            <a:pPr algn="l">
-              <a:defRPr sz="1575" b="1">
-                <a:solidFill>
-                  <a:srgbClr val="111111"/>
-                </a:solidFill>
-                <a:latin typeface="Helvetica Neue"/>
-                <a:ea typeface="Helvetica Neue"/>
-                <a:cs typeface="Helvetica Neue"/>
-              </a:defRPr>
-            </a:pPr>
-            <a:r>
-              <a:rPr sz="1575" b="1">
-                <a:solidFill>
-                  <a:srgbClr val="111111"/>
-                </a:solidFill>
-                <a:latin typeface="Helvetica Neue"/>
-                <a:ea typeface="Helvetica Neue"/>
-                <a:cs typeface="Helvetica Neue"/>
-              </a:rPr>
-              <a:t>What is faithfulness and why is it important?</a:t>
-            </a:r>
-          </a:p>
-        </p:txBody>
-      </p:sp>
-      <p:sp>
-        <p:nvSpPr>
-          <p:cNvPr id="16" name="exam-number-6">
-            <a:extLst xmlns:a="http://schemas.openxmlformats.org/drawingml/2006/main">
-              <a:ext uri="{FF2B5EF4-FFF2-40B4-BE49-F238E27FC236}">
-                <a16:creationId xmlns:a16="http://schemas.microsoft.com/office/drawing/2014/main" id="{2E4E9381-41B8-443C-A83E-A47C7618329C}"/>
-              </a:ext>
-            </a:extLst>
-          </p:cNvPr>
-          <p:cNvSpPr>
-            <a:spLocks xmlns:a="http://schemas.openxmlformats.org/drawingml/2006/main" noGrp="1"/>
-          </p:cNvSpPr>
-          <p:nvPr/>
-        </p:nvSpPr>
-        <p:spPr>
-          <a:xfrm xmlns:a="http://schemas.openxmlformats.org/drawingml/2006/main">
-            <a:off x="6191250" y="4752975"/>
-            <a:ext cx="590550" cy="400050"/>
-          </a:xfrm>
-          <a:prstGeom xmlns:a="http://schemas.openxmlformats.org/drawingml/2006/main" prst="rect">
-            <a:avLst/>
-          </a:prstGeom>
-          <a:noFill xmlns:a="http://schemas.openxmlformats.org/drawingml/2006/main"/>
-          <a:ln xmlns:a="http://schemas.openxmlformats.org/drawingml/2006/main" w="0">
-            <a:noFill/>
-            <a:prstDash val="solid"/>
-          </a:ln>
-        </p:spPr>
-        <p:txBody>
-          <a:bodyPr xmlns:a="http://schemas.openxmlformats.org/drawingml/2006/main" anchor="t">
-            <a:noAutofit/>
-          </a:bodyPr>
-          <a:lstStyle xmlns:a="http://schemas.openxmlformats.org/drawingml/2006/main"/>
-          <a:p xmlns:a="http://schemas.openxmlformats.org/drawingml/2006/main">
-            <a:pPr algn="l">
-              <a:defRPr sz="1725" b="1">
-                <a:solidFill>
-                  <a:srgbClr val="73C8FF"/>
-                </a:solidFill>
-                <a:latin typeface="Helvetica Neue"/>
-                <a:ea typeface="Helvetica Neue"/>
-                <a:cs typeface="Helvetica Neue"/>
-              </a:defRPr>
-            </a:pPr>
-            <a:r>
-              <a:rPr sz="1725" b="1">
-                <a:solidFill>
-                  <a:srgbClr val="73C8FF"/>
-                </a:solidFill>
-                <a:latin typeface="Helvetica Neue"/>
-                <a:ea typeface="Helvetica Neue"/>
-                <a:cs typeface="Helvetica Neue"/>
-              </a:rPr>
-              <a:t>06</a:t>
-            </a:r>
-          </a:p>
-        </p:txBody>
-      </p:sp>
-      <p:sp>
-        <p:nvSpPr>
-          <p:cNvPr id="17" name="exam-question-6">
-            <a:extLst xmlns:a="http://schemas.openxmlformats.org/drawingml/2006/main">
-              <a:ext uri="{FF2B5EF4-FFF2-40B4-BE49-F238E27FC236}">
-                <a16:creationId xmlns:a16="http://schemas.microsoft.com/office/drawing/2014/main" id="{FA883A7D-3C8D-455F-96B4-EBBB81206AFD}"/>
-              </a:ext>
-            </a:extLst>
-          </p:cNvPr>
-          <p:cNvSpPr>
-            <a:spLocks xmlns:a="http://schemas.openxmlformats.org/drawingml/2006/main" noGrp="1"/>
-          </p:cNvSpPr>
-          <p:nvPr/>
-        </p:nvSpPr>
-        <p:spPr>
-          <a:xfrm xmlns:a="http://schemas.openxmlformats.org/drawingml/2006/main">
-            <a:off x="6877050" y="4752975"/>
-            <a:ext cx="4762500" cy="895350"/>
-          </a:xfrm>
-          <a:prstGeom xmlns:a="http://schemas.openxmlformats.org/drawingml/2006/main" prst="rect">
-            <a:avLst/>
-          </a:prstGeom>
-          <a:noFill xmlns:a="http://schemas.openxmlformats.org/drawingml/2006/main"/>
-          <a:ln xmlns:a="http://schemas.openxmlformats.org/drawingml/2006/main" w="0">
-            <a:noFill/>
-            <a:prstDash val="solid"/>
-          </a:ln>
-        </p:spPr>
-        <p:txBody>
-          <a:bodyPr xmlns:a="http://schemas.openxmlformats.org/drawingml/2006/main" anchor="t">
-            <a:normAutofit fontScale="100000"/>
-          </a:bodyPr>
-          <a:lstStyle xmlns:a="http://schemas.openxmlformats.org/drawingml/2006/main"/>
-          <a:p xmlns:a="http://schemas.openxmlformats.org/drawingml/2006/main">
-            <a:pPr algn="l">
-              <a:defRPr sz="1575" b="1">
-                <a:solidFill>
-                  <a:srgbClr val="111111"/>
-                </a:solidFill>
-                <a:latin typeface="Helvetica Neue"/>
-                <a:ea typeface="Helvetica Neue"/>
-                <a:cs typeface="Helvetica Neue"/>
-              </a:defRPr>
-            </a:pPr>
-            <a:r>
-              <a:rPr sz="1575" b="1">
-                <a:solidFill>
-                  <a:srgbClr val="111111"/>
-                </a:solidFill>
-                <a:latin typeface="Helvetica Neue"/>
-                <a:ea typeface="Helvetica Neue"/>
-                <a:cs typeface="Helvetica Neue"/>
-              </a:rPr>
-              <a:t>When is GraphRAG preferable to vector RAG?</a:t>
+                  <a:srgbClr val="111111"/>
+                </a:solidFill>
+                <a:latin typeface="Helvetica Neue"/>
+                <a:ea typeface="Helvetica Neue"/>
+                <a:cs typeface="Helvetica Neue"/>
+              </a:rPr>
+              <a:t>03  Treat a rewrite as optional and measurable.</a:t>
             </a:r>
           </a:p>
         </p:txBody>
@@ -8252,7 +9929,7 @@
     </p:spTree>
     <p:extLst>
       <p:ext uri="{BB962C8B-B14F-4D97-AF65-F5344CB8AC3E}">
-        <p14:creationId xmlns:p14="http://schemas.microsoft.com/office/powerpoint/2010/main" val="1923719958"/>
+        <p14:creationId xmlns:p14="http://schemas.microsoft.com/office/powerpoint/2010/main" val="158825096"/>
       </p:ext>
     </p:extLst>
   </p:cSld>
@@ -8260,9 +9937,9 @@
 </file>
 
 <file path=ppt/theme/theme1.xml><?xml version="1.0" encoding="utf-8"?>
-<a:theme xmlns:a="http://schemas.openxmlformats.org/drawingml/2006/main" name="ChatGPT">
+<a:theme xmlns:a="http://schemas.openxmlformats.org/drawingml/2006/main" name="Course">
   <a:themeElements>
-    <a:clrScheme name="ChatGPT">
+    <a:clrScheme name="Course">
       <a:dk1>
         <a:srgbClr val="000000"/>
       </a:dk1>
@@ -8312,7 +9989,7 @@
         <a:cs typeface="Calibri"/>
       </a:minorFont>
     </a:fontScheme>
-    <a:fmtScheme name="ChatGPT">
+    <a:fmtScheme name="Course">
       <a:fillStyleLst>
         <a:solidFill>
           <a:schemeClr val="phClr"/>
